--- a/slide/L1_perche_secure_coding.pptx
+++ b/slide/L1_perche_secure_coding.pptx
@@ -17,6 +17,8 @@
     <p:sldId id="265" r:id="rId16"/>
     <p:sldId id="266" r:id="rId17"/>
     <p:sldId id="267" r:id="rId18"/>
+    <p:sldId id="268" r:id="rId19"/>
+    <p:sldId id="269" r:id="rId20"/>
   </p:sldIdLst>
   <p:sldSz cx="12191695" cy="6858000" type="screen4x3"/>
   <p:notesSz cx="6858000" cy="9144000"/>
@@ -3114,7 +3116,7 @@
             <a:avLst/>
           </a:prstGeom>
           <a:solidFill>
-            <a:srgbClr val="0F2D52"/>
+            <a:srgbClr val="081B33"/>
           </a:solidFill>
           <a:ln>
             <a:noFill/>
@@ -3150,8 +3152,8 @@
         </p:nvSpPr>
         <p:spPr>
           <a:xfrm>
-            <a:off x="0" y="914400"/>
-            <a:ext cx="365760" cy="2286000"/>
+            <a:off x="0" y="0"/>
+            <a:ext cx="12191695" cy="137160"/>
           </a:xfrm>
           <a:prstGeom prst="rect">
             <a:avLst/>
@@ -3187,14 +3189,186 @@
       </p:sp>
       <p:sp>
         <p:nvSpPr>
-          <p:cNvPr id="4" name="TextBox 3"/>
+          <p:cNvPr id="4" name="Oval 3"/>
+          <p:cNvSpPr/>
+          <p:nvPr/>
+        </p:nvSpPr>
+        <p:spPr>
+          <a:xfrm>
+            <a:off x="8686800" y="-914400"/>
+            <a:ext cx="2743200" cy="2743200"/>
+          </a:xfrm>
+          <a:prstGeom prst="ellipse">
+            <a:avLst/>
+          </a:prstGeom>
+          <a:noFill/>
+          <a:ln w="25400">
+            <a:solidFill>
+              <a:srgbClr val="00A0B0"/>
+            </a:solidFill>
+          </a:ln>
+        </p:spPr>
+        <p:style>
+          <a:lnRef idx="1">
+            <a:schemeClr val="accent1"/>
+          </a:lnRef>
+          <a:fillRef idx="3">
+            <a:schemeClr val="accent1"/>
+          </a:fillRef>
+          <a:effectRef idx="2">
+            <a:schemeClr val="accent1"/>
+          </a:effectRef>
+          <a:fontRef idx="minor">
+            <a:schemeClr val="lt1"/>
+          </a:fontRef>
+        </p:style>
+        <p:txBody>
+          <a:bodyPr rtlCol="0" anchor="ctr"/>
+          <a:lstStyle/>
+          <a:p>
+            <a:pPr algn="ctr"/>
+          </a:p>
+        </p:txBody>
+      </p:sp>
+      <p:sp>
+        <p:nvSpPr>
+          <p:cNvPr id="5" name="Oval 4"/>
+          <p:cNvSpPr/>
+          <p:nvPr/>
+        </p:nvSpPr>
+        <p:spPr>
+          <a:xfrm>
+            <a:off x="10515600" y="1371600"/>
+            <a:ext cx="1828800" cy="1828800"/>
+          </a:xfrm>
+          <a:prstGeom prst="ellipse">
+            <a:avLst/>
+          </a:prstGeom>
+          <a:noFill/>
+          <a:ln w="25400">
+            <a:solidFill>
+              <a:srgbClr val="00A0B0"/>
+            </a:solidFill>
+          </a:ln>
+        </p:spPr>
+        <p:style>
+          <a:lnRef idx="1">
+            <a:schemeClr val="accent1"/>
+          </a:lnRef>
+          <a:fillRef idx="3">
+            <a:schemeClr val="accent1"/>
+          </a:fillRef>
+          <a:effectRef idx="2">
+            <a:schemeClr val="accent1"/>
+          </a:effectRef>
+          <a:fontRef idx="minor">
+            <a:schemeClr val="lt1"/>
+          </a:fontRef>
+        </p:style>
+        <p:txBody>
+          <a:bodyPr rtlCol="0" anchor="ctr"/>
+          <a:lstStyle/>
+          <a:p>
+            <a:pPr algn="ctr"/>
+          </a:p>
+        </p:txBody>
+      </p:sp>
+      <p:sp>
+        <p:nvSpPr>
+          <p:cNvPr id="6" name="Oval 5"/>
+          <p:cNvSpPr/>
+          <p:nvPr/>
+        </p:nvSpPr>
+        <p:spPr>
+          <a:xfrm>
+            <a:off x="8458200" y="3429000"/>
+            <a:ext cx="2286000" cy="2286000"/>
+          </a:xfrm>
+          <a:prstGeom prst="ellipse">
+            <a:avLst/>
+          </a:prstGeom>
+          <a:noFill/>
+          <a:ln w="25400">
+            <a:solidFill>
+              <a:srgbClr val="00A0B0"/>
+            </a:solidFill>
+          </a:ln>
+        </p:spPr>
+        <p:style>
+          <a:lnRef idx="1">
+            <a:schemeClr val="accent1"/>
+          </a:lnRef>
+          <a:fillRef idx="3">
+            <a:schemeClr val="accent1"/>
+          </a:fillRef>
+          <a:effectRef idx="2">
+            <a:schemeClr val="accent1"/>
+          </a:effectRef>
+          <a:fontRef idx="minor">
+            <a:schemeClr val="lt1"/>
+          </a:fontRef>
+        </p:style>
+        <p:txBody>
+          <a:bodyPr rtlCol="0" anchor="ctr"/>
+          <a:lstStyle/>
+          <a:p>
+            <a:pPr algn="ctr"/>
+          </a:p>
+        </p:txBody>
+      </p:sp>
+      <p:sp>
+        <p:nvSpPr>
+          <p:cNvPr id="7" name="Rectangle 6"/>
+          <p:cNvSpPr/>
+          <p:nvPr/>
+        </p:nvSpPr>
+        <p:spPr>
+          <a:xfrm>
+            <a:off x="0" y="2286000"/>
+            <a:ext cx="228600" cy="2743200"/>
+          </a:xfrm>
+          <a:prstGeom prst="rect">
+            <a:avLst/>
+          </a:prstGeom>
+          <a:solidFill>
+            <a:srgbClr val="00A0B0"/>
+          </a:solidFill>
+          <a:ln>
+            <a:noFill/>
+          </a:ln>
+        </p:spPr>
+        <p:style>
+          <a:lnRef idx="1">
+            <a:schemeClr val="accent1"/>
+          </a:lnRef>
+          <a:fillRef idx="3">
+            <a:schemeClr val="accent1"/>
+          </a:fillRef>
+          <a:effectRef idx="2">
+            <a:schemeClr val="accent1"/>
+          </a:effectRef>
+          <a:fontRef idx="minor">
+            <a:schemeClr val="lt1"/>
+          </a:fontRef>
+        </p:style>
+        <p:txBody>
+          <a:bodyPr rtlCol="0" anchor="ctr"/>
+          <a:lstStyle/>
+          <a:p>
+            <a:pPr algn="ctr"/>
+          </a:p>
+        </p:txBody>
+      </p:sp>
+      <p:sp>
+        <p:nvSpPr>
+          <p:cNvPr id="8" name="TextBox 7"/>
           <p:cNvSpPr txBox="1"/>
           <p:nvPr/>
         </p:nvSpPr>
         <p:spPr>
           <a:xfrm>
-            <a:off x="731520" y="914400"/>
-            <a:ext cx="10058400" cy="548640"/>
+            <a:off x="548640" y="2286000"/>
+            <a:ext cx="7315200" cy="457200"/>
           </a:xfrm>
           <a:prstGeom prst="rect">
             <a:avLst/>
@@ -3209,7 +3383,7 @@
           <a:p>
             <a:pPr algn="l"/>
             <a:r>
-              <a:rPr sz="1800" b="1" i="0">
+              <a:rPr sz="1600" b="1" i="0">
                 <a:solidFill>
                   <a:srgbClr val="00A0B0"/>
                 </a:solidFill>
@@ -3222,14 +3396,14 @@
       </p:sp>
       <p:sp>
         <p:nvSpPr>
-          <p:cNvPr id="5" name="TextBox 4"/>
+          <p:cNvPr id="9" name="TextBox 8"/>
           <p:cNvSpPr txBox="1"/>
           <p:nvPr/>
         </p:nvSpPr>
         <p:spPr>
           <a:xfrm>
-            <a:off x="731520" y="1554480"/>
-            <a:ext cx="10058400" cy="1828800"/>
+            <a:off x="548640" y="2743200"/>
+            <a:ext cx="10515600" cy="2011680"/>
           </a:xfrm>
           <a:prstGeom prst="rect">
             <a:avLst/>
@@ -3244,7 +3418,7 @@
           <a:p>
             <a:pPr algn="l"/>
             <a:r>
-              <a:rPr sz="5400" b="1" i="0">
+              <a:rPr sz="5600" b="1" i="0">
                 <a:solidFill>
                   <a:srgbClr val="FFFFFF"/>
                 </a:solidFill>
@@ -3257,14 +3431,14 @@
       </p:sp>
       <p:sp>
         <p:nvSpPr>
-          <p:cNvPr id="6" name="TextBox 5"/>
+          <p:cNvPr id="10" name="TextBox 9"/>
           <p:cNvSpPr txBox="1"/>
           <p:nvPr/>
         </p:nvSpPr>
         <p:spPr>
           <a:xfrm>
-            <a:off x="731520" y="3566160"/>
-            <a:ext cx="10058400" cy="1097280"/>
+            <a:off x="548640" y="4572000"/>
+            <a:ext cx="10058400" cy="914400"/>
           </a:xfrm>
           <a:prstGeom prst="rect">
             <a:avLst/>
@@ -3279,27 +3453,107 @@
           <a:p>
             <a:pPr algn="l"/>
             <a:r>
-              <a:rPr sz="2400" b="0" i="1">
+              <a:rPr sz="2200" b="0" i="1">
+                <a:solidFill>
+                  <a:srgbClr val="6FD8E0"/>
+                </a:solidFill>
+                <a:latin typeface="Calibri"/>
+              </a:rPr>
+              <a:t>Fondamenti, CIA, 5 principi, mentalità avversaria</a:t>
+            </a:r>
+          </a:p>
+        </p:txBody>
+      </p:sp>
+      <p:sp>
+        <p:nvSpPr>
+          <p:cNvPr id="11" name="Rounded Rectangle 10"/>
+          <p:cNvSpPr/>
+          <p:nvPr/>
+        </p:nvSpPr>
+        <p:spPr>
+          <a:xfrm>
+            <a:off x="548640" y="5669280"/>
+            <a:ext cx="2011680" cy="411480"/>
+          </a:xfrm>
+          <a:prstGeom prst="roundRect">
+            <a:avLst>
+              <a:gd name="adj" fmla="val 8000"/>
+            </a:avLst>
+          </a:prstGeom>
+          <a:solidFill>
+            <a:srgbClr val="00A0B0"/>
+          </a:solidFill>
+          <a:ln>
+            <a:noFill/>
+          </a:ln>
+        </p:spPr>
+        <p:style>
+          <a:lnRef idx="1">
+            <a:schemeClr val="accent1"/>
+          </a:lnRef>
+          <a:fillRef idx="3">
+            <a:schemeClr val="accent1"/>
+          </a:fillRef>
+          <a:effectRef idx="2">
+            <a:schemeClr val="accent1"/>
+          </a:effectRef>
+          <a:fontRef idx="minor">
+            <a:schemeClr val="lt1"/>
+          </a:fontRef>
+        </p:style>
+        <p:txBody>
+          <a:bodyPr rtlCol="0" anchor="ctr"/>
+          <a:lstStyle/>
+          <a:p>
+            <a:pPr algn="ctr"/>
+          </a:p>
+        </p:txBody>
+      </p:sp>
+      <p:sp>
+        <p:nvSpPr>
+          <p:cNvPr id="12" name="TextBox 11"/>
+          <p:cNvSpPr txBox="1"/>
+          <p:nvPr/>
+        </p:nvSpPr>
+        <p:spPr>
+          <a:xfrm>
+            <a:off x="548640" y="5669280"/>
+            <a:ext cx="2011680" cy="411480"/>
+          </a:xfrm>
+          <a:prstGeom prst="rect">
+            <a:avLst/>
+          </a:prstGeom>
+          <a:noFill/>
+        </p:spPr>
+        <p:txBody>
+          <a:bodyPr wrap="square" lIns="45720" rIns="45720" tIns="18288" bIns="18288" anchor="ctr">
+            <a:spAutoFit/>
+          </a:bodyPr>
+          <a:lstStyle/>
+          <a:p>
+            <a:pPr algn="ctr"/>
+            <a:r>
+              <a:rPr sz="1200" b="1" i="0">
                 <a:solidFill>
                   <a:srgbClr val="FFFFFF"/>
                 </a:solidFill>
                 <a:latin typeface="Calibri"/>
               </a:rPr>
-              <a:t>Fondamenti, CIA, 5 principi, mentalità avversaria</a:t>
-            </a:r>
-          </a:p>
-        </p:txBody>
-      </p:sp>
-      <p:sp>
-        <p:nvSpPr>
-          <p:cNvPr id="7" name="TextBox 6"/>
+              <a:t>⏱  Lezione 1 · 2 ore</a:t>
+            </a:r>
+          </a:p>
+        </p:txBody>
+      </p:sp>
+      <p:sp>
+        <p:nvSpPr>
+          <p:cNvPr id="13" name="TextBox 12"/>
           <p:cNvSpPr txBox="1"/>
           <p:nvPr/>
         </p:nvSpPr>
         <p:spPr>
           <a:xfrm>
-            <a:off x="731520" y="5029200"/>
-            <a:ext cx="10058400" cy="457200"/>
+            <a:off x="548640" y="6263640"/>
+            <a:ext cx="10972800" cy="365760"/>
           </a:xfrm>
           <a:prstGeom prst="rect">
             <a:avLst/>
@@ -3314,83 +3568,13 @@
           <a:p>
             <a:pPr algn="l"/>
             <a:r>
-              <a:rPr sz="1800" b="1" i="0">
-                <a:solidFill>
-                  <a:srgbClr val="00A0B0"/>
-                </a:solidFill>
-                <a:latin typeface="Calibri"/>
-              </a:rPr>
-              <a:t>⏱  Lezione 1 · 2 ore</a:t>
-            </a:r>
-          </a:p>
-        </p:txBody>
-      </p:sp>
-      <p:sp>
-        <p:nvSpPr>
-          <p:cNvPr id="8" name="TextBox 7"/>
-          <p:cNvSpPr txBox="1"/>
-          <p:nvPr/>
-        </p:nvSpPr>
-        <p:spPr>
-          <a:xfrm>
-            <a:off x="731520" y="5943600"/>
-            <a:ext cx="10058400" cy="457200"/>
-          </a:xfrm>
-          <a:prstGeom prst="rect">
-            <a:avLst/>
-          </a:prstGeom>
-          <a:noFill/>
-        </p:spPr>
-        <p:txBody>
-          <a:bodyPr wrap="square" lIns="45720" rIns="45720" tIns="18288" bIns="18288" anchor="t">
-            <a:spAutoFit/>
-          </a:bodyPr>
-          <a:lstStyle/>
-          <a:p>
-            <a:pPr algn="l"/>
-            <a:r>
-              <a:rPr sz="1200" b="0" i="0">
-                <a:solidFill>
-                  <a:srgbClr val="FFFFFF"/>
-                </a:solidFill>
-                <a:latin typeface="Calibri"/>
-              </a:rPr>
-              <a:t>Corso IFTS STEM · Specialista nelle Tecniche di Evoluzione e Manutenzione del Software</a:t>
-            </a:r>
-          </a:p>
-        </p:txBody>
-      </p:sp>
-      <p:sp>
-        <p:nvSpPr>
-          <p:cNvPr id="9" name="TextBox 8"/>
-          <p:cNvSpPr txBox="1"/>
-          <p:nvPr/>
-        </p:nvSpPr>
-        <p:spPr>
-          <a:xfrm>
-            <a:off x="731520" y="6263640"/>
-            <a:ext cx="10058400" cy="365760"/>
-          </a:xfrm>
-          <a:prstGeom prst="rect">
-            <a:avLst/>
-          </a:prstGeom>
-          <a:noFill/>
-        </p:spPr>
-        <p:txBody>
-          <a:bodyPr wrap="square" lIns="45720" rIns="45720" tIns="18288" bIns="18288" anchor="t">
-            <a:spAutoFit/>
-          </a:bodyPr>
-          <a:lstStyle/>
-          <a:p>
-            <a:pPr algn="l"/>
-            <a:r>
-              <a:rPr sz="1100" b="0" i="1">
-                <a:solidFill>
-                  <a:srgbClr val="FFFFFF"/>
-                </a:solidFill>
-                <a:latin typeface="Calibri"/>
-              </a:rPr>
-              <a:t>Ing. Alessandro Manneschi · Anno formativo 2024/2025</a:t>
+              <a:rPr sz="1000" b="0" i="0">
+                <a:solidFill>
+                  <a:srgbClr val="CBD0D8"/>
+                </a:solidFill>
+                <a:latin typeface="Calibri"/>
+              </a:rPr>
+              <a:t>Corso IFTS STEM · Ing. Alessandro Manneschi · 2024/2025</a:t>
             </a:r>
           </a:p>
         </p:txBody>
@@ -3465,7 +3649,7 @@
         <p:spPr>
           <a:xfrm>
             <a:off x="457200" y="164592"/>
-            <a:ext cx="10058400" cy="502920"/>
+            <a:ext cx="9144000" cy="502920"/>
           </a:xfrm>
           <a:prstGeom prst="rect">
             <a:avLst/>
@@ -3480,33 +3664,35 @@
           <a:p>
             <a:pPr algn="l"/>
             <a:r>
-              <a:rPr sz="2400" b="1" i="0">
+              <a:rPr sz="2200" b="1" i="0">
                 <a:solidFill>
                   <a:srgbClr val="FFFFFF"/>
                 </a:solidFill>
                 <a:latin typeface="Calibri"/>
               </a:rPr>
-              <a:t>Fail Secure: la versione corretta</a:t>
-            </a:r>
-          </a:p>
-        </p:txBody>
-      </p:sp>
-      <p:sp>
-        <p:nvSpPr>
-          <p:cNvPr id="4" name="Rectangle 3"/>
+              <a:t>Esempio: Fail Open (ANTI-PATTERN)</a:t>
+            </a:r>
+          </a:p>
+        </p:txBody>
+      </p:sp>
+      <p:sp>
+        <p:nvSpPr>
+          <p:cNvPr id="4" name="Rounded Rectangle 3"/>
           <p:cNvSpPr/>
           <p:nvPr/>
         </p:nvSpPr>
         <p:spPr>
           <a:xfrm>
-            <a:off x="9875520" y="164592"/>
-            <a:ext cx="2103120" cy="457200"/>
-          </a:xfrm>
-          <a:prstGeom prst="rect">
-            <a:avLst/>
+            <a:off x="9784080" y="164592"/>
+            <a:ext cx="2194560" cy="457200"/>
+          </a:xfrm>
+          <a:prstGeom prst="roundRect">
+            <a:avLst>
+              <a:gd name="adj" fmla="val 8000"/>
+            </a:avLst>
           </a:prstGeom>
           <a:solidFill>
-            <a:srgbClr val="06A77D"/>
+            <a:srgbClr val="E63946"/>
           </a:solidFill>
           <a:ln>
             <a:noFill/>
@@ -3542,8 +3728,8 @@
         </p:nvSpPr>
         <p:spPr>
           <a:xfrm>
-            <a:off x="9875520" y="182880"/>
-            <a:ext cx="2103120" cy="457200"/>
+            <a:off x="9784080" y="164592"/>
+            <a:ext cx="2194560" cy="457200"/>
           </a:xfrm>
           <a:prstGeom prst="rect">
             <a:avLst/>
@@ -3564,7 +3750,7 @@
                 </a:solidFill>
                 <a:latin typeface="Calibri"/>
               </a:rPr>
-              <a:t>✅ PYTHON</a:t>
+              <a:t>🚩 ANTI-PATTERN</a:t>
             </a:r>
           </a:p>
         </p:txBody>
@@ -3578,18 +3764,16 @@
         <p:spPr>
           <a:xfrm>
             <a:off x="457200" y="1097280"/>
-            <a:ext cx="11247120" cy="4572000"/>
+            <a:ext cx="11247120" cy="365760"/>
           </a:xfrm>
           <a:prstGeom prst="rect">
             <a:avLst/>
           </a:prstGeom>
           <a:solidFill>
-            <a:srgbClr val="F1F4F8"/>
+            <a:srgbClr val="2D2D37"/>
           </a:solidFill>
           <a:ln>
-            <a:solidFill>
-              <a:srgbClr val="06A77D"/>
-            </a:solidFill>
+            <a:noFill/>
           </a:ln>
         </p:spPr>
         <p:style>
@@ -3616,14 +3800,578 @@
       </p:sp>
       <p:sp>
         <p:nvSpPr>
-          <p:cNvPr id="7" name="TextBox 6"/>
+          <p:cNvPr id="7" name="Oval 6"/>
+          <p:cNvSpPr/>
+          <p:nvPr/>
+        </p:nvSpPr>
+        <p:spPr>
+          <a:xfrm>
+            <a:off x="594360" y="1216152"/>
+            <a:ext cx="118872" cy="118872"/>
+          </a:xfrm>
+          <a:prstGeom prst="ellipse">
+            <a:avLst/>
+          </a:prstGeom>
+          <a:solidFill>
+            <a:srgbClr val="FF5F56"/>
+          </a:solidFill>
+          <a:ln>
+            <a:noFill/>
+          </a:ln>
+        </p:spPr>
+        <p:style>
+          <a:lnRef idx="1">
+            <a:schemeClr val="accent1"/>
+          </a:lnRef>
+          <a:fillRef idx="3">
+            <a:schemeClr val="accent1"/>
+          </a:fillRef>
+          <a:effectRef idx="2">
+            <a:schemeClr val="accent1"/>
+          </a:effectRef>
+          <a:fontRef idx="minor">
+            <a:schemeClr val="lt1"/>
+          </a:fontRef>
+        </p:style>
+        <p:txBody>
+          <a:bodyPr rtlCol="0" anchor="ctr"/>
+          <a:lstStyle/>
+          <a:p>
+            <a:pPr algn="ctr"/>
+          </a:p>
+        </p:txBody>
+      </p:sp>
+      <p:sp>
+        <p:nvSpPr>
+          <p:cNvPr id="8" name="Oval 7"/>
+          <p:cNvSpPr/>
+          <p:nvPr/>
+        </p:nvSpPr>
+        <p:spPr>
+          <a:xfrm>
+            <a:off x="777240" y="1216152"/>
+            <a:ext cx="118872" cy="118872"/>
+          </a:xfrm>
+          <a:prstGeom prst="ellipse">
+            <a:avLst/>
+          </a:prstGeom>
+          <a:solidFill>
+            <a:srgbClr val="FFBD2E"/>
+          </a:solidFill>
+          <a:ln>
+            <a:noFill/>
+          </a:ln>
+        </p:spPr>
+        <p:style>
+          <a:lnRef idx="1">
+            <a:schemeClr val="accent1"/>
+          </a:lnRef>
+          <a:fillRef idx="3">
+            <a:schemeClr val="accent1"/>
+          </a:fillRef>
+          <a:effectRef idx="2">
+            <a:schemeClr val="accent1"/>
+          </a:effectRef>
+          <a:fontRef idx="minor">
+            <a:schemeClr val="lt1"/>
+          </a:fontRef>
+        </p:style>
+        <p:txBody>
+          <a:bodyPr rtlCol="0" anchor="ctr"/>
+          <a:lstStyle/>
+          <a:p>
+            <a:pPr algn="ctr"/>
+          </a:p>
+        </p:txBody>
+      </p:sp>
+      <p:sp>
+        <p:nvSpPr>
+          <p:cNvPr id="9" name="Oval 8"/>
+          <p:cNvSpPr/>
+          <p:nvPr/>
+        </p:nvSpPr>
+        <p:spPr>
+          <a:xfrm>
+            <a:off x="960120" y="1216152"/>
+            <a:ext cx="118872" cy="118872"/>
+          </a:xfrm>
+          <a:prstGeom prst="ellipse">
+            <a:avLst/>
+          </a:prstGeom>
+          <a:solidFill>
+            <a:srgbClr val="27C93F"/>
+          </a:solidFill>
+          <a:ln>
+            <a:noFill/>
+          </a:ln>
+        </p:spPr>
+        <p:style>
+          <a:lnRef idx="1">
+            <a:schemeClr val="accent1"/>
+          </a:lnRef>
+          <a:fillRef idx="3">
+            <a:schemeClr val="accent1"/>
+          </a:fillRef>
+          <a:effectRef idx="2">
+            <a:schemeClr val="accent1"/>
+          </a:effectRef>
+          <a:fontRef idx="minor">
+            <a:schemeClr val="lt1"/>
+          </a:fontRef>
+        </p:style>
+        <p:txBody>
+          <a:bodyPr rtlCol="0" anchor="ctr"/>
+          <a:lstStyle/>
+          <a:p>
+            <a:pPr algn="ctr"/>
+          </a:p>
+        </p:txBody>
+      </p:sp>
+      <p:sp>
+        <p:nvSpPr>
+          <p:cNvPr id="10" name="TextBox 9"/>
           <p:cNvSpPr txBox="1"/>
           <p:nvPr/>
         </p:nvSpPr>
         <p:spPr>
           <a:xfrm>
-            <a:off x="640080" y="1280160"/>
-            <a:ext cx="10972800" cy="4206240"/>
+            <a:off x="1371600" y="1161288"/>
+            <a:ext cx="5486400" cy="274320"/>
+          </a:xfrm>
+          <a:prstGeom prst="rect">
+            <a:avLst/>
+          </a:prstGeom>
+          <a:noFill/>
+        </p:spPr>
+        <p:txBody>
+          <a:bodyPr wrap="square" lIns="45720" rIns="45720" tIns="18288" bIns="18288" anchor="ctr">
+            <a:spAutoFit/>
+          </a:bodyPr>
+          <a:lstStyle/>
+          <a:p>
+            <a:pPr algn="l"/>
+            <a:r>
+              <a:rPr sz="1000" b="0" i="0">
+                <a:solidFill>
+                  <a:srgbClr val="CBD0D8"/>
+                </a:solidFill>
+                <a:latin typeface="Calibri"/>
+              </a:rPr>
+              <a:t>  app.py  —  python</a:t>
+            </a:r>
+          </a:p>
+        </p:txBody>
+      </p:sp>
+      <p:sp>
+        <p:nvSpPr>
+          <p:cNvPr id="11" name="Rectangle 10"/>
+          <p:cNvSpPr/>
+          <p:nvPr/>
+        </p:nvSpPr>
+        <p:spPr>
+          <a:xfrm>
+            <a:off x="457200" y="1463040"/>
+            <a:ext cx="11247120" cy="4206240"/>
+          </a:xfrm>
+          <a:prstGeom prst="rect">
+            <a:avLst/>
+          </a:prstGeom>
+          <a:solidFill>
+            <a:srgbClr val="1E1E28"/>
+          </a:solidFill>
+          <a:ln w="19050">
+            <a:solidFill>
+              <a:srgbClr val="E63946"/>
+            </a:solidFill>
+          </a:ln>
+        </p:spPr>
+        <p:style>
+          <a:lnRef idx="1">
+            <a:schemeClr val="accent1"/>
+          </a:lnRef>
+          <a:fillRef idx="3">
+            <a:schemeClr val="accent1"/>
+          </a:fillRef>
+          <a:effectRef idx="2">
+            <a:schemeClr val="accent1"/>
+          </a:effectRef>
+          <a:fontRef idx="minor">
+            <a:schemeClr val="lt1"/>
+          </a:fontRef>
+        </p:style>
+        <p:txBody>
+          <a:bodyPr rtlCol="0" anchor="ctr"/>
+          <a:lstStyle/>
+          <a:p>
+            <a:pPr algn="ctr"/>
+          </a:p>
+        </p:txBody>
+      </p:sp>
+      <p:sp>
+        <p:nvSpPr>
+          <p:cNvPr id="12" name="Rectangle 11"/>
+          <p:cNvSpPr/>
+          <p:nvPr/>
+        </p:nvSpPr>
+        <p:spPr>
+          <a:xfrm>
+            <a:off x="457200" y="1463040"/>
+            <a:ext cx="457200" cy="4206240"/>
+          </a:xfrm>
+          <a:prstGeom prst="rect">
+            <a:avLst/>
+          </a:prstGeom>
+          <a:solidFill>
+            <a:srgbClr val="24242E"/>
+          </a:solidFill>
+          <a:ln>
+            <a:noFill/>
+          </a:ln>
+        </p:spPr>
+        <p:style>
+          <a:lnRef idx="1">
+            <a:schemeClr val="accent1"/>
+          </a:lnRef>
+          <a:fillRef idx="3">
+            <a:schemeClr val="accent1"/>
+          </a:fillRef>
+          <a:effectRef idx="2">
+            <a:schemeClr val="accent1"/>
+          </a:effectRef>
+          <a:fontRef idx="minor">
+            <a:schemeClr val="lt1"/>
+          </a:fontRef>
+        </p:style>
+        <p:txBody>
+          <a:bodyPr rtlCol="0" anchor="ctr"/>
+          <a:lstStyle/>
+          <a:p>
+            <a:pPr algn="ctr"/>
+          </a:p>
+        </p:txBody>
+      </p:sp>
+      <p:sp>
+        <p:nvSpPr>
+          <p:cNvPr id="13" name="TextBox 12"/>
+          <p:cNvSpPr txBox="1"/>
+          <p:nvPr/>
+        </p:nvSpPr>
+        <p:spPr>
+          <a:xfrm>
+            <a:off x="1051560" y="1600200"/>
+            <a:ext cx="10607040" cy="4114800"/>
+          </a:xfrm>
+          <a:prstGeom prst="rect">
+            <a:avLst/>
+          </a:prstGeom>
+          <a:noFill/>
+        </p:spPr>
+        <p:txBody>
+          <a:bodyPr wrap="none">
+            <a:spAutoFit/>
+          </a:bodyPr>
+          <a:lstStyle/>
+          <a:p>
+            <a:pPr>
+              <a:lnSpc>
+                <a:spcPct val="115000"/>
+              </a:lnSpc>
+              <a:spcAft>
+                <a:spcPts val="0"/>
+              </a:spcAft>
+            </a:pPr>
+            <a:r>
+              <a:rPr sz="1300">
+                <a:solidFill>
+                  <a:srgbClr val="E5E5EC"/>
+                </a:solidFill>
+                <a:latin typeface="Consolas"/>
+              </a:rPr>
+              <a:t>try:</a:t>
+            </a:r>
+          </a:p>
+          <a:p>
+            <a:pPr>
+              <a:lnSpc>
+                <a:spcPct val="115000"/>
+              </a:lnSpc>
+              <a:spcAft>
+                <a:spcPts val="0"/>
+              </a:spcAft>
+            </a:pPr>
+            <a:r>
+              <a:rPr sz="1300">
+                <a:solidFill>
+                  <a:srgbClr val="E5E5EC"/>
+                </a:solidFill>
+                <a:latin typeface="Consolas"/>
+              </a:rPr>
+              <a:t>    if not is_authorized(user, resource):</a:t>
+            </a:r>
+          </a:p>
+          <a:p>
+            <a:pPr>
+              <a:lnSpc>
+                <a:spcPct val="115000"/>
+              </a:lnSpc>
+              <a:spcAft>
+                <a:spcPts val="0"/>
+              </a:spcAft>
+            </a:pPr>
+            <a:r>
+              <a:rPr sz="1300">
+                <a:solidFill>
+                  <a:srgbClr val="E5E5EC"/>
+                </a:solidFill>
+                <a:latin typeface="Consolas"/>
+              </a:rPr>
+              <a:t>        return 403</a:t>
+            </a:r>
+          </a:p>
+          <a:p>
+            <a:pPr>
+              <a:lnSpc>
+                <a:spcPct val="115000"/>
+              </a:lnSpc>
+              <a:spcAft>
+                <a:spcPts val="0"/>
+              </a:spcAft>
+            </a:pPr>
+            <a:r>
+              <a:rPr sz="1300">
+                <a:solidFill>
+                  <a:srgbClr val="E5E5EC"/>
+                </a:solidFill>
+                <a:latin typeface="Consolas"/>
+              </a:rPr>
+              <a:t>    return resource</a:t>
+            </a:r>
+          </a:p>
+          <a:p>
+            <a:pPr>
+              <a:lnSpc>
+                <a:spcPct val="115000"/>
+              </a:lnSpc>
+              <a:spcAft>
+                <a:spcPts val="0"/>
+              </a:spcAft>
+            </a:pPr>
+            <a:r>
+              <a:rPr sz="1300">
+                <a:solidFill>
+                  <a:srgbClr val="E5E5EC"/>
+                </a:solidFill>
+                <a:latin typeface="Consolas"/>
+              </a:rPr>
+              <a:t>except Exception:</a:t>
+            </a:r>
+          </a:p>
+          <a:p>
+            <a:pPr>
+              <a:lnSpc>
+                <a:spcPct val="115000"/>
+              </a:lnSpc>
+              <a:spcAft>
+                <a:spcPts val="0"/>
+              </a:spcAft>
+            </a:pPr>
+            <a:r>
+              <a:rPr sz="1300">
+                <a:solidFill>
+                  <a:srgbClr val="E5E5EC"/>
+                </a:solidFill>
+                <a:latin typeface="Consolas"/>
+              </a:rPr>
+              <a:t>    return resource   # 💥 se il check si rompe,</a:t>
+            </a:r>
+          </a:p>
+          <a:p>
+            <a:pPr>
+              <a:lnSpc>
+                <a:spcPct val="115000"/>
+              </a:lnSpc>
+              <a:spcAft>
+                <a:spcPts val="0"/>
+              </a:spcAft>
+            </a:pPr>
+            <a:r>
+              <a:rPr sz="1300">
+                <a:solidFill>
+                  <a:srgbClr val="E5E5EC"/>
+                </a:solidFill>
+                <a:latin typeface="Consolas"/>
+              </a:rPr>
+              <a:t>                  # l'utente entra LO STESSO</a:t>
+            </a:r>
+          </a:p>
+        </p:txBody>
+      </p:sp>
+      <p:sp>
+        <p:nvSpPr>
+          <p:cNvPr id="14" name="TextBox 13"/>
+          <p:cNvSpPr txBox="1"/>
+          <p:nvPr/>
+        </p:nvSpPr>
+        <p:spPr>
+          <a:xfrm>
+            <a:off x="502920" y="1600200"/>
+            <a:ext cx="365760" cy="4114800"/>
+          </a:xfrm>
+          <a:prstGeom prst="rect">
+            <a:avLst/>
+          </a:prstGeom>
+          <a:noFill/>
+        </p:spPr>
+        <p:txBody>
+          <a:bodyPr wrap="none">
+            <a:spAutoFit/>
+          </a:bodyPr>
+          <a:lstStyle/>
+          <a:p>
+            <a:pPr algn="r">
+              <a:lnSpc>
+                <a:spcPct val="115000"/>
+              </a:lnSpc>
+              <a:spcAft>
+                <a:spcPts val="0"/>
+              </a:spcAft>
+            </a:pPr>
+            <a:r>
+              <a:rPr sz="1100">
+                <a:solidFill>
+                  <a:srgbClr val="6B7280"/>
+                </a:solidFill>
+                <a:latin typeface="Consolas"/>
+              </a:rPr>
+              <a:t>1</a:t>
+            </a:r>
+          </a:p>
+          <a:p>
+            <a:pPr algn="r">
+              <a:lnSpc>
+                <a:spcPct val="115000"/>
+              </a:lnSpc>
+              <a:spcAft>
+                <a:spcPts val="0"/>
+              </a:spcAft>
+            </a:pPr>
+            <a:r>
+              <a:rPr sz="1100">
+                <a:solidFill>
+                  <a:srgbClr val="6B7280"/>
+                </a:solidFill>
+                <a:latin typeface="Consolas"/>
+              </a:rPr>
+              <a:t>2</a:t>
+            </a:r>
+          </a:p>
+          <a:p>
+            <a:pPr algn="r">
+              <a:lnSpc>
+                <a:spcPct val="115000"/>
+              </a:lnSpc>
+              <a:spcAft>
+                <a:spcPts val="0"/>
+              </a:spcAft>
+            </a:pPr>
+            <a:r>
+              <a:rPr sz="1100">
+                <a:solidFill>
+                  <a:srgbClr val="6B7280"/>
+                </a:solidFill>
+                <a:latin typeface="Consolas"/>
+              </a:rPr>
+              <a:t>3</a:t>
+            </a:r>
+          </a:p>
+          <a:p>
+            <a:pPr algn="r">
+              <a:lnSpc>
+                <a:spcPct val="115000"/>
+              </a:lnSpc>
+              <a:spcAft>
+                <a:spcPts val="0"/>
+              </a:spcAft>
+            </a:pPr>
+            <a:r>
+              <a:rPr sz="1100">
+                <a:solidFill>
+                  <a:srgbClr val="6B7280"/>
+                </a:solidFill>
+                <a:latin typeface="Consolas"/>
+              </a:rPr>
+              <a:t>4</a:t>
+            </a:r>
+          </a:p>
+          <a:p>
+            <a:pPr algn="r">
+              <a:lnSpc>
+                <a:spcPct val="115000"/>
+              </a:lnSpc>
+              <a:spcAft>
+                <a:spcPts val="0"/>
+              </a:spcAft>
+            </a:pPr>
+            <a:r>
+              <a:rPr sz="1100">
+                <a:solidFill>
+                  <a:srgbClr val="6B7280"/>
+                </a:solidFill>
+                <a:latin typeface="Consolas"/>
+              </a:rPr>
+              <a:t>5</a:t>
+            </a:r>
+          </a:p>
+          <a:p>
+            <a:pPr algn="r">
+              <a:lnSpc>
+                <a:spcPct val="115000"/>
+              </a:lnSpc>
+              <a:spcAft>
+                <a:spcPts val="0"/>
+              </a:spcAft>
+            </a:pPr>
+            <a:r>
+              <a:rPr sz="1100">
+                <a:solidFill>
+                  <a:srgbClr val="6B7280"/>
+                </a:solidFill>
+                <a:latin typeface="Consolas"/>
+              </a:rPr>
+              <a:t>6</a:t>
+            </a:r>
+          </a:p>
+          <a:p>
+            <a:pPr algn="r">
+              <a:lnSpc>
+                <a:spcPct val="115000"/>
+              </a:lnSpc>
+              <a:spcAft>
+                <a:spcPts val="0"/>
+              </a:spcAft>
+            </a:pPr>
+            <a:r>
+              <a:rPr sz="1100">
+                <a:solidFill>
+                  <a:srgbClr val="6B7280"/>
+                </a:solidFill>
+                <a:latin typeface="Consolas"/>
+              </a:rPr>
+              <a:t>7</a:t>
+            </a:r>
+          </a:p>
+        </p:txBody>
+      </p:sp>
+      <p:sp>
+        <p:nvSpPr>
+          <p:cNvPr id="15" name="TextBox 14"/>
+          <p:cNvSpPr txBox="1"/>
+          <p:nvPr/>
+        </p:nvSpPr>
+        <p:spPr>
+          <a:xfrm>
+            <a:off x="457200" y="5852160"/>
+            <a:ext cx="11247120" cy="502920"/>
           </a:xfrm>
           <a:prstGeom prst="rect">
             <a:avLst/>
@@ -3638,139 +4386,20 @@
           <a:p>
             <a:pPr algn="l"/>
             <a:r>
-              <a:rPr sz="1400" b="0" i="0">
-                <a:solidFill>
-                  <a:srgbClr val="1A1A2E"/>
-                </a:solidFill>
-                <a:latin typeface="Consolas"/>
-              </a:rPr>
-              <a:t>try:</a:t>
-            </a:r>
-          </a:p>
-          <a:p>
-            <a:pPr algn="l"/>
-            <a:r>
-              <a:rPr sz="1400" b="0" i="0">
-                <a:solidFill>
-                  <a:srgbClr val="1A1A2E"/>
-                </a:solidFill>
-                <a:latin typeface="Consolas"/>
-              </a:rPr>
-              <a:t>    if not is_authorized(user, resource):</a:t>
-            </a:r>
-          </a:p>
-          <a:p>
-            <a:pPr algn="l"/>
-            <a:r>
-              <a:rPr sz="1400" b="0" i="0">
-                <a:solidFill>
-                  <a:srgbClr val="1A1A2E"/>
-                </a:solidFill>
-                <a:latin typeface="Consolas"/>
-              </a:rPr>
-              <a:t>        return 403</a:t>
-            </a:r>
-          </a:p>
-          <a:p>
-            <a:pPr algn="l"/>
-            <a:r>
-              <a:rPr sz="1400" b="0" i="0">
-                <a:solidFill>
-                  <a:srgbClr val="1A1A2E"/>
-                </a:solidFill>
-                <a:latin typeface="Consolas"/>
-              </a:rPr>
-              <a:t>    return resource</a:t>
-            </a:r>
-          </a:p>
-          <a:p>
-            <a:pPr algn="l"/>
-            <a:r>
-              <a:rPr sz="1400" b="0" i="0">
-                <a:solidFill>
-                  <a:srgbClr val="1A1A2E"/>
-                </a:solidFill>
-                <a:latin typeface="Consolas"/>
-              </a:rPr>
-              <a:t>except Exception as e:</a:t>
-            </a:r>
-          </a:p>
-          <a:p>
-            <a:pPr algn="l"/>
-            <a:r>
-              <a:rPr sz="1400" b="0" i="0">
-                <a:solidFill>
-                  <a:srgbClr val="1A1A2E"/>
-                </a:solidFill>
-                <a:latin typeface="Consolas"/>
-              </a:rPr>
-              <a:t>    log.exception("auth check failed")</a:t>
-            </a:r>
-          </a:p>
-          <a:p>
-            <a:pPr algn="l"/>
-            <a:r>
-              <a:rPr sz="1400" b="0" i="0">
-                <a:solidFill>
-                  <a:srgbClr val="1A1A2E"/>
-                </a:solidFill>
-                <a:latin typeface="Consolas"/>
-              </a:rPr>
-              <a:t>    return 503   # ✅ servizio non disponibile,</a:t>
-            </a:r>
-          </a:p>
-          <a:p>
-            <a:pPr algn="l"/>
-            <a:r>
-              <a:rPr sz="1400" b="0" i="0">
-                <a:solidFill>
-                  <a:srgbClr val="1A1A2E"/>
-                </a:solidFill>
-                <a:latin typeface="Consolas"/>
-              </a:rPr>
-              <a:t>                 # NON accesso senza autorizzazione</a:t>
-            </a:r>
-          </a:p>
-        </p:txBody>
-      </p:sp>
-      <p:sp>
-        <p:nvSpPr>
-          <p:cNvPr id="8" name="TextBox 7"/>
-          <p:cNvSpPr txBox="1"/>
-          <p:nvPr/>
-        </p:nvSpPr>
-        <p:spPr>
-          <a:xfrm>
-            <a:off x="457200" y="5852160"/>
-            <a:ext cx="11247120" cy="457200"/>
-          </a:xfrm>
-          <a:prstGeom prst="rect">
-            <a:avLst/>
-          </a:prstGeom>
-          <a:noFill/>
-        </p:spPr>
-        <p:txBody>
-          <a:bodyPr wrap="square" lIns="45720" rIns="45720" tIns="18288" bIns="18288" anchor="t">
-            <a:spAutoFit/>
-          </a:bodyPr>
-          <a:lstStyle/>
-          <a:p>
-            <a:pPr algn="l"/>
-            <a:r>
               <a:rPr sz="1400" b="1" i="1">
                 <a:solidFill>
-                  <a:srgbClr val="06A77D"/>
-                </a:solidFill>
-                <a:latin typeface="Calibri"/>
-              </a:rPr>
-              <a:t>✓  In dubbio, il sistema CHIUDE, non APRE</a:t>
+                  <a:srgbClr val="E63946"/>
+                </a:solidFill>
+                <a:latin typeface="Calibri"/>
+              </a:rPr>
+              <a:t>⚠  Codice 'robusto' all'apparenza, in realtà un disastro</a:t>
             </a:r>
           </a:p>
         </p:txBody>
       </p:sp>
       <p:cxnSp>
         <p:nvCxnSpPr>
-          <p:cNvPr id="9" name="Connector 8"/>
+          <p:cNvPr id="16" name="Connector 15"/>
           <p:cNvCxnSpPr/>
           <p:nvPr/>
         </p:nvCxnSpPr>
@@ -3805,14 +4434,14 @@
       </p:cxnSp>
       <p:sp>
         <p:nvSpPr>
-          <p:cNvPr id="10" name="TextBox 9"/>
+          <p:cNvPr id="17" name="TextBox 16"/>
           <p:cNvSpPr txBox="1"/>
           <p:nvPr/>
         </p:nvSpPr>
         <p:spPr>
           <a:xfrm>
             <a:off x="457200" y="6473952"/>
-            <a:ext cx="7315200" cy="320040"/>
+            <a:ext cx="7315200" cy="292608"/>
           </a:xfrm>
           <a:prstGeom prst="rect">
             <a:avLst/>
@@ -3833,21 +4462,21 @@
                 </a:solidFill>
                 <a:latin typeface="Calibri"/>
               </a:rPr>
-              <a:t>Secure Coding · Corso IFTS STEM · A. Manneschi</a:t>
-            </a:r>
-          </a:p>
-        </p:txBody>
-      </p:sp>
-      <p:sp>
-        <p:nvSpPr>
-          <p:cNvPr id="11" name="TextBox 10"/>
+              <a:t>Secure Coding · Corso IFTS STEM · A. Manneschi · 2024/2025</a:t>
+            </a:r>
+          </a:p>
+        </p:txBody>
+      </p:sp>
+      <p:sp>
+        <p:nvSpPr>
+          <p:cNvPr id="18" name="TextBox 17"/>
           <p:cNvSpPr txBox="1"/>
           <p:nvPr/>
         </p:nvSpPr>
         <p:spPr>
           <a:xfrm>
             <a:off x="10515600" y="6473952"/>
-            <a:ext cx="1188720" cy="320040"/>
+            <a:ext cx="1188720" cy="292608"/>
           </a:xfrm>
           <a:prstGeom prst="rect">
             <a:avLst/>
@@ -3868,7 +4497,7 @@
                 </a:solidFill>
                 <a:latin typeface="Calibri"/>
               </a:rPr>
-              <a:t>L1  ·  10/12</a:t>
+              <a:t>L1  ·  10/14</a:t>
             </a:r>
           </a:p>
         </p:txBody>
@@ -3943,7 +4572,7 @@
         <p:spPr>
           <a:xfrm>
             <a:off x="457200" y="164592"/>
-            <a:ext cx="10972800" cy="502920"/>
+            <a:ext cx="9144000" cy="502920"/>
           </a:xfrm>
           <a:prstGeom prst="rect">
             <a:avLst/>
@@ -3958,27 +4587,72 @@
           <a:p>
             <a:pPr algn="l"/>
             <a:r>
-              <a:rPr sz="2400" b="1" i="0">
+              <a:rPr sz="2200" b="1" i="0">
                 <a:solidFill>
                   <a:srgbClr val="FFFFFF"/>
                 </a:solidFill>
                 <a:latin typeface="Calibri"/>
               </a:rPr>
-              <a:t>Mentalità avversaria</a:t>
-            </a:r>
-          </a:p>
-        </p:txBody>
-      </p:sp>
-      <p:sp>
-        <p:nvSpPr>
-          <p:cNvPr id="4" name="TextBox 3"/>
+              <a:t>Fail Secure (versione corretta)</a:t>
+            </a:r>
+          </a:p>
+        </p:txBody>
+      </p:sp>
+      <p:sp>
+        <p:nvSpPr>
+          <p:cNvPr id="4" name="Rounded Rectangle 3"/>
+          <p:cNvSpPr/>
+          <p:nvPr/>
+        </p:nvSpPr>
+        <p:spPr>
+          <a:xfrm>
+            <a:off x="9784080" y="164592"/>
+            <a:ext cx="2194560" cy="457200"/>
+          </a:xfrm>
+          <a:prstGeom prst="roundRect">
+            <a:avLst>
+              <a:gd name="adj" fmla="val 8000"/>
+            </a:avLst>
+          </a:prstGeom>
+          <a:solidFill>
+            <a:srgbClr val="06A77D"/>
+          </a:solidFill>
+          <a:ln>
+            <a:noFill/>
+          </a:ln>
+        </p:spPr>
+        <p:style>
+          <a:lnRef idx="1">
+            <a:schemeClr val="accent1"/>
+          </a:lnRef>
+          <a:fillRef idx="3">
+            <a:schemeClr val="accent1"/>
+          </a:fillRef>
+          <a:effectRef idx="2">
+            <a:schemeClr val="accent1"/>
+          </a:effectRef>
+          <a:fontRef idx="minor">
+            <a:schemeClr val="lt1"/>
+          </a:fontRef>
+        </p:style>
+        <p:txBody>
+          <a:bodyPr rtlCol="0" anchor="ctr"/>
+          <a:lstStyle/>
+          <a:p>
+            <a:pPr algn="ctr"/>
+          </a:p>
+        </p:txBody>
+      </p:sp>
+      <p:sp>
+        <p:nvSpPr>
+          <p:cNvPr id="5" name="TextBox 4"/>
           <p:cNvSpPr txBox="1"/>
           <p:nvPr/>
         </p:nvSpPr>
         <p:spPr>
           <a:xfrm>
-            <a:off x="640080" y="1005840"/>
-            <a:ext cx="10972800" cy="5029200"/>
+            <a:off x="9784080" y="164592"/>
+            <a:ext cx="2194560" cy="457200"/>
           </a:xfrm>
           <a:prstGeom prst="rect">
             <a:avLst/>
@@ -3986,190 +4660,707 @@
           <a:noFill/>
         </p:spPr>
         <p:txBody>
-          <a:bodyPr wrap="square">
+          <a:bodyPr wrap="square" lIns="45720" rIns="45720" tIns="18288" bIns="18288" anchor="ctr">
             <a:spAutoFit/>
           </a:bodyPr>
           <a:lstStyle/>
           <a:p>
+            <a:pPr algn="ctr"/>
+            <a:r>
+              <a:rPr sz="1200" b="1" i="0">
+                <a:solidFill>
+                  <a:srgbClr val="FFFFFF"/>
+                </a:solidFill>
+                <a:latin typeface="Calibri"/>
+              </a:rPr>
+              <a:t>✅ PYTHON</a:t>
+            </a:r>
+          </a:p>
+        </p:txBody>
+      </p:sp>
+      <p:sp>
+        <p:nvSpPr>
+          <p:cNvPr id="6" name="Rectangle 5"/>
+          <p:cNvSpPr/>
+          <p:nvPr/>
+        </p:nvSpPr>
+        <p:spPr>
+          <a:xfrm>
+            <a:off x="457200" y="1097280"/>
+            <a:ext cx="11247120" cy="365760"/>
+          </a:xfrm>
+          <a:prstGeom prst="rect">
+            <a:avLst/>
+          </a:prstGeom>
+          <a:solidFill>
+            <a:srgbClr val="2D2D37"/>
+          </a:solidFill>
+          <a:ln>
+            <a:noFill/>
+          </a:ln>
+        </p:spPr>
+        <p:style>
+          <a:lnRef idx="1">
+            <a:schemeClr val="accent1"/>
+          </a:lnRef>
+          <a:fillRef idx="3">
+            <a:schemeClr val="accent1"/>
+          </a:fillRef>
+          <a:effectRef idx="2">
+            <a:schemeClr val="accent1"/>
+          </a:effectRef>
+          <a:fontRef idx="minor">
+            <a:schemeClr val="lt1"/>
+          </a:fontRef>
+        </p:style>
+        <p:txBody>
+          <a:bodyPr rtlCol="0" anchor="ctr"/>
+          <a:lstStyle/>
+          <a:p>
+            <a:pPr algn="ctr"/>
+          </a:p>
+        </p:txBody>
+      </p:sp>
+      <p:sp>
+        <p:nvSpPr>
+          <p:cNvPr id="7" name="Oval 6"/>
+          <p:cNvSpPr/>
+          <p:nvPr/>
+        </p:nvSpPr>
+        <p:spPr>
+          <a:xfrm>
+            <a:off x="594360" y="1216152"/>
+            <a:ext cx="118872" cy="118872"/>
+          </a:xfrm>
+          <a:prstGeom prst="ellipse">
+            <a:avLst/>
+          </a:prstGeom>
+          <a:solidFill>
+            <a:srgbClr val="FF5F56"/>
+          </a:solidFill>
+          <a:ln>
+            <a:noFill/>
+          </a:ln>
+        </p:spPr>
+        <p:style>
+          <a:lnRef idx="1">
+            <a:schemeClr val="accent1"/>
+          </a:lnRef>
+          <a:fillRef idx="3">
+            <a:schemeClr val="accent1"/>
+          </a:fillRef>
+          <a:effectRef idx="2">
+            <a:schemeClr val="accent1"/>
+          </a:effectRef>
+          <a:fontRef idx="minor">
+            <a:schemeClr val="lt1"/>
+          </a:fontRef>
+        </p:style>
+        <p:txBody>
+          <a:bodyPr rtlCol="0" anchor="ctr"/>
+          <a:lstStyle/>
+          <a:p>
+            <a:pPr algn="ctr"/>
+          </a:p>
+        </p:txBody>
+      </p:sp>
+      <p:sp>
+        <p:nvSpPr>
+          <p:cNvPr id="8" name="Oval 7"/>
+          <p:cNvSpPr/>
+          <p:nvPr/>
+        </p:nvSpPr>
+        <p:spPr>
+          <a:xfrm>
+            <a:off x="777240" y="1216152"/>
+            <a:ext cx="118872" cy="118872"/>
+          </a:xfrm>
+          <a:prstGeom prst="ellipse">
+            <a:avLst/>
+          </a:prstGeom>
+          <a:solidFill>
+            <a:srgbClr val="FFBD2E"/>
+          </a:solidFill>
+          <a:ln>
+            <a:noFill/>
+          </a:ln>
+        </p:spPr>
+        <p:style>
+          <a:lnRef idx="1">
+            <a:schemeClr val="accent1"/>
+          </a:lnRef>
+          <a:fillRef idx="3">
+            <a:schemeClr val="accent1"/>
+          </a:fillRef>
+          <a:effectRef idx="2">
+            <a:schemeClr val="accent1"/>
+          </a:effectRef>
+          <a:fontRef idx="minor">
+            <a:schemeClr val="lt1"/>
+          </a:fontRef>
+        </p:style>
+        <p:txBody>
+          <a:bodyPr rtlCol="0" anchor="ctr"/>
+          <a:lstStyle/>
+          <a:p>
+            <a:pPr algn="ctr"/>
+          </a:p>
+        </p:txBody>
+      </p:sp>
+      <p:sp>
+        <p:nvSpPr>
+          <p:cNvPr id="9" name="Oval 8"/>
+          <p:cNvSpPr/>
+          <p:nvPr/>
+        </p:nvSpPr>
+        <p:spPr>
+          <a:xfrm>
+            <a:off x="960120" y="1216152"/>
+            <a:ext cx="118872" cy="118872"/>
+          </a:xfrm>
+          <a:prstGeom prst="ellipse">
+            <a:avLst/>
+          </a:prstGeom>
+          <a:solidFill>
+            <a:srgbClr val="27C93F"/>
+          </a:solidFill>
+          <a:ln>
+            <a:noFill/>
+          </a:ln>
+        </p:spPr>
+        <p:style>
+          <a:lnRef idx="1">
+            <a:schemeClr val="accent1"/>
+          </a:lnRef>
+          <a:fillRef idx="3">
+            <a:schemeClr val="accent1"/>
+          </a:fillRef>
+          <a:effectRef idx="2">
+            <a:schemeClr val="accent1"/>
+          </a:effectRef>
+          <a:fontRef idx="minor">
+            <a:schemeClr val="lt1"/>
+          </a:fontRef>
+        </p:style>
+        <p:txBody>
+          <a:bodyPr rtlCol="0" anchor="ctr"/>
+          <a:lstStyle/>
+          <a:p>
+            <a:pPr algn="ctr"/>
+          </a:p>
+        </p:txBody>
+      </p:sp>
+      <p:sp>
+        <p:nvSpPr>
+          <p:cNvPr id="10" name="TextBox 9"/>
+          <p:cNvSpPr txBox="1"/>
+          <p:nvPr/>
+        </p:nvSpPr>
+        <p:spPr>
+          <a:xfrm>
+            <a:off x="1371600" y="1161288"/>
+            <a:ext cx="5486400" cy="274320"/>
+          </a:xfrm>
+          <a:prstGeom prst="rect">
+            <a:avLst/>
+          </a:prstGeom>
+          <a:noFill/>
+        </p:spPr>
+        <p:txBody>
+          <a:bodyPr wrap="square" lIns="45720" rIns="45720" tIns="18288" bIns="18288" anchor="ctr">
+            <a:spAutoFit/>
+          </a:bodyPr>
+          <a:lstStyle/>
+          <a:p>
+            <a:pPr algn="l"/>
+            <a:r>
+              <a:rPr sz="1000" b="0" i="0">
+                <a:solidFill>
+                  <a:srgbClr val="CBD0D8"/>
+                </a:solidFill>
+                <a:latin typeface="Calibri"/>
+              </a:rPr>
+              <a:t>  app.py  —  python</a:t>
+            </a:r>
+          </a:p>
+        </p:txBody>
+      </p:sp>
+      <p:sp>
+        <p:nvSpPr>
+          <p:cNvPr id="11" name="Rectangle 10"/>
+          <p:cNvSpPr/>
+          <p:nvPr/>
+        </p:nvSpPr>
+        <p:spPr>
+          <a:xfrm>
+            <a:off x="457200" y="1463040"/>
+            <a:ext cx="11247120" cy="4206240"/>
+          </a:xfrm>
+          <a:prstGeom prst="rect">
+            <a:avLst/>
+          </a:prstGeom>
+          <a:solidFill>
+            <a:srgbClr val="1E1E28"/>
+          </a:solidFill>
+          <a:ln w="19050">
+            <a:solidFill>
+              <a:srgbClr val="06A77D"/>
+            </a:solidFill>
+          </a:ln>
+        </p:spPr>
+        <p:style>
+          <a:lnRef idx="1">
+            <a:schemeClr val="accent1"/>
+          </a:lnRef>
+          <a:fillRef idx="3">
+            <a:schemeClr val="accent1"/>
+          </a:fillRef>
+          <a:effectRef idx="2">
+            <a:schemeClr val="accent1"/>
+          </a:effectRef>
+          <a:fontRef idx="minor">
+            <a:schemeClr val="lt1"/>
+          </a:fontRef>
+        </p:style>
+        <p:txBody>
+          <a:bodyPr rtlCol="0" anchor="ctr"/>
+          <a:lstStyle/>
+          <a:p>
+            <a:pPr algn="ctr"/>
+          </a:p>
+        </p:txBody>
+      </p:sp>
+      <p:sp>
+        <p:nvSpPr>
+          <p:cNvPr id="12" name="Rectangle 11"/>
+          <p:cNvSpPr/>
+          <p:nvPr/>
+        </p:nvSpPr>
+        <p:spPr>
+          <a:xfrm>
+            <a:off x="457200" y="1463040"/>
+            <a:ext cx="457200" cy="4206240"/>
+          </a:xfrm>
+          <a:prstGeom prst="rect">
+            <a:avLst/>
+          </a:prstGeom>
+          <a:solidFill>
+            <a:srgbClr val="24242E"/>
+          </a:solidFill>
+          <a:ln>
+            <a:noFill/>
+          </a:ln>
+        </p:spPr>
+        <p:style>
+          <a:lnRef idx="1">
+            <a:schemeClr val="accent1"/>
+          </a:lnRef>
+          <a:fillRef idx="3">
+            <a:schemeClr val="accent1"/>
+          </a:fillRef>
+          <a:effectRef idx="2">
+            <a:schemeClr val="accent1"/>
+          </a:effectRef>
+          <a:fontRef idx="minor">
+            <a:schemeClr val="lt1"/>
+          </a:fontRef>
+        </p:style>
+        <p:txBody>
+          <a:bodyPr rtlCol="0" anchor="ctr"/>
+          <a:lstStyle/>
+          <a:p>
+            <a:pPr algn="ctr"/>
+          </a:p>
+        </p:txBody>
+      </p:sp>
+      <p:sp>
+        <p:nvSpPr>
+          <p:cNvPr id="13" name="TextBox 12"/>
+          <p:cNvSpPr txBox="1"/>
+          <p:nvPr/>
+        </p:nvSpPr>
+        <p:spPr>
+          <a:xfrm>
+            <a:off x="1051560" y="1600200"/>
+            <a:ext cx="10607040" cy="4114800"/>
+          </a:xfrm>
+          <a:prstGeom prst="rect">
+            <a:avLst/>
+          </a:prstGeom>
+          <a:noFill/>
+        </p:spPr>
+        <p:txBody>
+          <a:bodyPr wrap="none">
+            <a:spAutoFit/>
+          </a:bodyPr>
+          <a:lstStyle/>
+          <a:p>
             <a:pPr>
               <a:lnSpc>
-                <a:spcPct val="150000"/>
+                <a:spcPct val="115000"/>
               </a:lnSpc>
+              <a:spcAft>
+                <a:spcPts val="0"/>
+              </a:spcAft>
             </a:pPr>
             <a:r>
-              <a:rPr sz="2000" b="1">
-                <a:solidFill>
-                  <a:srgbClr val="00A0B0"/>
-                </a:solidFill>
-                <a:latin typeface="Calibri"/>
-              </a:rPr>
-              <a:t>▸  </a:t>
-            </a:r>
-            <a:r>
-              <a:rPr sz="2000">
-                <a:solidFill>
-                  <a:srgbClr val="1A1A2E"/>
-                </a:solidFill>
-                <a:latin typeface="Calibri"/>
-              </a:rPr>
-              <a:t>Sviluppatore: 'fa quello che deve fare?'</a:t>
+              <a:rPr sz="1300">
+                <a:solidFill>
+                  <a:srgbClr val="E5E5EC"/>
+                </a:solidFill>
+                <a:latin typeface="Consolas"/>
+              </a:rPr>
+              <a:t>try:</a:t>
             </a:r>
           </a:p>
           <a:p>
             <a:pPr>
               <a:lnSpc>
-                <a:spcPct val="150000"/>
+                <a:spcPct val="115000"/>
               </a:lnSpc>
+              <a:spcAft>
+                <a:spcPts val="0"/>
+              </a:spcAft>
             </a:pPr>
             <a:r>
-              <a:rPr sz="2000" b="1">
-                <a:solidFill>
-                  <a:srgbClr val="00A0B0"/>
-                </a:solidFill>
-                <a:latin typeface="Calibri"/>
-              </a:rPr>
-              <a:t>▸  </a:t>
-            </a:r>
-            <a:r>
-              <a:rPr sz="2000">
-                <a:solidFill>
-                  <a:srgbClr val="1A1A2E"/>
-                </a:solidFill>
-                <a:latin typeface="Calibri"/>
-              </a:rPr>
-              <a:t>Attaccante: 'cosa fa che NON dovrebbe fare?'</a:t>
+              <a:rPr sz="1300">
+                <a:solidFill>
+                  <a:srgbClr val="E5E5EC"/>
+                </a:solidFill>
+                <a:latin typeface="Consolas"/>
+              </a:rPr>
+              <a:t>    if not is_authorized(user, resource):</a:t>
             </a:r>
           </a:p>
           <a:p>
             <a:pPr>
               <a:lnSpc>
-                <a:spcPct val="150000"/>
+                <a:spcPct val="115000"/>
               </a:lnSpc>
+              <a:spcAft>
+                <a:spcPts val="0"/>
+              </a:spcAft>
             </a:pPr>
             <a:r>
-              <a:rPr sz="2000" b="1">
-                <a:solidFill>
-                  <a:srgbClr val="00A0B0"/>
-                </a:solidFill>
-                <a:latin typeface="Calibri"/>
-              </a:rPr>
-              <a:t>▸  </a:t>
-            </a:r>
-            <a:r>
-              <a:rPr sz="2000">
-                <a:solidFill>
-                  <a:srgbClr val="1A1A2E"/>
-                </a:solidFill>
-                <a:latin typeface="Calibri"/>
-              </a:rPr>
-              <a:t/>
+              <a:rPr sz="1300">
+                <a:solidFill>
+                  <a:srgbClr val="E5E5EC"/>
+                </a:solidFill>
+                <a:latin typeface="Consolas"/>
+              </a:rPr>
+              <a:t>        return 403</a:t>
             </a:r>
           </a:p>
           <a:p>
             <a:pPr>
               <a:lnSpc>
-                <a:spcPct val="150000"/>
+                <a:spcPct val="115000"/>
               </a:lnSpc>
+              <a:spcAft>
+                <a:spcPts val="0"/>
+              </a:spcAft>
             </a:pPr>
             <a:r>
-              <a:rPr sz="2000" b="1">
-                <a:solidFill>
-                  <a:srgbClr val="00A0B0"/>
-                </a:solidFill>
-                <a:latin typeface="Calibri"/>
-              </a:rPr>
-              <a:t>▸  </a:t>
-            </a:r>
-            <a:r>
-              <a:rPr sz="2000">
-                <a:solidFill>
-                  <a:srgbClr val="1A1A2E"/>
-                </a:solidFill>
-                <a:latin typeface="Calibri"/>
-              </a:rPr>
-              <a:t>Esempio: un login funzionante può essere vulnerabile a 7 attacchi</a:t>
+              <a:rPr sz="1300">
+                <a:solidFill>
+                  <a:srgbClr val="E5E5EC"/>
+                </a:solidFill>
+                <a:latin typeface="Consolas"/>
+              </a:rPr>
+              <a:t>    return resource</a:t>
             </a:r>
           </a:p>
           <a:p>
             <a:pPr>
               <a:lnSpc>
-                <a:spcPct val="150000"/>
+                <a:spcPct val="115000"/>
               </a:lnSpc>
+              <a:spcAft>
+                <a:spcPts val="0"/>
+              </a:spcAft>
             </a:pPr>
             <a:r>
-              <a:rPr sz="2000" b="1">
-                <a:solidFill>
-                  <a:srgbClr val="00A0B0"/>
-                </a:solidFill>
-                <a:latin typeface="Calibri"/>
-              </a:rPr>
-              <a:t>▸  </a:t>
-            </a:r>
-            <a:r>
-              <a:rPr sz="2000">
-                <a:solidFill>
-                  <a:srgbClr val="1A1A2E"/>
-                </a:solidFill>
-                <a:latin typeface="Calibri"/>
-              </a:rPr>
-              <a:t>  SQL Injection · brute force · timing · privilege escalation · ...</a:t>
+              <a:rPr sz="1300">
+                <a:solidFill>
+                  <a:srgbClr val="E5E5EC"/>
+                </a:solidFill>
+                <a:latin typeface="Consolas"/>
+              </a:rPr>
+              <a:t>except Exception as e:</a:t>
             </a:r>
           </a:p>
           <a:p>
             <a:pPr>
               <a:lnSpc>
-                <a:spcPct val="150000"/>
+                <a:spcPct val="115000"/>
               </a:lnSpc>
+              <a:spcAft>
+                <a:spcPts val="0"/>
+              </a:spcAft>
             </a:pPr>
             <a:r>
-              <a:rPr sz="2000" b="1">
-                <a:solidFill>
-                  <a:srgbClr val="00A0B0"/>
-                </a:solidFill>
-                <a:latin typeface="Calibri"/>
-              </a:rPr>
-              <a:t>▸  </a:t>
-            </a:r>
-            <a:r>
-              <a:rPr sz="2000">
-                <a:solidFill>
-                  <a:srgbClr val="1A1A2E"/>
-                </a:solidFill>
-                <a:latin typeface="Calibri"/>
-              </a:rPr>
-              <a:t/>
+              <a:rPr sz="1300">
+                <a:solidFill>
+                  <a:srgbClr val="E5E5EC"/>
+                </a:solidFill>
+                <a:latin typeface="Consolas"/>
+              </a:rPr>
+              <a:t>    log.exception("auth check failed")</a:t>
             </a:r>
           </a:p>
           <a:p>
             <a:pPr>
               <a:lnSpc>
-                <a:spcPct val="150000"/>
+                <a:spcPct val="115000"/>
               </a:lnSpc>
+              <a:spcAft>
+                <a:spcPts val="0"/>
+              </a:spcAft>
             </a:pPr>
             <a:r>
-              <a:rPr sz="2000" b="1">
-                <a:solidFill>
-                  <a:srgbClr val="00A0B0"/>
-                </a:solidFill>
-                <a:latin typeface="Calibri"/>
-              </a:rPr>
-              <a:t>▸  </a:t>
-            </a:r>
-            <a:r>
-              <a:rPr sz="2000">
-                <a:solidFill>
-                  <a:srgbClr val="1A1A2E"/>
-                </a:solidFill>
-                <a:latin typeface="Calibri"/>
-              </a:rPr>
-              <a:t>La sicurezza è 'l'altra metà' della professionalità</a:t>
+              <a:rPr sz="1300">
+                <a:solidFill>
+                  <a:srgbClr val="E5E5EC"/>
+                </a:solidFill>
+                <a:latin typeface="Consolas"/>
+              </a:rPr>
+              <a:t>    return 503   # ✅ servizio non disponibile,</a:t>
+            </a:r>
+          </a:p>
+          <a:p>
+            <a:pPr>
+              <a:lnSpc>
+                <a:spcPct val="115000"/>
+              </a:lnSpc>
+              <a:spcAft>
+                <a:spcPts val="0"/>
+              </a:spcAft>
+            </a:pPr>
+            <a:r>
+              <a:rPr sz="1300">
+                <a:solidFill>
+                  <a:srgbClr val="E5E5EC"/>
+                </a:solidFill>
+                <a:latin typeface="Consolas"/>
+              </a:rPr>
+              <a:t>                 # NON accesso senza autorizzazione</a:t>
+            </a:r>
+          </a:p>
+        </p:txBody>
+      </p:sp>
+      <p:sp>
+        <p:nvSpPr>
+          <p:cNvPr id="14" name="TextBox 13"/>
+          <p:cNvSpPr txBox="1"/>
+          <p:nvPr/>
+        </p:nvSpPr>
+        <p:spPr>
+          <a:xfrm>
+            <a:off x="502920" y="1600200"/>
+            <a:ext cx="365760" cy="4114800"/>
+          </a:xfrm>
+          <a:prstGeom prst="rect">
+            <a:avLst/>
+          </a:prstGeom>
+          <a:noFill/>
+        </p:spPr>
+        <p:txBody>
+          <a:bodyPr wrap="none">
+            <a:spAutoFit/>
+          </a:bodyPr>
+          <a:lstStyle/>
+          <a:p>
+            <a:pPr algn="r">
+              <a:lnSpc>
+                <a:spcPct val="115000"/>
+              </a:lnSpc>
+              <a:spcAft>
+                <a:spcPts val="0"/>
+              </a:spcAft>
+            </a:pPr>
+            <a:r>
+              <a:rPr sz="1100">
+                <a:solidFill>
+                  <a:srgbClr val="6B7280"/>
+                </a:solidFill>
+                <a:latin typeface="Consolas"/>
+              </a:rPr>
+              <a:t>1</a:t>
+            </a:r>
+          </a:p>
+          <a:p>
+            <a:pPr algn="r">
+              <a:lnSpc>
+                <a:spcPct val="115000"/>
+              </a:lnSpc>
+              <a:spcAft>
+                <a:spcPts val="0"/>
+              </a:spcAft>
+            </a:pPr>
+            <a:r>
+              <a:rPr sz="1100">
+                <a:solidFill>
+                  <a:srgbClr val="6B7280"/>
+                </a:solidFill>
+                <a:latin typeface="Consolas"/>
+              </a:rPr>
+              <a:t>2</a:t>
+            </a:r>
+          </a:p>
+          <a:p>
+            <a:pPr algn="r">
+              <a:lnSpc>
+                <a:spcPct val="115000"/>
+              </a:lnSpc>
+              <a:spcAft>
+                <a:spcPts val="0"/>
+              </a:spcAft>
+            </a:pPr>
+            <a:r>
+              <a:rPr sz="1100">
+                <a:solidFill>
+                  <a:srgbClr val="6B7280"/>
+                </a:solidFill>
+                <a:latin typeface="Consolas"/>
+              </a:rPr>
+              <a:t>3</a:t>
+            </a:r>
+          </a:p>
+          <a:p>
+            <a:pPr algn="r">
+              <a:lnSpc>
+                <a:spcPct val="115000"/>
+              </a:lnSpc>
+              <a:spcAft>
+                <a:spcPts val="0"/>
+              </a:spcAft>
+            </a:pPr>
+            <a:r>
+              <a:rPr sz="1100">
+                <a:solidFill>
+                  <a:srgbClr val="6B7280"/>
+                </a:solidFill>
+                <a:latin typeface="Consolas"/>
+              </a:rPr>
+              <a:t>4</a:t>
+            </a:r>
+          </a:p>
+          <a:p>
+            <a:pPr algn="r">
+              <a:lnSpc>
+                <a:spcPct val="115000"/>
+              </a:lnSpc>
+              <a:spcAft>
+                <a:spcPts val="0"/>
+              </a:spcAft>
+            </a:pPr>
+            <a:r>
+              <a:rPr sz="1100">
+                <a:solidFill>
+                  <a:srgbClr val="6B7280"/>
+                </a:solidFill>
+                <a:latin typeface="Consolas"/>
+              </a:rPr>
+              <a:t>5</a:t>
+            </a:r>
+          </a:p>
+          <a:p>
+            <a:pPr algn="r">
+              <a:lnSpc>
+                <a:spcPct val="115000"/>
+              </a:lnSpc>
+              <a:spcAft>
+                <a:spcPts val="0"/>
+              </a:spcAft>
+            </a:pPr>
+            <a:r>
+              <a:rPr sz="1100">
+                <a:solidFill>
+                  <a:srgbClr val="6B7280"/>
+                </a:solidFill>
+                <a:latin typeface="Consolas"/>
+              </a:rPr>
+              <a:t>6</a:t>
+            </a:r>
+          </a:p>
+          <a:p>
+            <a:pPr algn="r">
+              <a:lnSpc>
+                <a:spcPct val="115000"/>
+              </a:lnSpc>
+              <a:spcAft>
+                <a:spcPts val="0"/>
+              </a:spcAft>
+            </a:pPr>
+            <a:r>
+              <a:rPr sz="1100">
+                <a:solidFill>
+                  <a:srgbClr val="6B7280"/>
+                </a:solidFill>
+                <a:latin typeface="Consolas"/>
+              </a:rPr>
+              <a:t>7</a:t>
+            </a:r>
+          </a:p>
+          <a:p>
+            <a:pPr algn="r">
+              <a:lnSpc>
+                <a:spcPct val="115000"/>
+              </a:lnSpc>
+              <a:spcAft>
+                <a:spcPts val="0"/>
+              </a:spcAft>
+            </a:pPr>
+            <a:r>
+              <a:rPr sz="1100">
+                <a:solidFill>
+                  <a:srgbClr val="6B7280"/>
+                </a:solidFill>
+                <a:latin typeface="Consolas"/>
+              </a:rPr>
+              <a:t>8</a:t>
+            </a:r>
+          </a:p>
+        </p:txBody>
+      </p:sp>
+      <p:sp>
+        <p:nvSpPr>
+          <p:cNvPr id="15" name="TextBox 14"/>
+          <p:cNvSpPr txBox="1"/>
+          <p:nvPr/>
+        </p:nvSpPr>
+        <p:spPr>
+          <a:xfrm>
+            <a:off x="457200" y="5852160"/>
+            <a:ext cx="11247120" cy="502920"/>
+          </a:xfrm>
+          <a:prstGeom prst="rect">
+            <a:avLst/>
+          </a:prstGeom>
+          <a:noFill/>
+        </p:spPr>
+        <p:txBody>
+          <a:bodyPr wrap="square" lIns="45720" rIns="45720" tIns="18288" bIns="18288" anchor="t">
+            <a:spAutoFit/>
+          </a:bodyPr>
+          <a:lstStyle/>
+          <a:p>
+            <a:pPr algn="l"/>
+            <a:r>
+              <a:rPr sz="1400" b="1" i="1">
+                <a:solidFill>
+                  <a:srgbClr val="06A77D"/>
+                </a:solidFill>
+                <a:latin typeface="Calibri"/>
+              </a:rPr>
+              <a:t>✓  In dubbio, il sistema CHIUDE, non APRE</a:t>
             </a:r>
           </a:p>
         </p:txBody>
       </p:sp>
       <p:cxnSp>
         <p:nvCxnSpPr>
-          <p:cNvPr id="5" name="Connector 4"/>
+          <p:cNvPr id="16" name="Connector 15"/>
           <p:cNvCxnSpPr/>
           <p:nvPr/>
         </p:nvCxnSpPr>
@@ -4204,14 +5395,14 @@
       </p:cxnSp>
       <p:sp>
         <p:nvSpPr>
-          <p:cNvPr id="6" name="TextBox 5"/>
+          <p:cNvPr id="17" name="TextBox 16"/>
           <p:cNvSpPr txBox="1"/>
           <p:nvPr/>
         </p:nvSpPr>
         <p:spPr>
           <a:xfrm>
             <a:off x="457200" y="6473952"/>
-            <a:ext cx="7315200" cy="320040"/>
+            <a:ext cx="7315200" cy="292608"/>
           </a:xfrm>
           <a:prstGeom prst="rect">
             <a:avLst/>
@@ -4232,21 +5423,21 @@
                 </a:solidFill>
                 <a:latin typeface="Calibri"/>
               </a:rPr>
-              <a:t>Secure Coding · Corso IFTS STEM · A. Manneschi</a:t>
-            </a:r>
-          </a:p>
-        </p:txBody>
-      </p:sp>
-      <p:sp>
-        <p:nvSpPr>
-          <p:cNvPr id="7" name="TextBox 6"/>
+              <a:t>Secure Coding · Corso IFTS STEM · A. Manneschi · 2024/2025</a:t>
+            </a:r>
+          </a:p>
+        </p:txBody>
+      </p:sp>
+      <p:sp>
+        <p:nvSpPr>
+          <p:cNvPr id="18" name="TextBox 17"/>
           <p:cNvSpPr txBox="1"/>
           <p:nvPr/>
         </p:nvSpPr>
         <p:spPr>
           <a:xfrm>
             <a:off x="10515600" y="6473952"/>
-            <a:ext cx="1188720" cy="320040"/>
+            <a:ext cx="1188720" cy="292608"/>
           </a:xfrm>
           <a:prstGeom prst="rect">
             <a:avLst/>
@@ -4267,7 +5458,7 @@
                 </a:solidFill>
                 <a:latin typeface="Calibri"/>
               </a:rPr>
-              <a:t>L1  ·  11/12</a:t>
+              <a:t>L1  ·  11/14</a:t>
             </a:r>
           </a:p>
         </p:txBody>
@@ -4299,7 +5490,7 @@
         <p:spPr>
           <a:xfrm>
             <a:off x="0" y="0"/>
-            <a:ext cx="12191695" cy="6858000"/>
+            <a:ext cx="12191695" cy="777240"/>
           </a:xfrm>
           <a:prstGeom prst="rect">
             <a:avLst/>
@@ -4335,14 +5526,469 @@
       </p:sp>
       <p:sp>
         <p:nvSpPr>
-          <p:cNvPr id="3" name="Oval 2"/>
+          <p:cNvPr id="3" name="TextBox 2"/>
+          <p:cNvSpPr txBox="1"/>
+          <p:nvPr/>
+        </p:nvSpPr>
+        <p:spPr>
+          <a:xfrm>
+            <a:off x="457200" y="164592"/>
+            <a:ext cx="10972800" cy="502920"/>
+          </a:xfrm>
+          <a:prstGeom prst="rect">
+            <a:avLst/>
+          </a:prstGeom>
+          <a:noFill/>
+        </p:spPr>
+        <p:txBody>
+          <a:bodyPr wrap="square" lIns="45720" rIns="45720" tIns="18288" bIns="18288" anchor="ctr">
+            <a:spAutoFit/>
+          </a:bodyPr>
+          <a:lstStyle/>
+          <a:p>
+            <a:pPr algn="l"/>
+            <a:r>
+              <a:rPr sz="2400" b="1" i="0">
+                <a:solidFill>
+                  <a:srgbClr val="FFFFFF"/>
+                </a:solidFill>
+                <a:latin typeface="Calibri"/>
+              </a:rPr>
+              <a:t>🎯  Mentalità avversaria</a:t>
+            </a:r>
+          </a:p>
+        </p:txBody>
+      </p:sp>
+      <p:sp>
+        <p:nvSpPr>
+          <p:cNvPr id="4" name="TextBox 3"/>
+          <p:cNvSpPr txBox="1"/>
+          <p:nvPr/>
+        </p:nvSpPr>
+        <p:spPr>
+          <a:xfrm>
+            <a:off x="640080" y="1097280"/>
+            <a:ext cx="10972800" cy="5029200"/>
+          </a:xfrm>
+          <a:prstGeom prst="rect">
+            <a:avLst/>
+          </a:prstGeom>
+          <a:noFill/>
+        </p:spPr>
+        <p:txBody>
+          <a:bodyPr wrap="square">
+            <a:spAutoFit/>
+          </a:bodyPr>
+          <a:lstStyle/>
+          <a:p>
+            <a:pPr>
+              <a:lnSpc>
+                <a:spcPct val="150000"/>
+              </a:lnSpc>
+              <a:spcAft>
+                <a:spcPts val="400"/>
+              </a:spcAft>
+            </a:pPr>
+            <a:r>
+              <a:rPr sz="2000" b="1">
+                <a:solidFill>
+                  <a:srgbClr val="00A0B0"/>
+                </a:solidFill>
+                <a:latin typeface="Calibri"/>
+              </a:rPr>
+              <a:t>▸  </a:t>
+            </a:r>
+            <a:r>
+              <a:rPr sz="2000">
+                <a:solidFill>
+                  <a:srgbClr val="1A1A2E"/>
+                </a:solidFill>
+                <a:latin typeface="Calibri"/>
+              </a:rPr>
+              <a:t>Sviluppatore: 'fa quello che deve fare?'</a:t>
+            </a:r>
+          </a:p>
+          <a:p>
+            <a:pPr>
+              <a:lnSpc>
+                <a:spcPct val="150000"/>
+              </a:lnSpc>
+              <a:spcAft>
+                <a:spcPts val="400"/>
+              </a:spcAft>
+            </a:pPr>
+            <a:r>
+              <a:rPr sz="2000" b="1">
+                <a:solidFill>
+                  <a:srgbClr val="00A0B0"/>
+                </a:solidFill>
+                <a:latin typeface="Calibri"/>
+              </a:rPr>
+              <a:t>▸  </a:t>
+            </a:r>
+            <a:r>
+              <a:rPr sz="2000">
+                <a:solidFill>
+                  <a:srgbClr val="1A1A2E"/>
+                </a:solidFill>
+                <a:latin typeface="Calibri"/>
+              </a:rPr>
+              <a:t>Attaccante: 'cosa fa che NON dovrebbe fare?'</a:t>
+            </a:r>
+          </a:p>
+          <a:p>
+            <a:pPr>
+              <a:lnSpc>
+                <a:spcPct val="150000"/>
+              </a:lnSpc>
+              <a:spcAft>
+                <a:spcPts val="400"/>
+              </a:spcAft>
+            </a:pPr>
+            <a:r>
+              <a:rPr sz="2000" b="1">
+                <a:solidFill>
+                  <a:srgbClr val="00A0B0"/>
+                </a:solidFill>
+                <a:latin typeface="Calibri"/>
+              </a:rPr>
+              <a:t>▸  </a:t>
+            </a:r>
+            <a:r>
+              <a:rPr sz="2000">
+                <a:solidFill>
+                  <a:srgbClr val="1A1A2E"/>
+                </a:solidFill>
+                <a:latin typeface="Calibri"/>
+              </a:rPr>
+              <a:t/>
+            </a:r>
+          </a:p>
+          <a:p>
+            <a:pPr>
+              <a:lnSpc>
+                <a:spcPct val="150000"/>
+              </a:lnSpc>
+              <a:spcAft>
+                <a:spcPts val="400"/>
+              </a:spcAft>
+            </a:pPr>
+            <a:r>
+              <a:rPr sz="2000" b="1">
+                <a:solidFill>
+                  <a:srgbClr val="00A0B0"/>
+                </a:solidFill>
+                <a:latin typeface="Calibri"/>
+              </a:rPr>
+              <a:t>▸  </a:t>
+            </a:r>
+            <a:r>
+              <a:rPr sz="2000">
+                <a:solidFill>
+                  <a:srgbClr val="1A1A2E"/>
+                </a:solidFill>
+                <a:latin typeface="Calibri"/>
+              </a:rPr>
+              <a:t>Esempio: un login funzionante può essere vulnerabile a 7 attacchi diversi</a:t>
+            </a:r>
+          </a:p>
+          <a:p>
+            <a:pPr>
+              <a:lnSpc>
+                <a:spcPct val="150000"/>
+              </a:lnSpc>
+              <a:spcAft>
+                <a:spcPts val="400"/>
+              </a:spcAft>
+            </a:pPr>
+            <a:r>
+              <a:rPr sz="2000" b="1">
+                <a:solidFill>
+                  <a:srgbClr val="00A0B0"/>
+                </a:solidFill>
+                <a:latin typeface="Calibri"/>
+              </a:rPr>
+              <a:t>▸  </a:t>
+            </a:r>
+            <a:r>
+              <a:rPr sz="2000">
+                <a:solidFill>
+                  <a:srgbClr val="1A1A2E"/>
+                </a:solidFill>
+                <a:latin typeface="Calibri"/>
+              </a:rPr>
+              <a:t>SQL Injection · brute force · timing · privilege escalation · ...</a:t>
+            </a:r>
+          </a:p>
+          <a:p>
+            <a:pPr>
+              <a:lnSpc>
+                <a:spcPct val="150000"/>
+              </a:lnSpc>
+              <a:spcAft>
+                <a:spcPts val="400"/>
+              </a:spcAft>
+            </a:pPr>
+            <a:r>
+              <a:rPr sz="2000" b="1">
+                <a:solidFill>
+                  <a:srgbClr val="00A0B0"/>
+                </a:solidFill>
+                <a:latin typeface="Calibri"/>
+              </a:rPr>
+              <a:t>▸  </a:t>
+            </a:r>
+            <a:r>
+              <a:rPr sz="2000">
+                <a:solidFill>
+                  <a:srgbClr val="1A1A2E"/>
+                </a:solidFill>
+                <a:latin typeface="Calibri"/>
+              </a:rPr>
+              <a:t/>
+            </a:r>
+          </a:p>
+          <a:p>
+            <a:pPr>
+              <a:lnSpc>
+                <a:spcPct val="150000"/>
+              </a:lnSpc>
+              <a:spcAft>
+                <a:spcPts val="400"/>
+              </a:spcAft>
+            </a:pPr>
+            <a:r>
+              <a:rPr sz="2000" b="1">
+                <a:solidFill>
+                  <a:srgbClr val="00A0B0"/>
+                </a:solidFill>
+                <a:latin typeface="Calibri"/>
+              </a:rPr>
+              <a:t>▸  </a:t>
+            </a:r>
+            <a:r>
+              <a:rPr sz="2000">
+                <a:solidFill>
+                  <a:srgbClr val="1A1A2E"/>
+                </a:solidFill>
+                <a:latin typeface="Calibri"/>
+              </a:rPr>
+              <a:t>La sicurezza è 'l'altra metà' della professionalità</a:t>
+            </a:r>
+          </a:p>
+        </p:txBody>
+      </p:sp>
+      <p:cxnSp>
+        <p:nvCxnSpPr>
+          <p:cNvPr id="5" name="Connector 4"/>
+          <p:cNvCxnSpPr/>
+          <p:nvPr/>
+        </p:nvCxnSpPr>
+        <p:spPr>
+          <a:xfrm>
+            <a:off x="457200" y="6446520"/>
+            <a:ext cx="11274552" cy="0"/>
+          </a:xfrm>
+          <a:prstGeom prst="line">
+            <a:avLst/>
+          </a:prstGeom>
+          <a:ln w="19050">
+            <a:solidFill>
+              <a:srgbClr val="00A0B0"/>
+            </a:solidFill>
+          </a:ln>
+        </p:spPr>
+        <p:style>
+          <a:lnRef idx="2">
+            <a:schemeClr val="accent1"/>
+          </a:lnRef>
+          <a:fillRef idx="0">
+            <a:schemeClr val="accent1"/>
+          </a:fillRef>
+          <a:effectRef idx="1">
+            <a:schemeClr val="accent1"/>
+          </a:effectRef>
+          <a:fontRef idx="minor">
+            <a:schemeClr val="tx1"/>
+          </a:fontRef>
+        </p:style>
+      </p:cxnSp>
+      <p:sp>
+        <p:nvSpPr>
+          <p:cNvPr id="6" name="TextBox 5"/>
+          <p:cNvSpPr txBox="1"/>
+          <p:nvPr/>
+        </p:nvSpPr>
+        <p:spPr>
+          <a:xfrm>
+            <a:off x="457200" y="6473952"/>
+            <a:ext cx="7315200" cy="292608"/>
+          </a:xfrm>
+          <a:prstGeom prst="rect">
+            <a:avLst/>
+          </a:prstGeom>
+          <a:noFill/>
+        </p:spPr>
+        <p:txBody>
+          <a:bodyPr wrap="square" lIns="45720" rIns="45720" tIns="18288" bIns="18288" anchor="t">
+            <a:spAutoFit/>
+          </a:bodyPr>
+          <a:lstStyle/>
+          <a:p>
+            <a:pPr algn="l"/>
+            <a:r>
+              <a:rPr sz="1000" b="0" i="0">
+                <a:solidFill>
+                  <a:srgbClr val="6B7280"/>
+                </a:solidFill>
+                <a:latin typeface="Calibri"/>
+              </a:rPr>
+              <a:t>Secure Coding · Corso IFTS STEM · A. Manneschi · 2024/2025</a:t>
+            </a:r>
+          </a:p>
+        </p:txBody>
+      </p:sp>
+      <p:sp>
+        <p:nvSpPr>
+          <p:cNvPr id="7" name="TextBox 6"/>
+          <p:cNvSpPr txBox="1"/>
+          <p:nvPr/>
+        </p:nvSpPr>
+        <p:spPr>
+          <a:xfrm>
+            <a:off x="10515600" y="6473952"/>
+            <a:ext cx="1188720" cy="292608"/>
+          </a:xfrm>
+          <a:prstGeom prst="rect">
+            <a:avLst/>
+          </a:prstGeom>
+          <a:noFill/>
+        </p:spPr>
+        <p:txBody>
+          <a:bodyPr wrap="square" lIns="45720" rIns="45720" tIns="18288" bIns="18288" anchor="t">
+            <a:spAutoFit/>
+          </a:bodyPr>
+          <a:lstStyle/>
+          <a:p>
+            <a:pPr algn="r"/>
+            <a:r>
+              <a:rPr sz="1000" b="1" i="0">
+                <a:solidFill>
+                  <a:srgbClr val="6B7280"/>
+                </a:solidFill>
+                <a:latin typeface="Calibri"/>
+              </a:rPr>
+              <a:t>L1  ·  12/14</a:t>
+            </a:r>
+          </a:p>
+        </p:txBody>
+      </p:sp>
+    </p:spTree>
+  </p:cSld>
+  <p:clrMapOvr>
+    <a:masterClrMapping/>
+  </p:clrMapOvr>
+</p:sld>
+</file>
+
+<file path=ppt/slides/slide13.xml><?xml version="1.0" encoding="utf-8"?>
+<p:sld xmlns:a="http://schemas.openxmlformats.org/drawingml/2006/main" xmlns:p="http://schemas.openxmlformats.org/presentationml/2006/main" xmlns:r="http://schemas.openxmlformats.org/officeDocument/2006/relationships">
+  <p:cSld>
+    <p:spTree>
+      <p:nvGrpSpPr>
+        <p:cNvPr id="1" name=""/>
+        <p:cNvGrpSpPr/>
+        <p:nvPr/>
+      </p:nvGrpSpPr>
+      <p:grpSpPr/>
+      <p:sp>
+        <p:nvSpPr>
+          <p:cNvPr id="2" name="Rectangle 1"/>
           <p:cNvSpPr/>
           <p:nvPr/>
         </p:nvSpPr>
         <p:spPr>
           <a:xfrm>
-            <a:off x="8686800" y="457200"/>
-            <a:ext cx="3200400" cy="3200400"/>
+            <a:off x="0" y="0"/>
+            <a:ext cx="12191695" cy="777240"/>
+          </a:xfrm>
+          <a:prstGeom prst="rect">
+            <a:avLst/>
+          </a:prstGeom>
+          <a:solidFill>
+            <a:srgbClr val="0F2D52"/>
+          </a:solidFill>
+          <a:ln>
+            <a:noFill/>
+          </a:ln>
+        </p:spPr>
+        <p:style>
+          <a:lnRef idx="1">
+            <a:schemeClr val="accent1"/>
+          </a:lnRef>
+          <a:fillRef idx="3">
+            <a:schemeClr val="accent1"/>
+          </a:fillRef>
+          <a:effectRef idx="2">
+            <a:schemeClr val="accent1"/>
+          </a:effectRef>
+          <a:fontRef idx="minor">
+            <a:schemeClr val="lt1"/>
+          </a:fontRef>
+        </p:style>
+        <p:txBody>
+          <a:bodyPr rtlCol="0" anchor="ctr"/>
+          <a:lstStyle/>
+          <a:p>
+            <a:pPr algn="ctr"/>
+          </a:p>
+        </p:txBody>
+      </p:sp>
+      <p:sp>
+        <p:nvSpPr>
+          <p:cNvPr id="3" name="TextBox 2"/>
+          <p:cNvSpPr txBox="1"/>
+          <p:nvPr/>
+        </p:nvSpPr>
+        <p:spPr>
+          <a:xfrm>
+            <a:off x="457200" y="164592"/>
+            <a:ext cx="10972800" cy="502920"/>
+          </a:xfrm>
+          <a:prstGeom prst="rect">
+            <a:avLst/>
+          </a:prstGeom>
+          <a:noFill/>
+        </p:spPr>
+        <p:txBody>
+          <a:bodyPr wrap="square" lIns="45720" rIns="45720" tIns="18288" bIns="18288" anchor="ctr">
+            <a:spAutoFit/>
+          </a:bodyPr>
+          <a:lstStyle/>
+          <a:p>
+            <a:pPr algn="l"/>
+            <a:r>
+              <a:rPr sz="2400" b="1" i="0">
+                <a:solidFill>
+                  <a:srgbClr val="FFFFFF"/>
+                </a:solidFill>
+                <a:latin typeface="Calibri"/>
+              </a:rPr>
+              <a:t>📌  Cosa portare a casa</a:t>
+            </a:r>
+          </a:p>
+        </p:txBody>
+      </p:sp>
+      <p:sp>
+        <p:nvSpPr>
+          <p:cNvPr id="4" name="Oval 3"/>
+          <p:cNvSpPr/>
+          <p:nvPr/>
+        </p:nvSpPr>
+        <p:spPr>
+          <a:xfrm>
+            <a:off x="914400" y="1440180"/>
+            <a:ext cx="777240" cy="777240"/>
           </a:xfrm>
           <a:prstGeom prst="ellipse">
             <a:avLst/>
@@ -4378,49 +6024,14 @@
       </p:sp>
       <p:sp>
         <p:nvSpPr>
-          <p:cNvPr id="4" name="TextBox 3"/>
-          <p:cNvSpPr txBox="1"/>
-          <p:nvPr/>
-        </p:nvSpPr>
-        <p:spPr>
-          <a:xfrm>
-            <a:off x="731520" y="1645920"/>
-            <a:ext cx="7315200" cy="2286000"/>
-          </a:xfrm>
-          <a:prstGeom prst="rect">
-            <a:avLst/>
-          </a:prstGeom>
-          <a:noFill/>
-        </p:spPr>
-        <p:txBody>
-          <a:bodyPr wrap="square" lIns="45720" rIns="45720" tIns="18288" bIns="18288" anchor="t">
-            <a:spAutoFit/>
-          </a:bodyPr>
-          <a:lstStyle/>
-          <a:p>
-            <a:pPr algn="l"/>
-            <a:r>
-              <a:rPr sz="8800" b="1" i="0">
-                <a:solidFill>
-                  <a:srgbClr val="FFFFFF"/>
-                </a:solidFill>
-                <a:latin typeface="Calibri"/>
-              </a:rPr>
-              <a:t>Domande?</a:t>
-            </a:r>
-          </a:p>
-        </p:txBody>
-      </p:sp>
-      <p:sp>
-        <p:nvSpPr>
           <p:cNvPr id="5" name="TextBox 4"/>
           <p:cNvSpPr txBox="1"/>
           <p:nvPr/>
         </p:nvSpPr>
         <p:spPr>
           <a:xfrm>
-            <a:off x="8686800" y="457200"/>
-            <a:ext cx="3200400" cy="3200400"/>
+            <a:off x="914400" y="1440180"/>
+            <a:ext cx="777240" cy="777240"/>
           </a:xfrm>
           <a:prstGeom prst="rect">
             <a:avLst/>
@@ -4435,27 +6046,74 @@
           <a:p>
             <a:pPr algn="ctr"/>
             <a:r>
-              <a:rPr sz="18000" b="1" i="0">
+              <a:rPr sz="2800" b="1" i="0">
                 <a:solidFill>
                   <a:srgbClr val="FFFFFF"/>
                 </a:solidFill>
                 <a:latin typeface="Calibri"/>
               </a:rPr>
-              <a:t>?</a:t>
-            </a:r>
-          </a:p>
-        </p:txBody>
-      </p:sp>
-      <p:sp>
-        <p:nvSpPr>
-          <p:cNvPr id="6" name="TextBox 5"/>
+              <a:t>1</a:t>
+            </a:r>
+          </a:p>
+        </p:txBody>
+      </p:sp>
+      <p:sp>
+        <p:nvSpPr>
+          <p:cNvPr id="6" name="Rounded Rectangle 5"/>
+          <p:cNvSpPr/>
+          <p:nvPr/>
+        </p:nvSpPr>
+        <p:spPr>
+          <a:xfrm>
+            <a:off x="2011680" y="1440180"/>
+            <a:ext cx="9144000" cy="777240"/>
+          </a:xfrm>
+          <a:prstGeom prst="roundRect">
+            <a:avLst>
+              <a:gd name="adj" fmla="val 8000"/>
+            </a:avLst>
+          </a:prstGeom>
+          <a:solidFill>
+            <a:srgbClr val="FBFBFD"/>
+          </a:solidFill>
+          <a:ln w="19050">
+            <a:solidFill>
+              <a:srgbClr val="00A0B0"/>
+            </a:solidFill>
+          </a:ln>
+        </p:spPr>
+        <p:style>
+          <a:lnRef idx="1">
+            <a:schemeClr val="accent1"/>
+          </a:lnRef>
+          <a:fillRef idx="3">
+            <a:schemeClr val="accent1"/>
+          </a:fillRef>
+          <a:effectRef idx="2">
+            <a:schemeClr val="accent1"/>
+          </a:effectRef>
+          <a:fontRef idx="minor">
+            <a:schemeClr val="lt1"/>
+          </a:fontRef>
+        </p:style>
+        <p:txBody>
+          <a:bodyPr rtlCol="0" anchor="ctr"/>
+          <a:lstStyle/>
+          <a:p>
+            <a:pPr algn="ctr"/>
+          </a:p>
+        </p:txBody>
+      </p:sp>
+      <p:sp>
+        <p:nvSpPr>
+          <p:cNvPr id="7" name="TextBox 6"/>
           <p:cNvSpPr txBox="1"/>
           <p:nvPr/>
         </p:nvSpPr>
         <p:spPr>
           <a:xfrm>
-            <a:off x="731520" y="4114800"/>
-            <a:ext cx="10058400" cy="457200"/>
+            <a:off x="2286000" y="1440180"/>
+            <a:ext cx="8686800" cy="777240"/>
           </a:xfrm>
           <a:prstGeom prst="rect">
             <a:avLst/>
@@ -4463,34 +6121,77 @@
           <a:noFill/>
         </p:spPr>
         <p:txBody>
-          <a:bodyPr wrap="square" lIns="45720" rIns="45720" tIns="18288" bIns="18288" anchor="t">
+          <a:bodyPr wrap="square" lIns="45720" rIns="45720" tIns="18288" bIns="18288" anchor="ctr">
             <a:spAutoFit/>
           </a:bodyPr>
           <a:lstStyle/>
           <a:p>
             <a:pPr algn="l"/>
             <a:r>
-              <a:rPr sz="2200" b="1" i="0">
-                <a:solidFill>
-                  <a:srgbClr val="00A0B0"/>
-                </a:solidFill>
-                <a:latin typeface="Calibri"/>
-              </a:rPr>
-              <a:t>Cosa portarti via:</a:t>
-            </a:r>
-          </a:p>
-        </p:txBody>
-      </p:sp>
-      <p:sp>
-        <p:nvSpPr>
-          <p:cNvPr id="7" name="TextBox 6"/>
+              <a:rPr sz="1800" b="0" i="0">
+                <a:solidFill>
+                  <a:srgbClr val="1A1A2E"/>
+                </a:solidFill>
+                <a:latin typeface="Calibri"/>
+              </a:rPr>
+              <a:t>La sicurezza è una PROPRIETÀ, non una feature</a:t>
+            </a:r>
+          </a:p>
+        </p:txBody>
+      </p:sp>
+      <p:sp>
+        <p:nvSpPr>
+          <p:cNvPr id="8" name="Oval 7"/>
+          <p:cNvSpPr/>
+          <p:nvPr/>
+        </p:nvSpPr>
+        <p:spPr>
+          <a:xfrm>
+            <a:off x="914400" y="2354580"/>
+            <a:ext cx="777240" cy="777240"/>
+          </a:xfrm>
+          <a:prstGeom prst="ellipse">
+            <a:avLst/>
+          </a:prstGeom>
+          <a:solidFill>
+            <a:srgbClr val="00A0B0"/>
+          </a:solidFill>
+          <a:ln>
+            <a:noFill/>
+          </a:ln>
+        </p:spPr>
+        <p:style>
+          <a:lnRef idx="1">
+            <a:schemeClr val="accent1"/>
+          </a:lnRef>
+          <a:fillRef idx="3">
+            <a:schemeClr val="accent1"/>
+          </a:fillRef>
+          <a:effectRef idx="2">
+            <a:schemeClr val="accent1"/>
+          </a:effectRef>
+          <a:fontRef idx="minor">
+            <a:schemeClr val="lt1"/>
+          </a:fontRef>
+        </p:style>
+        <p:txBody>
+          <a:bodyPr rtlCol="0" anchor="ctr"/>
+          <a:lstStyle/>
+          <a:p>
+            <a:pPr algn="ctr"/>
+          </a:p>
+        </p:txBody>
+      </p:sp>
+      <p:sp>
+        <p:nvSpPr>
+          <p:cNvPr id="9" name="TextBox 8"/>
           <p:cNvSpPr txBox="1"/>
           <p:nvPr/>
         </p:nvSpPr>
         <p:spPr>
           <a:xfrm>
-            <a:off x="731520" y="5303520"/>
-            <a:ext cx="10058400" cy="548640"/>
+            <a:off x="914400" y="2354580"/>
+            <a:ext cx="777240" cy="777240"/>
           </a:xfrm>
           <a:prstGeom prst="rect">
             <a:avLst/>
@@ -4498,27 +6199,589 @@
           <a:noFill/>
         </p:spPr>
         <p:txBody>
-          <a:bodyPr wrap="square" lIns="45720" rIns="45720" tIns="18288" bIns="18288" anchor="t">
+          <a:bodyPr wrap="square" lIns="45720" rIns="45720" tIns="18288" bIns="18288" anchor="ctr">
             <a:spAutoFit/>
           </a:bodyPr>
           <a:lstStyle/>
           <a:p>
+            <a:pPr algn="ctr"/>
+            <a:r>
+              <a:rPr sz="2800" b="1" i="0">
+                <a:solidFill>
+                  <a:srgbClr val="FFFFFF"/>
+                </a:solidFill>
+                <a:latin typeface="Calibri"/>
+              </a:rPr>
+              <a:t>2</a:t>
+            </a:r>
+          </a:p>
+        </p:txBody>
+      </p:sp>
+      <p:sp>
+        <p:nvSpPr>
+          <p:cNvPr id="10" name="Rounded Rectangle 9"/>
+          <p:cNvSpPr/>
+          <p:nvPr/>
+        </p:nvSpPr>
+        <p:spPr>
+          <a:xfrm>
+            <a:off x="2011680" y="2354580"/>
+            <a:ext cx="9144000" cy="777240"/>
+          </a:xfrm>
+          <a:prstGeom prst="roundRect">
+            <a:avLst>
+              <a:gd name="adj" fmla="val 8000"/>
+            </a:avLst>
+          </a:prstGeom>
+          <a:solidFill>
+            <a:srgbClr val="FBFBFD"/>
+          </a:solidFill>
+          <a:ln w="19050">
+            <a:solidFill>
+              <a:srgbClr val="00A0B0"/>
+            </a:solidFill>
+          </a:ln>
+        </p:spPr>
+        <p:style>
+          <a:lnRef idx="1">
+            <a:schemeClr val="accent1"/>
+          </a:lnRef>
+          <a:fillRef idx="3">
+            <a:schemeClr val="accent1"/>
+          </a:fillRef>
+          <a:effectRef idx="2">
+            <a:schemeClr val="accent1"/>
+          </a:effectRef>
+          <a:fontRef idx="minor">
+            <a:schemeClr val="lt1"/>
+          </a:fontRef>
+        </p:style>
+        <p:txBody>
+          <a:bodyPr rtlCol="0" anchor="ctr"/>
+          <a:lstStyle/>
+          <a:p>
+            <a:pPr algn="ctr"/>
+          </a:p>
+        </p:txBody>
+      </p:sp>
+      <p:sp>
+        <p:nvSpPr>
+          <p:cNvPr id="11" name="TextBox 10"/>
+          <p:cNvSpPr txBox="1"/>
+          <p:nvPr/>
+        </p:nvSpPr>
+        <p:spPr>
+          <a:xfrm>
+            <a:off x="2286000" y="2354580"/>
+            <a:ext cx="8686800" cy="777240"/>
+          </a:xfrm>
+          <a:prstGeom prst="rect">
+            <a:avLst/>
+          </a:prstGeom>
+          <a:noFill/>
+        </p:spPr>
+        <p:txBody>
+          <a:bodyPr wrap="square" lIns="45720" rIns="45720" tIns="18288" bIns="18288" anchor="ctr">
+            <a:spAutoFit/>
+          </a:bodyPr>
+          <a:lstStyle/>
+          <a:p>
             <a:pPr algn="l"/>
             <a:r>
-              <a:rPr sz="1800" b="0" i="1">
+              <a:rPr sz="1800" b="0" i="0">
+                <a:solidFill>
+                  <a:srgbClr val="1A1A2E"/>
+                </a:solidFill>
+                <a:latin typeface="Calibri"/>
+              </a:rPr>
+              <a:t>CIA Triad: Confidentiality, Integrity, Availability</a:t>
+            </a:r>
+          </a:p>
+        </p:txBody>
+      </p:sp>
+      <p:sp>
+        <p:nvSpPr>
+          <p:cNvPr id="12" name="Oval 11"/>
+          <p:cNvSpPr/>
+          <p:nvPr/>
+        </p:nvSpPr>
+        <p:spPr>
+          <a:xfrm>
+            <a:off x="914400" y="3268980"/>
+            <a:ext cx="777240" cy="777240"/>
+          </a:xfrm>
+          <a:prstGeom prst="ellipse">
+            <a:avLst/>
+          </a:prstGeom>
+          <a:solidFill>
+            <a:srgbClr val="00A0B0"/>
+          </a:solidFill>
+          <a:ln>
+            <a:noFill/>
+          </a:ln>
+        </p:spPr>
+        <p:style>
+          <a:lnRef idx="1">
+            <a:schemeClr val="accent1"/>
+          </a:lnRef>
+          <a:fillRef idx="3">
+            <a:schemeClr val="accent1"/>
+          </a:fillRef>
+          <a:effectRef idx="2">
+            <a:schemeClr val="accent1"/>
+          </a:effectRef>
+          <a:fontRef idx="minor">
+            <a:schemeClr val="lt1"/>
+          </a:fontRef>
+        </p:style>
+        <p:txBody>
+          <a:bodyPr rtlCol="0" anchor="ctr"/>
+          <a:lstStyle/>
+          <a:p>
+            <a:pPr algn="ctr"/>
+          </a:p>
+        </p:txBody>
+      </p:sp>
+      <p:sp>
+        <p:nvSpPr>
+          <p:cNvPr id="13" name="TextBox 12"/>
+          <p:cNvSpPr txBox="1"/>
+          <p:nvPr/>
+        </p:nvSpPr>
+        <p:spPr>
+          <a:xfrm>
+            <a:off x="914400" y="3268980"/>
+            <a:ext cx="777240" cy="777240"/>
+          </a:xfrm>
+          <a:prstGeom prst="rect">
+            <a:avLst/>
+          </a:prstGeom>
+          <a:noFill/>
+        </p:spPr>
+        <p:txBody>
+          <a:bodyPr wrap="square" lIns="45720" rIns="45720" tIns="18288" bIns="18288" anchor="ctr">
+            <a:spAutoFit/>
+          </a:bodyPr>
+          <a:lstStyle/>
+          <a:p>
+            <a:pPr algn="ctr"/>
+            <a:r>
+              <a:rPr sz="2800" b="1" i="0">
                 <a:solidFill>
                   <a:srgbClr val="FFFFFF"/>
                 </a:solidFill>
                 <a:latin typeface="Calibri"/>
               </a:rPr>
-              <a:t>➜  Prossima lezione: L2 — OWASP, threat modeling, STRIDE</a:t>
+              <a:t>3</a:t>
+            </a:r>
+          </a:p>
+        </p:txBody>
+      </p:sp>
+      <p:sp>
+        <p:nvSpPr>
+          <p:cNvPr id="14" name="Rounded Rectangle 13"/>
+          <p:cNvSpPr/>
+          <p:nvPr/>
+        </p:nvSpPr>
+        <p:spPr>
+          <a:xfrm>
+            <a:off x="2011680" y="3268980"/>
+            <a:ext cx="9144000" cy="777240"/>
+          </a:xfrm>
+          <a:prstGeom prst="roundRect">
+            <a:avLst>
+              <a:gd name="adj" fmla="val 8000"/>
+            </a:avLst>
+          </a:prstGeom>
+          <a:solidFill>
+            <a:srgbClr val="FBFBFD"/>
+          </a:solidFill>
+          <a:ln w="19050">
+            <a:solidFill>
+              <a:srgbClr val="00A0B0"/>
+            </a:solidFill>
+          </a:ln>
+        </p:spPr>
+        <p:style>
+          <a:lnRef idx="1">
+            <a:schemeClr val="accent1"/>
+          </a:lnRef>
+          <a:fillRef idx="3">
+            <a:schemeClr val="accent1"/>
+          </a:fillRef>
+          <a:effectRef idx="2">
+            <a:schemeClr val="accent1"/>
+          </a:effectRef>
+          <a:fontRef idx="minor">
+            <a:schemeClr val="lt1"/>
+          </a:fontRef>
+        </p:style>
+        <p:txBody>
+          <a:bodyPr rtlCol="0" anchor="ctr"/>
+          <a:lstStyle/>
+          <a:p>
+            <a:pPr algn="ctr"/>
+          </a:p>
+        </p:txBody>
+      </p:sp>
+      <p:sp>
+        <p:nvSpPr>
+          <p:cNvPr id="15" name="TextBox 14"/>
+          <p:cNvSpPr txBox="1"/>
+          <p:nvPr/>
+        </p:nvSpPr>
+        <p:spPr>
+          <a:xfrm>
+            <a:off x="2286000" y="3268980"/>
+            <a:ext cx="8686800" cy="777240"/>
+          </a:xfrm>
+          <a:prstGeom prst="rect">
+            <a:avLst/>
+          </a:prstGeom>
+          <a:noFill/>
+        </p:spPr>
+        <p:txBody>
+          <a:bodyPr wrap="square" lIns="45720" rIns="45720" tIns="18288" bIns="18288" anchor="ctr">
+            <a:spAutoFit/>
+          </a:bodyPr>
+          <a:lstStyle/>
+          <a:p>
+            <a:pPr algn="l"/>
+            <a:r>
+              <a:rPr sz="1800" b="0" i="0">
+                <a:solidFill>
+                  <a:srgbClr val="1A1A2E"/>
+                </a:solidFill>
+                <a:latin typeface="Calibri"/>
+              </a:rPr>
+              <a:t>HTTPS e firewall non bastano (sono strato 1)</a:t>
+            </a:r>
+          </a:p>
+        </p:txBody>
+      </p:sp>
+      <p:sp>
+        <p:nvSpPr>
+          <p:cNvPr id="16" name="Oval 15"/>
+          <p:cNvSpPr/>
+          <p:nvPr/>
+        </p:nvSpPr>
+        <p:spPr>
+          <a:xfrm>
+            <a:off x="914400" y="4183380"/>
+            <a:ext cx="777240" cy="777240"/>
+          </a:xfrm>
+          <a:prstGeom prst="ellipse">
+            <a:avLst/>
+          </a:prstGeom>
+          <a:solidFill>
+            <a:srgbClr val="00A0B0"/>
+          </a:solidFill>
+          <a:ln>
+            <a:noFill/>
+          </a:ln>
+        </p:spPr>
+        <p:style>
+          <a:lnRef idx="1">
+            <a:schemeClr val="accent1"/>
+          </a:lnRef>
+          <a:fillRef idx="3">
+            <a:schemeClr val="accent1"/>
+          </a:fillRef>
+          <a:effectRef idx="2">
+            <a:schemeClr val="accent1"/>
+          </a:effectRef>
+          <a:fontRef idx="minor">
+            <a:schemeClr val="lt1"/>
+          </a:fontRef>
+        </p:style>
+        <p:txBody>
+          <a:bodyPr rtlCol="0" anchor="ctr"/>
+          <a:lstStyle/>
+          <a:p>
+            <a:pPr algn="ctr"/>
+          </a:p>
+        </p:txBody>
+      </p:sp>
+      <p:sp>
+        <p:nvSpPr>
+          <p:cNvPr id="17" name="TextBox 16"/>
+          <p:cNvSpPr txBox="1"/>
+          <p:nvPr/>
+        </p:nvSpPr>
+        <p:spPr>
+          <a:xfrm>
+            <a:off x="914400" y="4183380"/>
+            <a:ext cx="777240" cy="777240"/>
+          </a:xfrm>
+          <a:prstGeom prst="rect">
+            <a:avLst/>
+          </a:prstGeom>
+          <a:noFill/>
+        </p:spPr>
+        <p:txBody>
+          <a:bodyPr wrap="square" lIns="45720" rIns="45720" tIns="18288" bIns="18288" anchor="ctr">
+            <a:spAutoFit/>
+          </a:bodyPr>
+          <a:lstStyle/>
+          <a:p>
+            <a:pPr algn="ctr"/>
+            <a:r>
+              <a:rPr sz="2800" b="1" i="0">
+                <a:solidFill>
+                  <a:srgbClr val="FFFFFF"/>
+                </a:solidFill>
+                <a:latin typeface="Calibri"/>
+              </a:rPr>
+              <a:t>4</a:t>
+            </a:r>
+          </a:p>
+        </p:txBody>
+      </p:sp>
+      <p:sp>
+        <p:nvSpPr>
+          <p:cNvPr id="18" name="Rounded Rectangle 17"/>
+          <p:cNvSpPr/>
+          <p:nvPr/>
+        </p:nvSpPr>
+        <p:spPr>
+          <a:xfrm>
+            <a:off x="2011680" y="4183380"/>
+            <a:ext cx="9144000" cy="777240"/>
+          </a:xfrm>
+          <a:prstGeom prst="roundRect">
+            <a:avLst>
+              <a:gd name="adj" fmla="val 8000"/>
+            </a:avLst>
+          </a:prstGeom>
+          <a:solidFill>
+            <a:srgbClr val="FBFBFD"/>
+          </a:solidFill>
+          <a:ln w="19050">
+            <a:solidFill>
+              <a:srgbClr val="00A0B0"/>
+            </a:solidFill>
+          </a:ln>
+        </p:spPr>
+        <p:style>
+          <a:lnRef idx="1">
+            <a:schemeClr val="accent1"/>
+          </a:lnRef>
+          <a:fillRef idx="3">
+            <a:schemeClr val="accent1"/>
+          </a:fillRef>
+          <a:effectRef idx="2">
+            <a:schemeClr val="accent1"/>
+          </a:effectRef>
+          <a:fontRef idx="minor">
+            <a:schemeClr val="lt1"/>
+          </a:fontRef>
+        </p:style>
+        <p:txBody>
+          <a:bodyPr rtlCol="0" anchor="ctr"/>
+          <a:lstStyle/>
+          <a:p>
+            <a:pPr algn="ctr"/>
+          </a:p>
+        </p:txBody>
+      </p:sp>
+      <p:sp>
+        <p:nvSpPr>
+          <p:cNvPr id="19" name="TextBox 18"/>
+          <p:cNvSpPr txBox="1"/>
+          <p:nvPr/>
+        </p:nvSpPr>
+        <p:spPr>
+          <a:xfrm>
+            <a:off x="2286000" y="4183380"/>
+            <a:ext cx="8686800" cy="777240"/>
+          </a:xfrm>
+          <a:prstGeom prst="rect">
+            <a:avLst/>
+          </a:prstGeom>
+          <a:noFill/>
+        </p:spPr>
+        <p:txBody>
+          <a:bodyPr wrap="square" lIns="45720" rIns="45720" tIns="18288" bIns="18288" anchor="ctr">
+            <a:spAutoFit/>
+          </a:bodyPr>
+          <a:lstStyle/>
+          <a:p>
+            <a:pPr algn="l"/>
+            <a:r>
+              <a:rPr sz="1800" b="0" i="0">
+                <a:solidFill>
+                  <a:srgbClr val="1A1A2E"/>
+                </a:solidFill>
+                <a:latin typeface="Calibri"/>
+              </a:rPr>
+              <a:t>Mentalità avversaria: cosa fa che non dovrebbe?</a:t>
+            </a:r>
+          </a:p>
+        </p:txBody>
+      </p:sp>
+      <p:sp>
+        <p:nvSpPr>
+          <p:cNvPr id="20" name="Oval 19"/>
+          <p:cNvSpPr/>
+          <p:nvPr/>
+        </p:nvSpPr>
+        <p:spPr>
+          <a:xfrm>
+            <a:off x="914400" y="5097780"/>
+            <a:ext cx="777240" cy="777240"/>
+          </a:xfrm>
+          <a:prstGeom prst="ellipse">
+            <a:avLst/>
+          </a:prstGeom>
+          <a:solidFill>
+            <a:srgbClr val="00A0B0"/>
+          </a:solidFill>
+          <a:ln>
+            <a:noFill/>
+          </a:ln>
+        </p:spPr>
+        <p:style>
+          <a:lnRef idx="1">
+            <a:schemeClr val="accent1"/>
+          </a:lnRef>
+          <a:fillRef idx="3">
+            <a:schemeClr val="accent1"/>
+          </a:fillRef>
+          <a:effectRef idx="2">
+            <a:schemeClr val="accent1"/>
+          </a:effectRef>
+          <a:fontRef idx="minor">
+            <a:schemeClr val="lt1"/>
+          </a:fontRef>
+        </p:style>
+        <p:txBody>
+          <a:bodyPr rtlCol="0" anchor="ctr"/>
+          <a:lstStyle/>
+          <a:p>
+            <a:pPr algn="ctr"/>
+          </a:p>
+        </p:txBody>
+      </p:sp>
+      <p:sp>
+        <p:nvSpPr>
+          <p:cNvPr id="21" name="TextBox 20"/>
+          <p:cNvSpPr txBox="1"/>
+          <p:nvPr/>
+        </p:nvSpPr>
+        <p:spPr>
+          <a:xfrm>
+            <a:off x="914400" y="5097780"/>
+            <a:ext cx="777240" cy="777240"/>
+          </a:xfrm>
+          <a:prstGeom prst="rect">
+            <a:avLst/>
+          </a:prstGeom>
+          <a:noFill/>
+        </p:spPr>
+        <p:txBody>
+          <a:bodyPr wrap="square" lIns="45720" rIns="45720" tIns="18288" bIns="18288" anchor="ctr">
+            <a:spAutoFit/>
+          </a:bodyPr>
+          <a:lstStyle/>
+          <a:p>
+            <a:pPr algn="ctr"/>
+            <a:r>
+              <a:rPr sz="2800" b="1" i="0">
+                <a:solidFill>
+                  <a:srgbClr val="FFFFFF"/>
+                </a:solidFill>
+                <a:latin typeface="Calibri"/>
+              </a:rPr>
+              <a:t>5</a:t>
+            </a:r>
+          </a:p>
+        </p:txBody>
+      </p:sp>
+      <p:sp>
+        <p:nvSpPr>
+          <p:cNvPr id="22" name="Rounded Rectangle 21"/>
+          <p:cNvSpPr/>
+          <p:nvPr/>
+        </p:nvSpPr>
+        <p:spPr>
+          <a:xfrm>
+            <a:off x="2011680" y="5097780"/>
+            <a:ext cx="9144000" cy="777240"/>
+          </a:xfrm>
+          <a:prstGeom prst="roundRect">
+            <a:avLst>
+              <a:gd name="adj" fmla="val 8000"/>
+            </a:avLst>
+          </a:prstGeom>
+          <a:solidFill>
+            <a:srgbClr val="FBFBFD"/>
+          </a:solidFill>
+          <a:ln w="19050">
+            <a:solidFill>
+              <a:srgbClr val="00A0B0"/>
+            </a:solidFill>
+          </a:ln>
+        </p:spPr>
+        <p:style>
+          <a:lnRef idx="1">
+            <a:schemeClr val="accent1"/>
+          </a:lnRef>
+          <a:fillRef idx="3">
+            <a:schemeClr val="accent1"/>
+          </a:fillRef>
+          <a:effectRef idx="2">
+            <a:schemeClr val="accent1"/>
+          </a:effectRef>
+          <a:fontRef idx="minor">
+            <a:schemeClr val="lt1"/>
+          </a:fontRef>
+        </p:style>
+        <p:txBody>
+          <a:bodyPr rtlCol="0" anchor="ctr"/>
+          <a:lstStyle/>
+          <a:p>
+            <a:pPr algn="ctr"/>
+          </a:p>
+        </p:txBody>
+      </p:sp>
+      <p:sp>
+        <p:nvSpPr>
+          <p:cNvPr id="23" name="TextBox 22"/>
+          <p:cNvSpPr txBox="1"/>
+          <p:nvPr/>
+        </p:nvSpPr>
+        <p:spPr>
+          <a:xfrm>
+            <a:off x="2286000" y="5097780"/>
+            <a:ext cx="8686800" cy="777240"/>
+          </a:xfrm>
+          <a:prstGeom prst="rect">
+            <a:avLst/>
+          </a:prstGeom>
+          <a:noFill/>
+        </p:spPr>
+        <p:txBody>
+          <a:bodyPr wrap="square" lIns="45720" rIns="45720" tIns="18288" bIns="18288" anchor="ctr">
+            <a:spAutoFit/>
+          </a:bodyPr>
+          <a:lstStyle/>
+          <a:p>
+            <a:pPr algn="l"/>
+            <a:r>
+              <a:rPr sz="1800" b="0" i="0">
+                <a:solidFill>
+                  <a:srgbClr val="1A1A2E"/>
+                </a:solidFill>
+                <a:latin typeface="Calibri"/>
+              </a:rPr>
+              <a:t>5 principi: Least Priv, Defense in Depth, Fail Secure, KISS, SoD</a:t>
             </a:r>
           </a:p>
         </p:txBody>
       </p:sp>
       <p:cxnSp>
         <p:nvCxnSpPr>
-          <p:cNvPr id="8" name="Connector 7"/>
+          <p:cNvPr id="24" name="Connector 23"/>
           <p:cNvCxnSpPr/>
           <p:nvPr/>
         </p:nvCxnSpPr>
@@ -4553,14 +6816,14 @@
       </p:cxnSp>
       <p:sp>
         <p:nvSpPr>
-          <p:cNvPr id="9" name="TextBox 8"/>
+          <p:cNvPr id="25" name="TextBox 24"/>
           <p:cNvSpPr txBox="1"/>
           <p:nvPr/>
         </p:nvSpPr>
         <p:spPr>
           <a:xfrm>
             <a:off x="457200" y="6473952"/>
-            <a:ext cx="7315200" cy="320040"/>
+            <a:ext cx="7315200" cy="292608"/>
           </a:xfrm>
           <a:prstGeom prst="rect">
             <a:avLst/>
@@ -4581,21 +6844,21 @@
                 </a:solidFill>
                 <a:latin typeface="Calibri"/>
               </a:rPr>
-              <a:t>Secure Coding · Corso IFTS STEM · A. Manneschi</a:t>
-            </a:r>
-          </a:p>
-        </p:txBody>
-      </p:sp>
-      <p:sp>
-        <p:nvSpPr>
-          <p:cNvPr id="10" name="TextBox 9"/>
+              <a:t>Secure Coding · Corso IFTS STEM · A. Manneschi · 2024/2025</a:t>
+            </a:r>
+          </a:p>
+        </p:txBody>
+      </p:sp>
+      <p:sp>
+        <p:nvSpPr>
+          <p:cNvPr id="26" name="TextBox 25"/>
           <p:cNvSpPr txBox="1"/>
           <p:nvPr/>
         </p:nvSpPr>
         <p:spPr>
           <a:xfrm>
             <a:off x="10515600" y="6473952"/>
-            <a:ext cx="1188720" cy="320040"/>
+            <a:ext cx="1188720" cy="292608"/>
           </a:xfrm>
           <a:prstGeom prst="rect">
             <a:avLst/>
@@ -4616,7 +6879,487 @@
                 </a:solidFill>
                 <a:latin typeface="Calibri"/>
               </a:rPr>
-              <a:t>L1  ·  12/12</a:t>
+              <a:t>L1  ·  13/14</a:t>
+            </a:r>
+          </a:p>
+        </p:txBody>
+      </p:sp>
+    </p:spTree>
+  </p:cSld>
+  <p:clrMapOvr>
+    <a:masterClrMapping/>
+  </p:clrMapOvr>
+</p:sld>
+</file>
+
+<file path=ppt/slides/slide14.xml><?xml version="1.0" encoding="utf-8"?>
+<p:sld xmlns:a="http://schemas.openxmlformats.org/drawingml/2006/main" xmlns:p="http://schemas.openxmlformats.org/presentationml/2006/main" xmlns:r="http://schemas.openxmlformats.org/officeDocument/2006/relationships">
+  <p:cSld>
+    <p:spTree>
+      <p:nvGrpSpPr>
+        <p:cNvPr id="1" name=""/>
+        <p:cNvGrpSpPr/>
+        <p:nvPr/>
+      </p:nvGrpSpPr>
+      <p:grpSpPr/>
+      <p:sp>
+        <p:nvSpPr>
+          <p:cNvPr id="2" name="Rectangle 1"/>
+          <p:cNvSpPr/>
+          <p:nvPr/>
+        </p:nvSpPr>
+        <p:spPr>
+          <a:xfrm>
+            <a:off x="0" y="0"/>
+            <a:ext cx="12191695" cy="6858000"/>
+          </a:xfrm>
+          <a:prstGeom prst="rect">
+            <a:avLst/>
+          </a:prstGeom>
+          <a:solidFill>
+            <a:srgbClr val="081B33"/>
+          </a:solidFill>
+          <a:ln>
+            <a:noFill/>
+          </a:ln>
+        </p:spPr>
+        <p:style>
+          <a:lnRef idx="1">
+            <a:schemeClr val="accent1"/>
+          </a:lnRef>
+          <a:fillRef idx="3">
+            <a:schemeClr val="accent1"/>
+          </a:fillRef>
+          <a:effectRef idx="2">
+            <a:schemeClr val="accent1"/>
+          </a:effectRef>
+          <a:fontRef idx="minor">
+            <a:schemeClr val="lt1"/>
+          </a:fontRef>
+        </p:style>
+        <p:txBody>
+          <a:bodyPr rtlCol="0" anchor="ctr"/>
+          <a:lstStyle/>
+          <a:p>
+            <a:pPr algn="ctr"/>
+          </a:p>
+        </p:txBody>
+      </p:sp>
+      <p:sp>
+        <p:nvSpPr>
+          <p:cNvPr id="3" name="Oval 2"/>
+          <p:cNvSpPr/>
+          <p:nvPr/>
+        </p:nvSpPr>
+        <p:spPr>
+          <a:xfrm>
+            <a:off x="8915400" y="228600"/>
+            <a:ext cx="2286000" cy="2286000"/>
+          </a:xfrm>
+          <a:prstGeom prst="ellipse">
+            <a:avLst/>
+          </a:prstGeom>
+          <a:noFill/>
+          <a:ln w="25400">
+            <a:solidFill>
+              <a:srgbClr val="00A0B0"/>
+            </a:solidFill>
+          </a:ln>
+        </p:spPr>
+        <p:style>
+          <a:lnRef idx="1">
+            <a:schemeClr val="accent1"/>
+          </a:lnRef>
+          <a:fillRef idx="3">
+            <a:schemeClr val="accent1"/>
+          </a:fillRef>
+          <a:effectRef idx="2">
+            <a:schemeClr val="accent1"/>
+          </a:effectRef>
+          <a:fontRef idx="minor">
+            <a:schemeClr val="lt1"/>
+          </a:fontRef>
+        </p:style>
+        <p:txBody>
+          <a:bodyPr rtlCol="0" anchor="ctr"/>
+          <a:lstStyle/>
+          <a:p>
+            <a:pPr algn="ctr"/>
+          </a:p>
+        </p:txBody>
+      </p:sp>
+      <p:sp>
+        <p:nvSpPr>
+          <p:cNvPr id="4" name="Oval 3"/>
+          <p:cNvSpPr/>
+          <p:nvPr/>
+        </p:nvSpPr>
+        <p:spPr>
+          <a:xfrm>
+            <a:off x="10149840" y="3749040"/>
+            <a:ext cx="1645920" cy="1645920"/>
+          </a:xfrm>
+          <a:prstGeom prst="ellipse">
+            <a:avLst/>
+          </a:prstGeom>
+          <a:noFill/>
+          <a:ln w="25400">
+            <a:solidFill>
+              <a:srgbClr val="00A0B0"/>
+            </a:solidFill>
+          </a:ln>
+        </p:spPr>
+        <p:style>
+          <a:lnRef idx="1">
+            <a:schemeClr val="accent1"/>
+          </a:lnRef>
+          <a:fillRef idx="3">
+            <a:schemeClr val="accent1"/>
+          </a:fillRef>
+          <a:effectRef idx="2">
+            <a:schemeClr val="accent1"/>
+          </a:effectRef>
+          <a:fontRef idx="minor">
+            <a:schemeClr val="lt1"/>
+          </a:fontRef>
+        </p:style>
+        <p:txBody>
+          <a:bodyPr rtlCol="0" anchor="ctr"/>
+          <a:lstStyle/>
+          <a:p>
+            <a:pPr algn="ctr"/>
+          </a:p>
+        </p:txBody>
+      </p:sp>
+      <p:sp>
+        <p:nvSpPr>
+          <p:cNvPr id="5" name="Oval 4"/>
+          <p:cNvSpPr/>
+          <p:nvPr/>
+        </p:nvSpPr>
+        <p:spPr>
+          <a:xfrm>
+            <a:off x="685800" y="4800600"/>
+            <a:ext cx="1371600" cy="1371600"/>
+          </a:xfrm>
+          <a:prstGeom prst="ellipse">
+            <a:avLst/>
+          </a:prstGeom>
+          <a:noFill/>
+          <a:ln w="25400">
+            <a:solidFill>
+              <a:srgbClr val="00A0B0"/>
+            </a:solidFill>
+          </a:ln>
+        </p:spPr>
+        <p:style>
+          <a:lnRef idx="1">
+            <a:schemeClr val="accent1"/>
+          </a:lnRef>
+          <a:fillRef idx="3">
+            <a:schemeClr val="accent1"/>
+          </a:fillRef>
+          <a:effectRef idx="2">
+            <a:schemeClr val="accent1"/>
+          </a:effectRef>
+          <a:fontRef idx="minor">
+            <a:schemeClr val="lt1"/>
+          </a:fontRef>
+        </p:style>
+        <p:txBody>
+          <a:bodyPr rtlCol="0" anchor="ctr"/>
+          <a:lstStyle/>
+          <a:p>
+            <a:pPr algn="ctr"/>
+          </a:p>
+        </p:txBody>
+      </p:sp>
+      <p:sp>
+        <p:nvSpPr>
+          <p:cNvPr id="6" name="TextBox 5"/>
+          <p:cNvSpPr txBox="1"/>
+          <p:nvPr/>
+        </p:nvSpPr>
+        <p:spPr>
+          <a:xfrm>
+            <a:off x="731520" y="1371600"/>
+            <a:ext cx="10058400" cy="2286000"/>
+          </a:xfrm>
+          <a:prstGeom prst="rect">
+            <a:avLst/>
+          </a:prstGeom>
+          <a:noFill/>
+        </p:spPr>
+        <p:txBody>
+          <a:bodyPr wrap="square" lIns="45720" rIns="45720" tIns="18288" bIns="18288" anchor="t">
+            <a:spAutoFit/>
+          </a:bodyPr>
+          <a:lstStyle/>
+          <a:p>
+            <a:pPr algn="l"/>
+            <a:r>
+              <a:rPr sz="11000" b="1" i="0">
+                <a:solidFill>
+                  <a:srgbClr val="FFFFFF"/>
+                </a:solidFill>
+                <a:latin typeface="Calibri"/>
+              </a:rPr>
+              <a:t>Domande?</a:t>
+            </a:r>
+          </a:p>
+        </p:txBody>
+      </p:sp>
+      <p:cxnSp>
+        <p:nvCxnSpPr>
+          <p:cNvPr id="7" name="Connector 6"/>
+          <p:cNvCxnSpPr/>
+          <p:nvPr/>
+        </p:nvCxnSpPr>
+        <p:spPr>
+          <a:xfrm>
+            <a:off x="731520" y="3840480"/>
+            <a:ext cx="2926080" cy="0"/>
+          </a:xfrm>
+          <a:prstGeom prst="line">
+            <a:avLst/>
+          </a:prstGeom>
+          <a:ln w="50800">
+            <a:solidFill>
+              <a:srgbClr val="00A0B0"/>
+            </a:solidFill>
+          </a:ln>
+        </p:spPr>
+        <p:style>
+          <a:lnRef idx="2">
+            <a:schemeClr val="accent1"/>
+          </a:lnRef>
+          <a:fillRef idx="0">
+            <a:schemeClr val="accent1"/>
+          </a:fillRef>
+          <a:effectRef idx="1">
+            <a:schemeClr val="accent1"/>
+          </a:effectRef>
+          <a:fontRef idx="minor">
+            <a:schemeClr val="tx1"/>
+          </a:fontRef>
+        </p:style>
+      </p:cxnSp>
+      <p:sp>
+        <p:nvSpPr>
+          <p:cNvPr id="8" name="TextBox 7"/>
+          <p:cNvSpPr txBox="1"/>
+          <p:nvPr/>
+        </p:nvSpPr>
+        <p:spPr>
+          <a:xfrm>
+            <a:off x="731520" y="4114800"/>
+            <a:ext cx="10058400" cy="457200"/>
+          </a:xfrm>
+          <a:prstGeom prst="rect">
+            <a:avLst/>
+          </a:prstGeom>
+          <a:noFill/>
+        </p:spPr>
+        <p:txBody>
+          <a:bodyPr wrap="square" lIns="45720" rIns="45720" tIns="18288" bIns="18288" anchor="t">
+            <a:spAutoFit/>
+          </a:bodyPr>
+          <a:lstStyle/>
+          <a:p>
+            <a:pPr algn="l"/>
+            <a:r>
+              <a:rPr sz="2000" b="1" i="0">
+                <a:solidFill>
+                  <a:srgbClr val="00A0B0"/>
+                </a:solidFill>
+                <a:latin typeface="Calibri"/>
+              </a:rPr>
+              <a:t>Riepilogo · Q&amp;A · Discussione</a:t>
+            </a:r>
+          </a:p>
+        </p:txBody>
+      </p:sp>
+      <p:sp>
+        <p:nvSpPr>
+          <p:cNvPr id="9" name="Rounded Rectangle 8"/>
+          <p:cNvSpPr/>
+          <p:nvPr/>
+        </p:nvSpPr>
+        <p:spPr>
+          <a:xfrm>
+            <a:off x="731520" y="5029200"/>
+            <a:ext cx="10058400" cy="914400"/>
+          </a:xfrm>
+          <a:prstGeom prst="roundRect">
+            <a:avLst>
+              <a:gd name="adj" fmla="val 8000"/>
+            </a:avLst>
+          </a:prstGeom>
+          <a:solidFill>
+            <a:srgbClr val="00A0B0"/>
+          </a:solidFill>
+          <a:ln>
+            <a:noFill/>
+          </a:ln>
+        </p:spPr>
+        <p:style>
+          <a:lnRef idx="1">
+            <a:schemeClr val="accent1"/>
+          </a:lnRef>
+          <a:fillRef idx="3">
+            <a:schemeClr val="accent1"/>
+          </a:fillRef>
+          <a:effectRef idx="2">
+            <a:schemeClr val="accent1"/>
+          </a:effectRef>
+          <a:fontRef idx="minor">
+            <a:schemeClr val="lt1"/>
+          </a:fontRef>
+        </p:style>
+        <p:txBody>
+          <a:bodyPr rtlCol="0" anchor="ctr"/>
+          <a:lstStyle/>
+          <a:p>
+            <a:pPr algn="ctr"/>
+          </a:p>
+        </p:txBody>
+      </p:sp>
+      <p:sp>
+        <p:nvSpPr>
+          <p:cNvPr id="10" name="TextBox 9"/>
+          <p:cNvSpPr txBox="1"/>
+          <p:nvPr/>
+        </p:nvSpPr>
+        <p:spPr>
+          <a:xfrm>
+            <a:off x="1005840" y="5029200"/>
+            <a:ext cx="9784080" cy="914400"/>
+          </a:xfrm>
+          <a:prstGeom prst="rect">
+            <a:avLst/>
+          </a:prstGeom>
+          <a:noFill/>
+        </p:spPr>
+        <p:txBody>
+          <a:bodyPr wrap="square" lIns="45720" rIns="45720" tIns="18288" bIns="18288" anchor="ctr">
+            <a:spAutoFit/>
+          </a:bodyPr>
+          <a:lstStyle/>
+          <a:p>
+            <a:pPr algn="l"/>
+            <a:r>
+              <a:rPr sz="1800" b="1" i="1">
+                <a:solidFill>
+                  <a:srgbClr val="FFFFFF"/>
+                </a:solidFill>
+                <a:latin typeface="Calibri"/>
+              </a:rPr>
+              <a:t>➜  Prossima lezione: L2 — OWASP, threat modeling, STRIDE</a:t>
+            </a:r>
+          </a:p>
+        </p:txBody>
+      </p:sp>
+      <p:cxnSp>
+        <p:nvCxnSpPr>
+          <p:cNvPr id="11" name="Connector 10"/>
+          <p:cNvCxnSpPr/>
+          <p:nvPr/>
+        </p:nvCxnSpPr>
+        <p:spPr>
+          <a:xfrm>
+            <a:off x="457200" y="6446520"/>
+            <a:ext cx="11274552" cy="0"/>
+          </a:xfrm>
+          <a:prstGeom prst="line">
+            <a:avLst/>
+          </a:prstGeom>
+          <a:ln w="19050">
+            <a:solidFill>
+              <a:srgbClr val="00A0B0"/>
+            </a:solidFill>
+          </a:ln>
+        </p:spPr>
+        <p:style>
+          <a:lnRef idx="2">
+            <a:schemeClr val="accent1"/>
+          </a:lnRef>
+          <a:fillRef idx="0">
+            <a:schemeClr val="accent1"/>
+          </a:fillRef>
+          <a:effectRef idx="1">
+            <a:schemeClr val="accent1"/>
+          </a:effectRef>
+          <a:fontRef idx="minor">
+            <a:schemeClr val="tx1"/>
+          </a:fontRef>
+        </p:style>
+      </p:cxnSp>
+      <p:sp>
+        <p:nvSpPr>
+          <p:cNvPr id="12" name="TextBox 11"/>
+          <p:cNvSpPr txBox="1"/>
+          <p:nvPr/>
+        </p:nvSpPr>
+        <p:spPr>
+          <a:xfrm>
+            <a:off x="457200" y="6473952"/>
+            <a:ext cx="7315200" cy="292608"/>
+          </a:xfrm>
+          <a:prstGeom prst="rect">
+            <a:avLst/>
+          </a:prstGeom>
+          <a:noFill/>
+        </p:spPr>
+        <p:txBody>
+          <a:bodyPr wrap="square" lIns="45720" rIns="45720" tIns="18288" bIns="18288" anchor="t">
+            <a:spAutoFit/>
+          </a:bodyPr>
+          <a:lstStyle/>
+          <a:p>
+            <a:pPr algn="l"/>
+            <a:r>
+              <a:rPr sz="1000" b="0" i="0">
+                <a:solidFill>
+                  <a:srgbClr val="6B7280"/>
+                </a:solidFill>
+                <a:latin typeface="Calibri"/>
+              </a:rPr>
+              <a:t>Secure Coding · Corso IFTS STEM · A. Manneschi · 2024/2025</a:t>
+            </a:r>
+          </a:p>
+        </p:txBody>
+      </p:sp>
+      <p:sp>
+        <p:nvSpPr>
+          <p:cNvPr id="13" name="TextBox 12"/>
+          <p:cNvSpPr txBox="1"/>
+          <p:nvPr/>
+        </p:nvSpPr>
+        <p:spPr>
+          <a:xfrm>
+            <a:off x="10515600" y="6473952"/>
+            <a:ext cx="1188720" cy="292608"/>
+          </a:xfrm>
+          <a:prstGeom prst="rect">
+            <a:avLst/>
+          </a:prstGeom>
+          <a:noFill/>
+        </p:spPr>
+        <p:txBody>
+          <a:bodyPr wrap="square" lIns="45720" rIns="45720" tIns="18288" bIns="18288" anchor="t">
+            <a:spAutoFit/>
+          </a:bodyPr>
+          <a:lstStyle/>
+          <a:p>
+            <a:pPr algn="r"/>
+            <a:r>
+              <a:rPr sz="1000" b="1" i="0">
+                <a:solidFill>
+                  <a:srgbClr val="6B7280"/>
+                </a:solidFill>
+                <a:latin typeface="Calibri"/>
+              </a:rPr>
+              <a:t>L1  ·  14/14</a:t>
             </a:r>
           </a:p>
         </p:txBody>
@@ -4712,7 +7455,7 @@
                 </a:solidFill>
                 <a:latin typeface="Calibri"/>
               </a:rPr>
-              <a:t>Obiettivi della lezione</a:t>
+              <a:t>🎯  Obiettivi della lezione</a:t>
             </a:r>
           </a:p>
         </p:txBody>
@@ -4725,8 +7468,8 @@
         </p:nvSpPr>
         <p:spPr>
           <a:xfrm>
-            <a:off x="640080" y="1005840"/>
-            <a:ext cx="10972800" cy="5029200"/>
+            <a:off x="457200" y="914400"/>
+            <a:ext cx="2286000" cy="2286000"/>
           </a:xfrm>
           <a:prstGeom prst="rect">
             <a:avLst/>
@@ -4734,27 +7477,162 @@
           <a:noFill/>
         </p:spPr>
         <p:txBody>
-          <a:bodyPr wrap="square">
+          <a:bodyPr wrap="square" lIns="45720" rIns="45720" tIns="18288" bIns="18288" anchor="t">
             <a:spAutoFit/>
           </a:bodyPr>
           <a:lstStyle/>
           <a:p>
-            <a:pPr>
-              <a:lnSpc>
-                <a:spcPct val="150000"/>
-              </a:lnSpc>
-            </a:pPr>
-            <a:r>
-              <a:rPr sz="2000" b="1">
+            <a:pPr algn="l"/>
+            <a:r>
+              <a:rPr sz="18000" b="1" i="0">
+                <a:solidFill>
+                  <a:srgbClr val="F1F4F8"/>
+                </a:solidFill>
+                <a:latin typeface="Calibri"/>
+              </a:rPr>
+              <a:t>05</a:t>
+            </a:r>
+          </a:p>
+        </p:txBody>
+      </p:sp>
+      <p:sp>
+        <p:nvSpPr>
+          <p:cNvPr id="5" name="TextBox 4"/>
+          <p:cNvSpPr txBox="1"/>
+          <p:nvPr/>
+        </p:nvSpPr>
+        <p:spPr>
+          <a:xfrm>
+            <a:off x="457200" y="3200400"/>
+            <a:ext cx="2286000" cy="457200"/>
+          </a:xfrm>
+          <a:prstGeom prst="rect">
+            <a:avLst/>
+          </a:prstGeom>
+          <a:noFill/>
+        </p:spPr>
+        <p:txBody>
+          <a:bodyPr wrap="square" lIns="45720" rIns="45720" tIns="18288" bIns="18288" anchor="t">
+            <a:spAutoFit/>
+          </a:bodyPr>
+          <a:lstStyle/>
+          <a:p>
+            <a:pPr algn="l"/>
+            <a:r>
+              <a:rPr sz="1800" b="1" i="1">
                 <a:solidFill>
                   <a:srgbClr val="00A0B0"/>
                 </a:solidFill>
                 <a:latin typeface="Calibri"/>
               </a:rPr>
-              <a:t>▸  </a:t>
-            </a:r>
-            <a:r>
-              <a:rPr sz="2000">
+              <a:t>obiettivi</a:t>
+            </a:r>
+          </a:p>
+        </p:txBody>
+      </p:sp>
+      <p:sp>
+        <p:nvSpPr>
+          <p:cNvPr id="6" name="Oval 5"/>
+          <p:cNvSpPr/>
+          <p:nvPr/>
+        </p:nvSpPr>
+        <p:spPr>
+          <a:xfrm>
+            <a:off x="3200400" y="1188720"/>
+            <a:ext cx="548640" cy="548640"/>
+          </a:xfrm>
+          <a:prstGeom prst="ellipse">
+            <a:avLst/>
+          </a:prstGeom>
+          <a:solidFill>
+            <a:srgbClr val="00A0B0"/>
+          </a:solidFill>
+          <a:ln>
+            <a:noFill/>
+          </a:ln>
+        </p:spPr>
+        <p:style>
+          <a:lnRef idx="1">
+            <a:schemeClr val="accent1"/>
+          </a:lnRef>
+          <a:fillRef idx="3">
+            <a:schemeClr val="accent1"/>
+          </a:fillRef>
+          <a:effectRef idx="2">
+            <a:schemeClr val="accent1"/>
+          </a:effectRef>
+          <a:fontRef idx="minor">
+            <a:schemeClr val="lt1"/>
+          </a:fontRef>
+        </p:style>
+        <p:txBody>
+          <a:bodyPr rtlCol="0" anchor="ctr"/>
+          <a:lstStyle/>
+          <a:p>
+            <a:pPr algn="ctr"/>
+          </a:p>
+        </p:txBody>
+      </p:sp>
+      <p:sp>
+        <p:nvSpPr>
+          <p:cNvPr id="7" name="TextBox 6"/>
+          <p:cNvSpPr txBox="1"/>
+          <p:nvPr/>
+        </p:nvSpPr>
+        <p:spPr>
+          <a:xfrm>
+            <a:off x="3200400" y="1188720"/>
+            <a:ext cx="548640" cy="548640"/>
+          </a:xfrm>
+          <a:prstGeom prst="rect">
+            <a:avLst/>
+          </a:prstGeom>
+          <a:noFill/>
+        </p:spPr>
+        <p:txBody>
+          <a:bodyPr wrap="square" lIns="45720" rIns="45720" tIns="18288" bIns="18288" anchor="ctr">
+            <a:spAutoFit/>
+          </a:bodyPr>
+          <a:lstStyle/>
+          <a:p>
+            <a:pPr algn="ctr"/>
+            <a:r>
+              <a:rPr sz="1600" b="1" i="0">
+                <a:solidFill>
+                  <a:srgbClr val="FFFFFF"/>
+                </a:solidFill>
+                <a:latin typeface="Calibri"/>
+              </a:rPr>
+              <a:t>1</a:t>
+            </a:r>
+          </a:p>
+        </p:txBody>
+      </p:sp>
+      <p:sp>
+        <p:nvSpPr>
+          <p:cNvPr id="8" name="TextBox 7"/>
+          <p:cNvSpPr txBox="1"/>
+          <p:nvPr/>
+        </p:nvSpPr>
+        <p:spPr>
+          <a:xfrm>
+            <a:off x="4023360" y="1261872"/>
+            <a:ext cx="7772400" cy="548640"/>
+          </a:xfrm>
+          <a:prstGeom prst="rect">
+            <a:avLst/>
+          </a:prstGeom>
+          <a:noFill/>
+        </p:spPr>
+        <p:txBody>
+          <a:bodyPr wrap="square" lIns="45720" rIns="45720" tIns="18288" bIns="18288" anchor="ctr">
+            <a:spAutoFit/>
+          </a:bodyPr>
+          <a:lstStyle/>
+          <a:p>
+            <a:pPr algn="l"/>
+            <a:r>
+              <a:rPr sz="1600" b="0" i="0">
                 <a:solidFill>
                   <a:srgbClr val="1A1A2E"/>
                 </a:solidFill>
@@ -4763,23 +7641,111 @@
               <a:t>Definire la sicurezza in termini misurabili (CIA Triad)</a:t>
             </a:r>
           </a:p>
-          <a:p>
-            <a:pPr>
-              <a:lnSpc>
-                <a:spcPct val="150000"/>
-              </a:lnSpc>
-            </a:pPr>
-            <a:r>
-              <a:rPr sz="2000" b="1">
-                <a:solidFill>
-                  <a:srgbClr val="00A0B0"/>
-                </a:solidFill>
-                <a:latin typeface="Calibri"/>
-              </a:rPr>
-              <a:t>▸  </a:t>
-            </a:r>
-            <a:r>
-              <a:rPr sz="2000">
+        </p:txBody>
+      </p:sp>
+      <p:sp>
+        <p:nvSpPr>
+          <p:cNvPr id="9" name="Oval 8"/>
+          <p:cNvSpPr/>
+          <p:nvPr/>
+        </p:nvSpPr>
+        <p:spPr>
+          <a:xfrm>
+            <a:off x="3200400" y="1965960"/>
+            <a:ext cx="548640" cy="548640"/>
+          </a:xfrm>
+          <a:prstGeom prst="ellipse">
+            <a:avLst/>
+          </a:prstGeom>
+          <a:solidFill>
+            <a:srgbClr val="00A0B0"/>
+          </a:solidFill>
+          <a:ln>
+            <a:noFill/>
+          </a:ln>
+        </p:spPr>
+        <p:style>
+          <a:lnRef idx="1">
+            <a:schemeClr val="accent1"/>
+          </a:lnRef>
+          <a:fillRef idx="3">
+            <a:schemeClr val="accent1"/>
+          </a:fillRef>
+          <a:effectRef idx="2">
+            <a:schemeClr val="accent1"/>
+          </a:effectRef>
+          <a:fontRef idx="minor">
+            <a:schemeClr val="lt1"/>
+          </a:fontRef>
+        </p:style>
+        <p:txBody>
+          <a:bodyPr rtlCol="0" anchor="ctr"/>
+          <a:lstStyle/>
+          <a:p>
+            <a:pPr algn="ctr"/>
+          </a:p>
+        </p:txBody>
+      </p:sp>
+      <p:sp>
+        <p:nvSpPr>
+          <p:cNvPr id="10" name="TextBox 9"/>
+          <p:cNvSpPr txBox="1"/>
+          <p:nvPr/>
+        </p:nvSpPr>
+        <p:spPr>
+          <a:xfrm>
+            <a:off x="3200400" y="1965960"/>
+            <a:ext cx="548640" cy="548640"/>
+          </a:xfrm>
+          <a:prstGeom prst="rect">
+            <a:avLst/>
+          </a:prstGeom>
+          <a:noFill/>
+        </p:spPr>
+        <p:txBody>
+          <a:bodyPr wrap="square" lIns="45720" rIns="45720" tIns="18288" bIns="18288" anchor="ctr">
+            <a:spAutoFit/>
+          </a:bodyPr>
+          <a:lstStyle/>
+          <a:p>
+            <a:pPr algn="ctr"/>
+            <a:r>
+              <a:rPr sz="1600" b="1" i="0">
+                <a:solidFill>
+                  <a:srgbClr val="FFFFFF"/>
+                </a:solidFill>
+                <a:latin typeface="Calibri"/>
+              </a:rPr>
+              <a:t>2</a:t>
+            </a:r>
+          </a:p>
+        </p:txBody>
+      </p:sp>
+      <p:sp>
+        <p:nvSpPr>
+          <p:cNvPr id="11" name="TextBox 10"/>
+          <p:cNvSpPr txBox="1"/>
+          <p:nvPr/>
+        </p:nvSpPr>
+        <p:spPr>
+          <a:xfrm>
+            <a:off x="4023360" y="2039112"/>
+            <a:ext cx="7772400" cy="548640"/>
+          </a:xfrm>
+          <a:prstGeom prst="rect">
+            <a:avLst/>
+          </a:prstGeom>
+          <a:noFill/>
+        </p:spPr>
+        <p:txBody>
+          <a:bodyPr wrap="square" lIns="45720" rIns="45720" tIns="18288" bIns="18288" anchor="ctr">
+            <a:spAutoFit/>
+          </a:bodyPr>
+          <a:lstStyle/>
+          <a:p>
+            <a:pPr algn="l"/>
+            <a:r>
+              <a:rPr sz="1600" b="0" i="0">
                 <a:solidFill>
                   <a:srgbClr val="1A1A2E"/>
                 </a:solidFill>
@@ -4788,23 +7754,111 @@
               <a:t>Distinguere sicurezza del codice da sicurezza informatica</a:t>
             </a:r>
           </a:p>
-          <a:p>
-            <a:pPr>
-              <a:lnSpc>
-                <a:spcPct val="150000"/>
-              </a:lnSpc>
-            </a:pPr>
-            <a:r>
-              <a:rPr sz="2000" b="1">
-                <a:solidFill>
-                  <a:srgbClr val="00A0B0"/>
-                </a:solidFill>
-                <a:latin typeface="Calibri"/>
-              </a:rPr>
-              <a:t>▸  </a:t>
-            </a:r>
-            <a:r>
-              <a:rPr sz="2000">
+        </p:txBody>
+      </p:sp>
+      <p:sp>
+        <p:nvSpPr>
+          <p:cNvPr id="12" name="Oval 11"/>
+          <p:cNvSpPr/>
+          <p:nvPr/>
+        </p:nvSpPr>
+        <p:spPr>
+          <a:xfrm>
+            <a:off x="3200400" y="2743200"/>
+            <a:ext cx="548640" cy="548640"/>
+          </a:xfrm>
+          <a:prstGeom prst="ellipse">
+            <a:avLst/>
+          </a:prstGeom>
+          <a:solidFill>
+            <a:srgbClr val="00A0B0"/>
+          </a:solidFill>
+          <a:ln>
+            <a:noFill/>
+          </a:ln>
+        </p:spPr>
+        <p:style>
+          <a:lnRef idx="1">
+            <a:schemeClr val="accent1"/>
+          </a:lnRef>
+          <a:fillRef idx="3">
+            <a:schemeClr val="accent1"/>
+          </a:fillRef>
+          <a:effectRef idx="2">
+            <a:schemeClr val="accent1"/>
+          </a:effectRef>
+          <a:fontRef idx="minor">
+            <a:schemeClr val="lt1"/>
+          </a:fontRef>
+        </p:style>
+        <p:txBody>
+          <a:bodyPr rtlCol="0" anchor="ctr"/>
+          <a:lstStyle/>
+          <a:p>
+            <a:pPr algn="ctr"/>
+          </a:p>
+        </p:txBody>
+      </p:sp>
+      <p:sp>
+        <p:nvSpPr>
+          <p:cNvPr id="13" name="TextBox 12"/>
+          <p:cNvSpPr txBox="1"/>
+          <p:nvPr/>
+        </p:nvSpPr>
+        <p:spPr>
+          <a:xfrm>
+            <a:off x="3200400" y="2743200"/>
+            <a:ext cx="548640" cy="548640"/>
+          </a:xfrm>
+          <a:prstGeom prst="rect">
+            <a:avLst/>
+          </a:prstGeom>
+          <a:noFill/>
+        </p:spPr>
+        <p:txBody>
+          <a:bodyPr wrap="square" lIns="45720" rIns="45720" tIns="18288" bIns="18288" anchor="ctr">
+            <a:spAutoFit/>
+          </a:bodyPr>
+          <a:lstStyle/>
+          <a:p>
+            <a:pPr algn="ctr"/>
+            <a:r>
+              <a:rPr sz="1600" b="1" i="0">
+                <a:solidFill>
+                  <a:srgbClr val="FFFFFF"/>
+                </a:solidFill>
+                <a:latin typeface="Calibri"/>
+              </a:rPr>
+              <a:t>3</a:t>
+            </a:r>
+          </a:p>
+        </p:txBody>
+      </p:sp>
+      <p:sp>
+        <p:nvSpPr>
+          <p:cNvPr id="14" name="TextBox 13"/>
+          <p:cNvSpPr txBox="1"/>
+          <p:nvPr/>
+        </p:nvSpPr>
+        <p:spPr>
+          <a:xfrm>
+            <a:off x="4023360" y="2816352"/>
+            <a:ext cx="7772400" cy="548640"/>
+          </a:xfrm>
+          <a:prstGeom prst="rect">
+            <a:avLst/>
+          </a:prstGeom>
+          <a:noFill/>
+        </p:spPr>
+        <p:txBody>
+          <a:bodyPr wrap="square" lIns="45720" rIns="45720" tIns="18288" bIns="18288" anchor="ctr">
+            <a:spAutoFit/>
+          </a:bodyPr>
+          <a:lstStyle/>
+          <a:p>
+            <a:pPr algn="l"/>
+            <a:r>
+              <a:rPr sz="1600" b="0" i="0">
                 <a:solidFill>
                   <a:srgbClr val="1A1A2E"/>
                 </a:solidFill>
@@ -4813,23 +7867,111 @@
               <a:t>Conoscere i 5 principi fondamentali del Secure Coding</a:t>
             </a:r>
           </a:p>
-          <a:p>
-            <a:pPr>
-              <a:lnSpc>
-                <a:spcPct val="150000"/>
-              </a:lnSpc>
-            </a:pPr>
-            <a:r>
-              <a:rPr sz="2000" b="1">
-                <a:solidFill>
-                  <a:srgbClr val="00A0B0"/>
-                </a:solidFill>
-                <a:latin typeface="Calibri"/>
-              </a:rPr>
-              <a:t>▸  </a:t>
-            </a:r>
-            <a:r>
-              <a:rPr sz="2000">
+        </p:txBody>
+      </p:sp>
+      <p:sp>
+        <p:nvSpPr>
+          <p:cNvPr id="15" name="Oval 14"/>
+          <p:cNvSpPr/>
+          <p:nvPr/>
+        </p:nvSpPr>
+        <p:spPr>
+          <a:xfrm>
+            <a:off x="3200400" y="3520440"/>
+            <a:ext cx="548640" cy="548640"/>
+          </a:xfrm>
+          <a:prstGeom prst="ellipse">
+            <a:avLst/>
+          </a:prstGeom>
+          <a:solidFill>
+            <a:srgbClr val="00A0B0"/>
+          </a:solidFill>
+          <a:ln>
+            <a:noFill/>
+          </a:ln>
+        </p:spPr>
+        <p:style>
+          <a:lnRef idx="1">
+            <a:schemeClr val="accent1"/>
+          </a:lnRef>
+          <a:fillRef idx="3">
+            <a:schemeClr val="accent1"/>
+          </a:fillRef>
+          <a:effectRef idx="2">
+            <a:schemeClr val="accent1"/>
+          </a:effectRef>
+          <a:fontRef idx="minor">
+            <a:schemeClr val="lt1"/>
+          </a:fontRef>
+        </p:style>
+        <p:txBody>
+          <a:bodyPr rtlCol="0" anchor="ctr"/>
+          <a:lstStyle/>
+          <a:p>
+            <a:pPr algn="ctr"/>
+          </a:p>
+        </p:txBody>
+      </p:sp>
+      <p:sp>
+        <p:nvSpPr>
+          <p:cNvPr id="16" name="TextBox 15"/>
+          <p:cNvSpPr txBox="1"/>
+          <p:nvPr/>
+        </p:nvSpPr>
+        <p:spPr>
+          <a:xfrm>
+            <a:off x="3200400" y="3520440"/>
+            <a:ext cx="548640" cy="548640"/>
+          </a:xfrm>
+          <a:prstGeom prst="rect">
+            <a:avLst/>
+          </a:prstGeom>
+          <a:noFill/>
+        </p:spPr>
+        <p:txBody>
+          <a:bodyPr wrap="square" lIns="45720" rIns="45720" tIns="18288" bIns="18288" anchor="ctr">
+            <a:spAutoFit/>
+          </a:bodyPr>
+          <a:lstStyle/>
+          <a:p>
+            <a:pPr algn="ctr"/>
+            <a:r>
+              <a:rPr sz="1600" b="1" i="0">
+                <a:solidFill>
+                  <a:srgbClr val="FFFFFF"/>
+                </a:solidFill>
+                <a:latin typeface="Calibri"/>
+              </a:rPr>
+              <a:t>4</a:t>
+            </a:r>
+          </a:p>
+        </p:txBody>
+      </p:sp>
+      <p:sp>
+        <p:nvSpPr>
+          <p:cNvPr id="17" name="TextBox 16"/>
+          <p:cNvSpPr txBox="1"/>
+          <p:nvPr/>
+        </p:nvSpPr>
+        <p:spPr>
+          <a:xfrm>
+            <a:off x="4023360" y="3593592"/>
+            <a:ext cx="7772400" cy="548640"/>
+          </a:xfrm>
+          <a:prstGeom prst="rect">
+            <a:avLst/>
+          </a:prstGeom>
+          <a:noFill/>
+        </p:spPr>
+        <p:txBody>
+          <a:bodyPr wrap="square" lIns="45720" rIns="45720" tIns="18288" bIns="18288" anchor="ctr">
+            <a:spAutoFit/>
+          </a:bodyPr>
+          <a:lstStyle/>
+          <a:p>
+            <a:pPr algn="l"/>
+            <a:r>
+              <a:rPr sz="1600" b="0" i="0">
                 <a:solidFill>
                   <a:srgbClr val="1A1A2E"/>
                 </a:solidFill>
@@ -4838,23 +7980,111 @@
               <a:t>Analizzare 3 casi reali di breach</a:t>
             </a:r>
           </a:p>
-          <a:p>
-            <a:pPr>
-              <a:lnSpc>
-                <a:spcPct val="150000"/>
-              </a:lnSpc>
-            </a:pPr>
-            <a:r>
-              <a:rPr sz="2000" b="1">
-                <a:solidFill>
-                  <a:srgbClr val="00A0B0"/>
-                </a:solidFill>
-                <a:latin typeface="Calibri"/>
-              </a:rPr>
-              <a:t>▸  </a:t>
-            </a:r>
-            <a:r>
-              <a:rPr sz="2000">
+        </p:txBody>
+      </p:sp>
+      <p:sp>
+        <p:nvSpPr>
+          <p:cNvPr id="18" name="Oval 17"/>
+          <p:cNvSpPr/>
+          <p:nvPr/>
+        </p:nvSpPr>
+        <p:spPr>
+          <a:xfrm>
+            <a:off x="3200400" y="4297680"/>
+            <a:ext cx="548640" cy="548640"/>
+          </a:xfrm>
+          <a:prstGeom prst="ellipse">
+            <a:avLst/>
+          </a:prstGeom>
+          <a:solidFill>
+            <a:srgbClr val="00A0B0"/>
+          </a:solidFill>
+          <a:ln>
+            <a:noFill/>
+          </a:ln>
+        </p:spPr>
+        <p:style>
+          <a:lnRef idx="1">
+            <a:schemeClr val="accent1"/>
+          </a:lnRef>
+          <a:fillRef idx="3">
+            <a:schemeClr val="accent1"/>
+          </a:fillRef>
+          <a:effectRef idx="2">
+            <a:schemeClr val="accent1"/>
+          </a:effectRef>
+          <a:fontRef idx="minor">
+            <a:schemeClr val="lt1"/>
+          </a:fontRef>
+        </p:style>
+        <p:txBody>
+          <a:bodyPr rtlCol="0" anchor="ctr"/>
+          <a:lstStyle/>
+          <a:p>
+            <a:pPr algn="ctr"/>
+          </a:p>
+        </p:txBody>
+      </p:sp>
+      <p:sp>
+        <p:nvSpPr>
+          <p:cNvPr id="19" name="TextBox 18"/>
+          <p:cNvSpPr txBox="1"/>
+          <p:nvPr/>
+        </p:nvSpPr>
+        <p:spPr>
+          <a:xfrm>
+            <a:off x="3200400" y="4297680"/>
+            <a:ext cx="548640" cy="548640"/>
+          </a:xfrm>
+          <a:prstGeom prst="rect">
+            <a:avLst/>
+          </a:prstGeom>
+          <a:noFill/>
+        </p:spPr>
+        <p:txBody>
+          <a:bodyPr wrap="square" lIns="45720" rIns="45720" tIns="18288" bIns="18288" anchor="ctr">
+            <a:spAutoFit/>
+          </a:bodyPr>
+          <a:lstStyle/>
+          <a:p>
+            <a:pPr algn="ctr"/>
+            <a:r>
+              <a:rPr sz="1600" b="1" i="0">
+                <a:solidFill>
+                  <a:srgbClr val="FFFFFF"/>
+                </a:solidFill>
+                <a:latin typeface="Calibri"/>
+              </a:rPr>
+              <a:t>5</a:t>
+            </a:r>
+          </a:p>
+        </p:txBody>
+      </p:sp>
+      <p:sp>
+        <p:nvSpPr>
+          <p:cNvPr id="20" name="TextBox 19"/>
+          <p:cNvSpPr txBox="1"/>
+          <p:nvPr/>
+        </p:nvSpPr>
+        <p:spPr>
+          <a:xfrm>
+            <a:off x="4023360" y="4370832"/>
+            <a:ext cx="7772400" cy="548640"/>
+          </a:xfrm>
+          <a:prstGeom prst="rect">
+            <a:avLst/>
+          </a:prstGeom>
+          <a:noFill/>
+        </p:spPr>
+        <p:txBody>
+          <a:bodyPr wrap="square" lIns="45720" rIns="45720" tIns="18288" bIns="18288" anchor="ctr">
+            <a:spAutoFit/>
+          </a:bodyPr>
+          <a:lstStyle/>
+          <a:p>
+            <a:pPr algn="l"/>
+            <a:r>
+              <a:rPr sz="1600" b="0" i="0">
                 <a:solidFill>
                   <a:srgbClr val="1A1A2E"/>
                 </a:solidFill>
@@ -4867,7 +8097,7 @@
       </p:sp>
       <p:cxnSp>
         <p:nvCxnSpPr>
-          <p:cNvPr id="5" name="Connector 4"/>
+          <p:cNvPr id="21" name="Connector 20"/>
           <p:cNvCxnSpPr/>
           <p:nvPr/>
         </p:nvCxnSpPr>
@@ -4902,14 +8132,14 @@
       </p:cxnSp>
       <p:sp>
         <p:nvSpPr>
-          <p:cNvPr id="6" name="TextBox 5"/>
+          <p:cNvPr id="22" name="TextBox 21"/>
           <p:cNvSpPr txBox="1"/>
           <p:nvPr/>
         </p:nvSpPr>
         <p:spPr>
           <a:xfrm>
             <a:off x="457200" y="6473952"/>
-            <a:ext cx="7315200" cy="320040"/>
+            <a:ext cx="7315200" cy="292608"/>
           </a:xfrm>
           <a:prstGeom prst="rect">
             <a:avLst/>
@@ -4930,21 +8160,21 @@
                 </a:solidFill>
                 <a:latin typeface="Calibri"/>
               </a:rPr>
-              <a:t>Secure Coding · Corso IFTS STEM · A. Manneschi</a:t>
-            </a:r>
-          </a:p>
-        </p:txBody>
-      </p:sp>
-      <p:sp>
-        <p:nvSpPr>
-          <p:cNvPr id="7" name="TextBox 6"/>
+              <a:t>Secure Coding · Corso IFTS STEM · A. Manneschi · 2024/2025</a:t>
+            </a:r>
+          </a:p>
+        </p:txBody>
+      </p:sp>
+      <p:sp>
+        <p:nvSpPr>
+          <p:cNvPr id="23" name="TextBox 22"/>
           <p:cNvSpPr txBox="1"/>
           <p:nvPr/>
         </p:nvSpPr>
         <p:spPr>
           <a:xfrm>
             <a:off x="10515600" y="6473952"/>
-            <a:ext cx="1188720" cy="320040"/>
+            <a:ext cx="1188720" cy="292608"/>
           </a:xfrm>
           <a:prstGeom prst="rect">
             <a:avLst/>
@@ -4965,7 +8195,7 @@
                 </a:solidFill>
                 <a:latin typeface="Calibri"/>
               </a:rPr>
-              <a:t>L1  ·  2/12</a:t>
+              <a:t>L1  ·  2/14</a:t>
             </a:r>
           </a:p>
         </p:txBody>
@@ -4997,13 +8227,13 @@
         <p:spPr>
           <a:xfrm>
             <a:off x="0" y="0"/>
-            <a:ext cx="2286000" cy="6858000"/>
+            <a:ext cx="4114800" cy="6858000"/>
           </a:xfrm>
           <a:prstGeom prst="rect">
             <a:avLst/>
           </a:prstGeom>
           <a:solidFill>
-            <a:srgbClr val="0F2D52"/>
+            <a:srgbClr val="081B33"/>
           </a:solidFill>
           <a:ln>
             <a:noFill/>
@@ -5033,14 +8263,100 @@
       </p:sp>
       <p:sp>
         <p:nvSpPr>
-          <p:cNvPr id="3" name="TextBox 2"/>
+          <p:cNvPr id="3" name="Rectangle 2"/>
+          <p:cNvSpPr/>
+          <p:nvPr/>
+        </p:nvSpPr>
+        <p:spPr>
+          <a:xfrm>
+            <a:off x="4114800" y="0"/>
+            <a:ext cx="8046720" cy="6858000"/>
+          </a:xfrm>
+          <a:prstGeom prst="rect">
+            <a:avLst/>
+          </a:prstGeom>
+          <a:solidFill>
+            <a:srgbClr val="F1F4F8"/>
+          </a:solidFill>
+          <a:ln>
+            <a:noFill/>
+          </a:ln>
+        </p:spPr>
+        <p:style>
+          <a:lnRef idx="1">
+            <a:schemeClr val="accent1"/>
+          </a:lnRef>
+          <a:fillRef idx="3">
+            <a:schemeClr val="accent1"/>
+          </a:fillRef>
+          <a:effectRef idx="2">
+            <a:schemeClr val="accent1"/>
+          </a:effectRef>
+          <a:fontRef idx="minor">
+            <a:schemeClr val="lt1"/>
+          </a:fontRef>
+        </p:style>
+        <p:txBody>
+          <a:bodyPr rtlCol="0" anchor="ctr"/>
+          <a:lstStyle/>
+          <a:p>
+            <a:pPr algn="ctr"/>
+          </a:p>
+        </p:txBody>
+      </p:sp>
+      <p:sp>
+        <p:nvSpPr>
+          <p:cNvPr id="4" name="Rectangle 3"/>
+          <p:cNvSpPr/>
+          <p:nvPr/>
+        </p:nvSpPr>
+        <p:spPr>
+          <a:xfrm>
+            <a:off x="4114800" y="0"/>
+            <a:ext cx="137160" cy="6858000"/>
+          </a:xfrm>
+          <a:prstGeom prst="rect">
+            <a:avLst/>
+          </a:prstGeom>
+          <a:solidFill>
+            <a:srgbClr val="00A0B0"/>
+          </a:solidFill>
+          <a:ln>
+            <a:noFill/>
+          </a:ln>
+        </p:spPr>
+        <p:style>
+          <a:lnRef idx="1">
+            <a:schemeClr val="accent1"/>
+          </a:lnRef>
+          <a:fillRef idx="3">
+            <a:schemeClr val="accent1"/>
+          </a:fillRef>
+          <a:effectRef idx="2">
+            <a:schemeClr val="accent1"/>
+          </a:effectRef>
+          <a:fontRef idx="minor">
+            <a:schemeClr val="lt1"/>
+          </a:fontRef>
+        </p:style>
+        <p:txBody>
+          <a:bodyPr rtlCol="0" anchor="ctr"/>
+          <a:lstStyle/>
+          <a:p>
+            <a:pPr algn="ctr"/>
+          </a:p>
+        </p:txBody>
+      </p:sp>
+      <p:sp>
+        <p:nvSpPr>
+          <p:cNvPr id="5" name="TextBox 4"/>
           <p:cNvSpPr txBox="1"/>
           <p:nvPr/>
         </p:nvSpPr>
         <p:spPr>
           <a:xfrm>
-            <a:off x="274320" y="2286000"/>
-            <a:ext cx="1828800" cy="1828800"/>
+            <a:off x="274320" y="2103120"/>
+            <a:ext cx="3657600" cy="2286000"/>
           </a:xfrm>
           <a:prstGeom prst="rect">
             <a:avLst/>
@@ -5055,7 +8371,7 @@
           <a:p>
             <a:pPr algn="ctr"/>
             <a:r>
-              <a:rPr sz="12000" b="1" i="0">
+              <a:rPr sz="17000" b="1" i="0">
                 <a:solidFill>
                   <a:srgbClr val="00A0B0"/>
                 </a:solidFill>
@@ -5068,14 +8384,14 @@
       </p:sp>
       <p:sp>
         <p:nvSpPr>
-          <p:cNvPr id="4" name="TextBox 3"/>
+          <p:cNvPr id="6" name="TextBox 5"/>
           <p:cNvSpPr txBox="1"/>
           <p:nvPr/>
         </p:nvSpPr>
         <p:spPr>
           <a:xfrm>
-            <a:off x="2743200" y="2560320"/>
-            <a:ext cx="8961120" cy="1371600"/>
+            <a:off x="274320" y="4572000"/>
+            <a:ext cx="3657600" cy="457200"/>
           </a:xfrm>
           <a:prstGeom prst="rect">
             <a:avLst/>
@@ -5088,29 +8404,29 @@
           </a:bodyPr>
           <a:lstStyle/>
           <a:p>
-            <a:pPr algn="l"/>
-            <a:r>
-              <a:rPr sz="4200" b="1" i="0">
-                <a:solidFill>
-                  <a:srgbClr val="0F2D52"/>
-                </a:solidFill>
-                <a:latin typeface="Calibri"/>
-              </a:rPr>
-              <a:t>Una storia: Equifax 2017</a:t>
-            </a:r>
-          </a:p>
-        </p:txBody>
-      </p:sp>
-      <p:sp>
-        <p:nvSpPr>
-          <p:cNvPr id="5" name="TextBox 4"/>
+            <a:pPr algn="ctr"/>
+            <a:r>
+              <a:rPr sz="2000" b="1" i="0">
+                <a:solidFill>
+                  <a:srgbClr val="6FD8E0"/>
+                </a:solidFill>
+                <a:latin typeface="Calibri"/>
+              </a:rPr>
+              <a:t>PARTE</a:t>
+            </a:r>
+          </a:p>
+        </p:txBody>
+      </p:sp>
+      <p:sp>
+        <p:nvSpPr>
+          <p:cNvPr id="7" name="TextBox 6"/>
           <p:cNvSpPr txBox="1"/>
           <p:nvPr/>
         </p:nvSpPr>
         <p:spPr>
           <a:xfrm>
-            <a:off x="2743200" y="3931920"/>
-            <a:ext cx="8961120" cy="1828800"/>
+            <a:off x="4572000" y="2286000"/>
+            <a:ext cx="7315200" cy="1645920"/>
           </a:xfrm>
           <a:prstGeom prst="rect">
             <a:avLst/>
@@ -5125,6 +8441,41 @@
           <a:p>
             <a:pPr algn="l"/>
             <a:r>
+              <a:rPr sz="4400" b="1" i="0">
+                <a:solidFill>
+                  <a:srgbClr val="0F2D52"/>
+                </a:solidFill>
+                <a:latin typeface="Calibri"/>
+              </a:rPr>
+              <a:t>Una storia: Equifax 2017</a:t>
+            </a:r>
+          </a:p>
+        </p:txBody>
+      </p:sp>
+      <p:sp>
+        <p:nvSpPr>
+          <p:cNvPr id="8" name="TextBox 7"/>
+          <p:cNvSpPr txBox="1"/>
+          <p:nvPr/>
+        </p:nvSpPr>
+        <p:spPr>
+          <a:xfrm>
+            <a:off x="4572000" y="3931920"/>
+            <a:ext cx="7315200" cy="1828800"/>
+          </a:xfrm>
+          <a:prstGeom prst="rect">
+            <a:avLst/>
+          </a:prstGeom>
+          <a:noFill/>
+        </p:spPr>
+        <p:txBody>
+          <a:bodyPr wrap="square" lIns="45720" rIns="45720" tIns="18288" bIns="18288" anchor="t">
+            <a:spAutoFit/>
+          </a:bodyPr>
+          <a:lstStyle/>
+          <a:p>
+            <a:pPr algn="l"/>
+            <a:r>
               <a:rPr sz="1800" b="0" i="1">
                 <a:solidFill>
                   <a:srgbClr val="6B7280"/>
@@ -5138,7 +8489,7 @@
       </p:sp>
       <p:cxnSp>
         <p:nvCxnSpPr>
-          <p:cNvPr id="6" name="Connector 5"/>
+          <p:cNvPr id="9" name="Connector 8"/>
           <p:cNvCxnSpPr/>
           <p:nvPr/>
         </p:nvCxnSpPr>
@@ -5173,14 +8524,14 @@
       </p:cxnSp>
       <p:sp>
         <p:nvSpPr>
-          <p:cNvPr id="7" name="TextBox 6"/>
+          <p:cNvPr id="10" name="TextBox 9"/>
           <p:cNvSpPr txBox="1"/>
           <p:nvPr/>
         </p:nvSpPr>
         <p:spPr>
           <a:xfrm>
             <a:off x="457200" y="6473952"/>
-            <a:ext cx="7315200" cy="320040"/>
+            <a:ext cx="7315200" cy="292608"/>
           </a:xfrm>
           <a:prstGeom prst="rect">
             <a:avLst/>
@@ -5201,21 +8552,21 @@
                 </a:solidFill>
                 <a:latin typeface="Calibri"/>
               </a:rPr>
-              <a:t>Secure Coding · Corso IFTS STEM · A. Manneschi</a:t>
-            </a:r>
-          </a:p>
-        </p:txBody>
-      </p:sp>
-      <p:sp>
-        <p:nvSpPr>
-          <p:cNvPr id="8" name="TextBox 7"/>
+              <a:t>Secure Coding · Corso IFTS STEM · A. Manneschi · 2024/2025</a:t>
+            </a:r>
+          </a:p>
+        </p:txBody>
+      </p:sp>
+      <p:sp>
+        <p:nvSpPr>
+          <p:cNvPr id="11" name="TextBox 10"/>
           <p:cNvSpPr txBox="1"/>
           <p:nvPr/>
         </p:nvSpPr>
         <p:spPr>
           <a:xfrm>
             <a:off x="10515600" y="6473952"/>
-            <a:ext cx="1188720" cy="320040"/>
+            <a:ext cx="1188720" cy="292608"/>
           </a:xfrm>
           <a:prstGeom prst="rect">
             <a:avLst/>
@@ -5236,7 +8587,7 @@
                 </a:solidFill>
                 <a:latin typeface="Calibri"/>
               </a:rPr>
-              <a:t>L1  ·  3/12</a:t>
+              <a:t>L1  ·  3/14</a:t>
             </a:r>
           </a:p>
         </p:txBody>
@@ -5361,7 +8712,7 @@
           <a:p>
             <a:pPr algn="l"/>
             <a:r>
-              <a:rPr sz="1600" b="0" i="1">
+              <a:rPr sz="1500" b="0" i="1">
                 <a:solidFill>
                   <a:srgbClr val="00A0B0"/>
                 </a:solidFill>
@@ -5380,7 +8731,7 @@
         </p:nvSpPr>
         <p:spPr>
           <a:xfrm>
-            <a:off x="640080" y="1463040"/>
+            <a:off x="640080" y="1554480"/>
             <a:ext cx="10972800" cy="5029200"/>
           </a:xfrm>
           <a:prstGeom prst="rect">
@@ -5398,6 +8749,9 @@
               <a:lnSpc>
                 <a:spcPct val="150000"/>
               </a:lnSpc>
+              <a:spcAft>
+                <a:spcPts val="400"/>
+              </a:spcAft>
             </a:pPr>
             <a:r>
               <a:rPr sz="2000" b="1">
@@ -5423,6 +8777,9 @@
               <a:lnSpc>
                 <a:spcPct val="150000"/>
               </a:lnSpc>
+              <a:spcAft>
+                <a:spcPts val="400"/>
+              </a:spcAft>
             </a:pPr>
             <a:r>
               <a:rPr sz="2000" b="1">
@@ -5448,6 +8805,9 @@
               <a:lnSpc>
                 <a:spcPct val="150000"/>
               </a:lnSpc>
+              <a:spcAft>
+                <a:spcPts val="400"/>
+              </a:spcAft>
             </a:pPr>
             <a:r>
               <a:rPr sz="2000" b="1">
@@ -5473,6 +8833,9 @@
               <a:lnSpc>
                 <a:spcPct val="150000"/>
               </a:lnSpc>
+              <a:spcAft>
+                <a:spcPts val="400"/>
+              </a:spcAft>
             </a:pPr>
             <a:r>
               <a:rPr sz="2000" b="1">
@@ -5498,6 +8861,9 @@
               <a:lnSpc>
                 <a:spcPct val="150000"/>
               </a:lnSpc>
+              <a:spcAft>
+                <a:spcPts val="400"/>
+              </a:spcAft>
             </a:pPr>
             <a:r>
               <a:rPr sz="2000" b="1">
@@ -5564,7 +8930,7 @@
         <p:spPr>
           <a:xfrm>
             <a:off x="457200" y="6473952"/>
-            <a:ext cx="7315200" cy="320040"/>
+            <a:ext cx="7315200" cy="292608"/>
           </a:xfrm>
           <a:prstGeom prst="rect">
             <a:avLst/>
@@ -5585,7 +8951,7 @@
                 </a:solidFill>
                 <a:latin typeface="Calibri"/>
               </a:rPr>
-              <a:t>Secure Coding · Corso IFTS STEM · A. Manneschi</a:t>
+              <a:t>Secure Coding · Corso IFTS STEM · A. Manneschi · 2024/2025</a:t>
             </a:r>
           </a:p>
         </p:txBody>
@@ -5599,7 +8965,7 @@
         <p:spPr>
           <a:xfrm>
             <a:off x="10515600" y="6473952"/>
-            <a:ext cx="1188720" cy="320040"/>
+            <a:ext cx="1188720" cy="292608"/>
           </a:xfrm>
           <a:prstGeom prst="rect">
             <a:avLst/>
@@ -5620,7 +8986,7 @@
                 </a:solidFill>
                 <a:latin typeface="Calibri"/>
               </a:rPr>
-              <a:t>L1  ·  4/12</a:t>
+              <a:t>L1  ·  4/14</a:t>
             </a:r>
           </a:p>
         </p:txBody>
@@ -5716,21 +9082,45 @@
                 </a:solidFill>
                 <a:latin typeface="Calibri"/>
               </a:rPr>
-              <a:t>Cosa significa 'essere sicuri': la CIA Triad</a:t>
-            </a:r>
-          </a:p>
-        </p:txBody>
-      </p:sp>
-      <p:sp>
-        <p:nvSpPr>
-          <p:cNvPr id="4" name="TextBox 3"/>
+              <a:t>La CIA Triad</a:t>
+            </a:r>
+          </a:p>
+        </p:txBody>
+      </p:sp>
+      <p:pic>
+        <p:nvPicPr>
+          <p:cNvPr id="4" name="Picture 3" descr="cap1_cia_triad.png"/>
+          <p:cNvPicPr>
+            <a:picLocks noChangeAspect="1"/>
+          </p:cNvPicPr>
+          <p:nvPr/>
+        </p:nvPicPr>
+        <p:blipFill>
+          <a:blip r:embed="rId2"/>
+          <a:stretch>
+            <a:fillRect/>
+          </a:stretch>
+        </p:blipFill>
+        <p:spPr>
+          <a:xfrm>
+            <a:off x="640080" y="1097280"/>
+            <a:ext cx="10881360" cy="4572000"/>
+          </a:xfrm>
+          <a:prstGeom prst="rect">
+            <a:avLst/>
+          </a:prstGeom>
+        </p:spPr>
+      </p:pic>
+      <p:sp>
+        <p:nvSpPr>
+          <p:cNvPr id="5" name="TextBox 4"/>
           <p:cNvSpPr txBox="1"/>
           <p:nvPr/>
         </p:nvSpPr>
         <p:spPr>
           <a:xfrm>
-            <a:off x="640080" y="1005840"/>
-            <a:ext cx="10972800" cy="5029200"/>
+            <a:off x="457200" y="5852160"/>
+            <a:ext cx="11247120" cy="365760"/>
           </a:xfrm>
           <a:prstGeom prst="rect">
             <a:avLst/>
@@ -5738,140 +9128,27 @@
           <a:noFill/>
         </p:spPr>
         <p:txBody>
-          <a:bodyPr wrap="square">
+          <a:bodyPr wrap="square" lIns="45720" rIns="45720" tIns="18288" bIns="18288" anchor="t">
             <a:spAutoFit/>
           </a:bodyPr>
           <a:lstStyle/>
           <a:p>
-            <a:pPr>
-              <a:lnSpc>
-                <a:spcPct val="150000"/>
-              </a:lnSpc>
-            </a:pPr>
-            <a:r>
-              <a:rPr sz="2000" b="1">
-                <a:solidFill>
-                  <a:srgbClr val="00A0B0"/>
-                </a:solidFill>
-                <a:latin typeface="Calibri"/>
-              </a:rPr>
-              <a:t>▸  </a:t>
-            </a:r>
-            <a:r>
-              <a:rPr sz="2000">
-                <a:solidFill>
-                  <a:srgbClr val="1A1A2E"/>
-                </a:solidFill>
-                <a:latin typeface="Calibri"/>
-              </a:rPr>
-              <a:t>C — Confidentiality (Riservatezza): dati visibili solo a chi può vederli</a:t>
-            </a:r>
-          </a:p>
-          <a:p>
-            <a:pPr>
-              <a:lnSpc>
-                <a:spcPct val="150000"/>
-              </a:lnSpc>
-            </a:pPr>
-            <a:r>
-              <a:rPr sz="2000" b="1">
-                <a:solidFill>
-                  <a:srgbClr val="00A0B0"/>
-                </a:solidFill>
-                <a:latin typeface="Calibri"/>
-              </a:rPr>
-              <a:t>▸  </a:t>
-            </a:r>
-            <a:r>
-              <a:rPr sz="2000">
-                <a:solidFill>
-                  <a:srgbClr val="1A1A2E"/>
-                </a:solidFill>
-                <a:latin typeface="Calibri"/>
-              </a:rPr>
-              <a:t>I — Integrity (Integrità): dati non modificati senza autorizzazione</a:t>
-            </a:r>
-          </a:p>
-          <a:p>
-            <a:pPr>
-              <a:lnSpc>
-                <a:spcPct val="150000"/>
-              </a:lnSpc>
-            </a:pPr>
-            <a:r>
-              <a:rPr sz="2000" b="1">
-                <a:solidFill>
-                  <a:srgbClr val="00A0B0"/>
-                </a:solidFill>
-                <a:latin typeface="Calibri"/>
-              </a:rPr>
-              <a:t>▸  </a:t>
-            </a:r>
-            <a:r>
-              <a:rPr sz="2000">
-                <a:solidFill>
-                  <a:srgbClr val="1A1A2E"/>
-                </a:solidFill>
-                <a:latin typeface="Calibri"/>
-              </a:rPr>
-              <a:t>A — Availability (Disponibilità): sistema funziona quando serve</a:t>
-            </a:r>
-          </a:p>
-          <a:p>
-            <a:pPr>
-              <a:lnSpc>
-                <a:spcPct val="150000"/>
-              </a:lnSpc>
-            </a:pPr>
-            <a:r>
-              <a:rPr sz="2000" b="1">
-                <a:solidFill>
-                  <a:srgbClr val="00A0B0"/>
-                </a:solidFill>
-                <a:latin typeface="Calibri"/>
-              </a:rPr>
-              <a:t>▸  </a:t>
-            </a:r>
-            <a:r>
-              <a:rPr sz="2000">
-                <a:solidFill>
-                  <a:srgbClr val="1A1A2E"/>
-                </a:solidFill>
-                <a:latin typeface="Calibri"/>
-              </a:rPr>
-              <a:t/>
-            </a:r>
-          </a:p>
-          <a:p>
-            <a:pPr>
-              <a:lnSpc>
-                <a:spcPct val="150000"/>
-              </a:lnSpc>
-            </a:pPr>
-            <a:r>
-              <a:rPr sz="2000" b="1">
-                <a:solidFill>
-                  <a:srgbClr val="00A0B0"/>
-                </a:solidFill>
-                <a:latin typeface="Calibri"/>
-              </a:rPr>
-              <a:t>▸  </a:t>
-            </a:r>
-            <a:r>
-              <a:rPr sz="2000">
-                <a:solidFill>
-                  <a:srgbClr val="1A1A2E"/>
-                </a:solidFill>
-                <a:latin typeface="Calibri"/>
-              </a:rPr>
-              <a:t>Ogni breach viola almeno una di queste 3 proprietà</a:t>
+            <a:pPr algn="ctr"/>
+            <a:r>
+              <a:rPr sz="1300" b="0" i="1">
+                <a:solidFill>
+                  <a:srgbClr val="6B7280"/>
+                </a:solidFill>
+                <a:latin typeface="Calibri"/>
+              </a:rPr>
+              <a:t>Le tre proprietà fondamentali della sicurezza informatica</a:t>
             </a:r>
           </a:p>
         </p:txBody>
       </p:sp>
       <p:cxnSp>
         <p:nvCxnSpPr>
-          <p:cNvPr id="5" name="Connector 4"/>
+          <p:cNvPr id="6" name="Connector 5"/>
           <p:cNvCxnSpPr/>
           <p:nvPr/>
         </p:nvCxnSpPr>
@@ -5906,14 +9183,14 @@
       </p:cxnSp>
       <p:sp>
         <p:nvSpPr>
-          <p:cNvPr id="6" name="TextBox 5"/>
+          <p:cNvPr id="7" name="TextBox 6"/>
           <p:cNvSpPr txBox="1"/>
           <p:nvPr/>
         </p:nvSpPr>
         <p:spPr>
           <a:xfrm>
             <a:off x="457200" y="6473952"/>
-            <a:ext cx="7315200" cy="320040"/>
+            <a:ext cx="7315200" cy="292608"/>
           </a:xfrm>
           <a:prstGeom prst="rect">
             <a:avLst/>
@@ -5934,21 +9211,21 @@
                 </a:solidFill>
                 <a:latin typeface="Calibri"/>
               </a:rPr>
-              <a:t>Secure Coding · Corso IFTS STEM · A. Manneschi</a:t>
-            </a:r>
-          </a:p>
-        </p:txBody>
-      </p:sp>
-      <p:sp>
-        <p:nvSpPr>
-          <p:cNvPr id="7" name="TextBox 6"/>
+              <a:t>Secure Coding · Corso IFTS STEM · A. Manneschi · 2024/2025</a:t>
+            </a:r>
+          </a:p>
+        </p:txBody>
+      </p:sp>
+      <p:sp>
+        <p:nvSpPr>
+          <p:cNvPr id="8" name="TextBox 7"/>
           <p:cNvSpPr txBox="1"/>
           <p:nvPr/>
         </p:nvSpPr>
         <p:spPr>
           <a:xfrm>
             <a:off x="10515600" y="6473952"/>
-            <a:ext cx="1188720" cy="320040"/>
+            <a:ext cx="1188720" cy="292608"/>
           </a:xfrm>
           <a:prstGeom prst="rect">
             <a:avLst/>
@@ -5969,7 +9246,7 @@
                 </a:solidFill>
                 <a:latin typeface="Calibri"/>
               </a:rPr>
-              <a:t>L1  ·  5/12</a:t>
+              <a:t>L1  ·  5/14</a:t>
             </a:r>
           </a:p>
         </p:txBody>
@@ -6037,14 +9314,57 @@
       </p:sp>
       <p:sp>
         <p:nvSpPr>
-          <p:cNvPr id="3" name="TextBox 2"/>
+          <p:cNvPr id="3" name="Rectangle 2"/>
+          <p:cNvSpPr/>
+          <p:nvPr/>
+        </p:nvSpPr>
+        <p:spPr>
+          <a:xfrm>
+            <a:off x="0" y="0"/>
+            <a:ext cx="365760" cy="6858000"/>
+          </a:xfrm>
+          <a:prstGeom prst="rect">
+            <a:avLst/>
+          </a:prstGeom>
+          <a:solidFill>
+            <a:srgbClr val="00A0B0"/>
+          </a:solidFill>
+          <a:ln>
+            <a:noFill/>
+          </a:ln>
+        </p:spPr>
+        <p:style>
+          <a:lnRef idx="1">
+            <a:schemeClr val="accent1"/>
+          </a:lnRef>
+          <a:fillRef idx="3">
+            <a:schemeClr val="accent1"/>
+          </a:fillRef>
+          <a:effectRef idx="2">
+            <a:schemeClr val="accent1"/>
+          </a:effectRef>
+          <a:fontRef idx="minor">
+            <a:schemeClr val="lt1"/>
+          </a:fontRef>
+        </p:style>
+        <p:txBody>
+          <a:bodyPr rtlCol="0" anchor="ctr"/>
+          <a:lstStyle/>
+          <a:p>
+            <a:pPr algn="ctr"/>
+          </a:p>
+        </p:txBody>
+      </p:sp>
+      <p:sp>
+        <p:nvSpPr>
+          <p:cNvPr id="4" name="TextBox 3"/>
           <p:cNvSpPr txBox="1"/>
           <p:nvPr/>
         </p:nvSpPr>
         <p:spPr>
           <a:xfrm>
-            <a:off x="457200" y="731520"/>
-            <a:ext cx="1828800" cy="1828800"/>
+            <a:off x="914400" y="914400"/>
+            <a:ext cx="2286000" cy="2286000"/>
           </a:xfrm>
           <a:prstGeom prst="rect">
             <a:avLst/>
@@ -6059,7 +9379,7 @@
           <a:p>
             <a:pPr algn="l"/>
             <a:r>
-              <a:rPr sz="20000" b="1" i="0">
+              <a:rPr sz="25000" b="1" i="0">
                 <a:solidFill>
                   <a:srgbClr val="00A0B0"/>
                 </a:solidFill>
@@ -6072,13 +9392,13 @@
       </p:sp>
       <p:sp>
         <p:nvSpPr>
-          <p:cNvPr id="4" name="TextBox 3"/>
+          <p:cNvPr id="5" name="TextBox 4"/>
           <p:cNvSpPr txBox="1"/>
           <p:nvPr/>
         </p:nvSpPr>
         <p:spPr>
           <a:xfrm>
-            <a:off x="2286000" y="1828800"/>
+            <a:off x="2286000" y="2286000"/>
             <a:ext cx="9144000" cy="3200400"/>
           </a:xfrm>
           <a:prstGeom prst="rect">
@@ -6098,44 +9418,9 @@
                 <a:solidFill>
                   <a:srgbClr val="0F2D52"/>
                 </a:solidFill>
-                <a:latin typeface="Calibri"/>
+                <a:latin typeface="Georgia"/>
               </a:rPr>
               <a:t>La sicurezza non è una feature: è una proprietà del sistema.</a:t>
-            </a:r>
-          </a:p>
-        </p:txBody>
-      </p:sp>
-      <p:sp>
-        <p:nvSpPr>
-          <p:cNvPr id="5" name="TextBox 4"/>
-          <p:cNvSpPr txBox="1"/>
-          <p:nvPr/>
-        </p:nvSpPr>
-        <p:spPr>
-          <a:xfrm>
-            <a:off x="2286000" y="5029200"/>
-            <a:ext cx="9144000" cy="457200"/>
-          </a:xfrm>
-          <a:prstGeom prst="rect">
-            <a:avLst/>
-          </a:prstGeom>
-          <a:noFill/>
-        </p:spPr>
-        <p:txBody>
-          <a:bodyPr wrap="square" lIns="45720" rIns="45720" tIns="18288" bIns="18288" anchor="t">
-            <a:spAutoFit/>
-          </a:bodyPr>
-          <a:lstStyle/>
-          <a:p>
-            <a:pPr algn="l"/>
-            <a:r>
-              <a:rPr sz="1600" b="0" i="1">
-                <a:solidFill>
-                  <a:srgbClr val="6B7280"/>
-                </a:solidFill>
-                <a:latin typeface="Calibri"/>
-              </a:rPr>
-              <a:t>— Bruce Schneier</a:t>
             </a:r>
           </a:p>
         </p:txBody>
@@ -6148,13 +9433,13 @@
         </p:nvCxnSpPr>
         <p:spPr>
           <a:xfrm>
-            <a:off x="457200" y="6446520"/>
-            <a:ext cx="11274552" cy="0"/>
+            <a:off x="2286000" y="5029200"/>
+            <a:ext cx="1828800" cy="0"/>
           </a:xfrm>
           <a:prstGeom prst="line">
             <a:avLst/>
           </a:prstGeom>
-          <a:ln w="19050">
+          <a:ln w="38100">
             <a:solidFill>
               <a:srgbClr val="00A0B0"/>
             </a:solidFill>
@@ -6183,8 +9468,8 @@
         </p:nvSpPr>
         <p:spPr>
           <a:xfrm>
-            <a:off x="457200" y="6473952"/>
-            <a:ext cx="7315200" cy="320040"/>
+            <a:off x="2286000" y="5212080"/>
+            <a:ext cx="9144000" cy="457200"/>
           </a:xfrm>
           <a:prstGeom prst="rect">
             <a:avLst/>
@@ -6199,27 +9484,62 @@
           <a:p>
             <a:pPr algn="l"/>
             <a:r>
-              <a:rPr sz="1000" b="0" i="0">
+              <a:rPr sz="1600" b="0" i="1">
                 <a:solidFill>
                   <a:srgbClr val="6B7280"/>
                 </a:solidFill>
                 <a:latin typeface="Calibri"/>
               </a:rPr>
-              <a:t>Secure Coding · Corso IFTS STEM · A. Manneschi</a:t>
-            </a:r>
-          </a:p>
-        </p:txBody>
-      </p:sp>
-      <p:sp>
-        <p:nvSpPr>
-          <p:cNvPr id="8" name="TextBox 7"/>
+              <a:t>— Bruce Schneier</a:t>
+            </a:r>
+          </a:p>
+        </p:txBody>
+      </p:sp>
+      <p:cxnSp>
+        <p:nvCxnSpPr>
+          <p:cNvPr id="8" name="Connector 7"/>
+          <p:cNvCxnSpPr/>
+          <p:nvPr/>
+        </p:nvCxnSpPr>
+        <p:spPr>
+          <a:xfrm>
+            <a:off x="457200" y="6446520"/>
+            <a:ext cx="11274552" cy="0"/>
+          </a:xfrm>
+          <a:prstGeom prst="line">
+            <a:avLst/>
+          </a:prstGeom>
+          <a:ln w="19050">
+            <a:solidFill>
+              <a:srgbClr val="00A0B0"/>
+            </a:solidFill>
+          </a:ln>
+        </p:spPr>
+        <p:style>
+          <a:lnRef idx="2">
+            <a:schemeClr val="accent1"/>
+          </a:lnRef>
+          <a:fillRef idx="0">
+            <a:schemeClr val="accent1"/>
+          </a:fillRef>
+          <a:effectRef idx="1">
+            <a:schemeClr val="accent1"/>
+          </a:effectRef>
+          <a:fontRef idx="minor">
+            <a:schemeClr val="tx1"/>
+          </a:fontRef>
+        </p:style>
+      </p:cxnSp>
+      <p:sp>
+        <p:nvSpPr>
+          <p:cNvPr id="9" name="TextBox 8"/>
           <p:cNvSpPr txBox="1"/>
           <p:nvPr/>
         </p:nvSpPr>
         <p:spPr>
           <a:xfrm>
-            <a:off x="10515600" y="6473952"/>
-            <a:ext cx="1188720" cy="320040"/>
+            <a:off x="457200" y="6473952"/>
+            <a:ext cx="7315200" cy="292608"/>
           </a:xfrm>
           <a:prstGeom prst="rect">
             <a:avLst/>
@@ -6232,6 +9552,41 @@
           </a:bodyPr>
           <a:lstStyle/>
           <a:p>
+            <a:pPr algn="l"/>
+            <a:r>
+              <a:rPr sz="1000" b="0" i="0">
+                <a:solidFill>
+                  <a:srgbClr val="6B7280"/>
+                </a:solidFill>
+                <a:latin typeface="Calibri"/>
+              </a:rPr>
+              <a:t>Secure Coding · Corso IFTS STEM · A. Manneschi · 2024/2025</a:t>
+            </a:r>
+          </a:p>
+        </p:txBody>
+      </p:sp>
+      <p:sp>
+        <p:nvSpPr>
+          <p:cNvPr id="10" name="TextBox 9"/>
+          <p:cNvSpPr txBox="1"/>
+          <p:nvPr/>
+        </p:nvSpPr>
+        <p:spPr>
+          <a:xfrm>
+            <a:off x="10515600" y="6473952"/>
+            <a:ext cx="1188720" cy="292608"/>
+          </a:xfrm>
+          <a:prstGeom prst="rect">
+            <a:avLst/>
+          </a:prstGeom>
+          <a:noFill/>
+        </p:spPr>
+        <p:txBody>
+          <a:bodyPr wrap="square" lIns="45720" rIns="45720" tIns="18288" bIns="18288" anchor="t">
+            <a:spAutoFit/>
+          </a:bodyPr>
+          <a:lstStyle/>
+          <a:p>
             <a:pPr algn="r"/>
             <a:r>
               <a:rPr sz="1000" b="1" i="0">
@@ -6240,7 +9595,7 @@
                 </a:solidFill>
                 <a:latin typeface="Calibri"/>
               </a:rPr>
-              <a:t>L1  ·  6/12</a:t>
+              <a:t>L1  ·  6/14</a:t>
             </a:r>
           </a:p>
         </p:txBody>
@@ -6343,17 +9698,19 @@
       </p:sp>
       <p:sp>
         <p:nvSpPr>
-          <p:cNvPr id="4" name="Rectangle 3"/>
+          <p:cNvPr id="4" name="Rounded Rectangle 3"/>
           <p:cNvSpPr/>
           <p:nvPr/>
         </p:nvSpPr>
         <p:spPr>
           <a:xfrm>
-            <a:off x="457200" y="1097280"/>
+            <a:off x="457200" y="1051560"/>
             <a:ext cx="5486400" cy="640080"/>
           </a:xfrm>
-          <a:prstGeom prst="rect">
-            <a:avLst/>
+          <a:prstGeom prst="roundRect">
+            <a:avLst>
+              <a:gd name="adj" fmla="val 8000"/>
+            </a:avLst>
           </a:prstGeom>
           <a:solidFill>
             <a:srgbClr val="6B7280"/>
@@ -6392,7 +9749,7 @@
         </p:nvSpPr>
         <p:spPr>
           <a:xfrm>
-            <a:off x="457200" y="1097280"/>
+            <a:off x="457200" y="1051560"/>
             <a:ext cx="5486400" cy="640080"/>
           </a:xfrm>
           <a:prstGeom prst="rect">
@@ -6421,22 +9778,24 @@
       </p:sp>
       <p:sp>
         <p:nvSpPr>
-          <p:cNvPr id="6" name="Rectangle 5"/>
+          <p:cNvPr id="6" name="Rounded Rectangle 5"/>
           <p:cNvSpPr/>
           <p:nvPr/>
         </p:nvSpPr>
         <p:spPr>
           <a:xfrm>
             <a:off x="457200" y="1737360"/>
-            <a:ext cx="5486400" cy="4937760"/>
-          </a:xfrm>
-          <a:prstGeom prst="rect">
-            <a:avLst/>
+            <a:ext cx="5486400" cy="4572000"/>
+          </a:xfrm>
+          <a:prstGeom prst="roundRect">
+            <a:avLst>
+              <a:gd name="adj" fmla="val 8000"/>
+            </a:avLst>
           </a:prstGeom>
           <a:solidFill>
-            <a:srgbClr val="F1F4F8"/>
+            <a:srgbClr val="FBFBFD"/>
           </a:solidFill>
-          <a:ln>
+          <a:ln w="25400">
             <a:solidFill>
               <a:srgbClr val="6B7280"/>
             </a:solidFill>
@@ -6473,7 +9832,7 @@
         <p:spPr>
           <a:xfrm>
             <a:off x="640080" y="1874519"/>
-            <a:ext cx="5120640" cy="4937760"/>
+            <a:ext cx="5120640" cy="4572000"/>
           </a:xfrm>
           <a:prstGeom prst="rect">
             <a:avLst/>
@@ -6488,13 +9847,16 @@
           <a:p>
             <a:pPr>
               <a:lnSpc>
-                <a:spcPct val="140000"/>
+                <a:spcPct val="150000"/>
               </a:lnSpc>
+              <a:spcAft>
+                <a:spcPts val="400"/>
+              </a:spcAft>
             </a:pPr>
             <a:r>
               <a:rPr sz="1500" b="1">
                 <a:solidFill>
-                  <a:srgbClr val="00A0B0"/>
+                  <a:srgbClr val="6B7280"/>
                 </a:solidFill>
                 <a:latin typeface="Calibri"/>
               </a:rPr>
@@ -6513,13 +9875,16 @@
           <a:p>
             <a:pPr>
               <a:lnSpc>
-                <a:spcPct val="140000"/>
+                <a:spcPct val="150000"/>
               </a:lnSpc>
+              <a:spcAft>
+                <a:spcPts val="400"/>
+              </a:spcAft>
             </a:pPr>
             <a:r>
               <a:rPr sz="1500" b="1">
                 <a:solidFill>
-                  <a:srgbClr val="00A0B0"/>
+                  <a:srgbClr val="6B7280"/>
                 </a:solidFill>
                 <a:latin typeface="Calibri"/>
               </a:rPr>
@@ -6538,13 +9903,16 @@
           <a:p>
             <a:pPr>
               <a:lnSpc>
-                <a:spcPct val="140000"/>
+                <a:spcPct val="150000"/>
               </a:lnSpc>
+              <a:spcAft>
+                <a:spcPts val="400"/>
+              </a:spcAft>
             </a:pPr>
             <a:r>
               <a:rPr sz="1500" b="1">
                 <a:solidFill>
-                  <a:srgbClr val="00A0B0"/>
+                  <a:srgbClr val="6B7280"/>
                 </a:solidFill>
                 <a:latin typeface="Calibri"/>
               </a:rPr>
@@ -6563,13 +9931,16 @@
           <a:p>
             <a:pPr>
               <a:lnSpc>
-                <a:spcPct val="140000"/>
+                <a:spcPct val="150000"/>
               </a:lnSpc>
+              <a:spcAft>
+                <a:spcPts val="400"/>
+              </a:spcAft>
             </a:pPr>
             <a:r>
               <a:rPr sz="1500" b="1">
                 <a:solidFill>
-                  <a:srgbClr val="00A0B0"/>
+                  <a:srgbClr val="6B7280"/>
                 </a:solidFill>
                 <a:latin typeface="Calibri"/>
               </a:rPr>
@@ -6585,21 +9956,51 @@
               <a:t>Esempio: configurare il firewall</a:t>
             </a:r>
           </a:p>
-        </p:txBody>
-      </p:sp>
-      <p:sp>
-        <p:nvSpPr>
-          <p:cNvPr id="8" name="Rectangle 7"/>
+          <a:p>
+            <a:pPr>
+              <a:lnSpc>
+                <a:spcPct val="150000"/>
+              </a:lnSpc>
+              <a:spcAft>
+                <a:spcPts val="400"/>
+              </a:spcAft>
+            </a:pPr>
+            <a:r>
+              <a:rPr sz="1500" b="1">
+                <a:solidFill>
+                  <a:srgbClr val="6B7280"/>
+                </a:solidFill>
+                <a:latin typeface="Calibri"/>
+              </a:rPr>
+              <a:t>▸  </a:t>
+            </a:r>
+            <a:r>
+              <a:rPr sz="1500">
+                <a:solidFill>
+                  <a:srgbClr val="1A1A2E"/>
+                </a:solidFill>
+                <a:latin typeface="Calibri"/>
+              </a:rPr>
+              <a:t>Strato 1-4 (rete)</a:t>
+            </a:r>
+          </a:p>
+        </p:txBody>
+      </p:sp>
+      <p:sp>
+        <p:nvSpPr>
+          <p:cNvPr id="8" name="Rounded Rectangle 7"/>
           <p:cNvSpPr/>
           <p:nvPr/>
         </p:nvSpPr>
         <p:spPr>
           <a:xfrm>
-            <a:off x="6217920" y="1097280"/>
+            <a:off x="6217920" y="1051560"/>
             <a:ext cx="5486400" cy="640080"/>
           </a:xfrm>
-          <a:prstGeom prst="rect">
-            <a:avLst/>
+          <a:prstGeom prst="roundRect">
+            <a:avLst>
+              <a:gd name="adj" fmla="val 8000"/>
+            </a:avLst>
           </a:prstGeom>
           <a:solidFill>
             <a:srgbClr val="00A0B0"/>
@@ -6638,7 +10039,7 @@
         </p:nvSpPr>
         <p:spPr>
           <a:xfrm>
-            <a:off x="6217920" y="1097280"/>
+            <a:off x="6217920" y="1051560"/>
             <a:ext cx="5486400" cy="640080"/>
           </a:xfrm>
           <a:prstGeom prst="rect">
@@ -6667,22 +10068,24 @@
       </p:sp>
       <p:sp>
         <p:nvSpPr>
-          <p:cNvPr id="10" name="Rectangle 9"/>
+          <p:cNvPr id="10" name="Rounded Rectangle 9"/>
           <p:cNvSpPr/>
           <p:nvPr/>
         </p:nvSpPr>
         <p:spPr>
           <a:xfrm>
             <a:off x="6217920" y="1737360"/>
-            <a:ext cx="5486400" cy="4937760"/>
-          </a:xfrm>
-          <a:prstGeom prst="rect">
-            <a:avLst/>
+            <a:ext cx="5486400" cy="4572000"/>
+          </a:xfrm>
+          <a:prstGeom prst="roundRect">
+            <a:avLst>
+              <a:gd name="adj" fmla="val 8000"/>
+            </a:avLst>
           </a:prstGeom>
           <a:solidFill>
-            <a:srgbClr val="F1F4F8"/>
+            <a:srgbClr val="FBFBFD"/>
           </a:solidFill>
-          <a:ln>
+          <a:ln w="25400">
             <a:solidFill>
               <a:srgbClr val="00A0B0"/>
             </a:solidFill>
@@ -6719,7 +10122,7 @@
         <p:spPr>
           <a:xfrm>
             <a:off x="6400800" y="1874519"/>
-            <a:ext cx="5120640" cy="4937760"/>
+            <a:ext cx="5120640" cy="4572000"/>
           </a:xfrm>
           <a:prstGeom prst="rect">
             <a:avLst/>
@@ -6734,8 +10137,11 @@
           <a:p>
             <a:pPr>
               <a:lnSpc>
-                <a:spcPct val="140000"/>
+                <a:spcPct val="150000"/>
               </a:lnSpc>
+              <a:spcAft>
+                <a:spcPts val="400"/>
+              </a:spcAft>
             </a:pPr>
             <a:r>
               <a:rPr sz="1500" b="1">
@@ -6759,8 +10165,11 @@
           <a:p>
             <a:pPr>
               <a:lnSpc>
-                <a:spcPct val="140000"/>
+                <a:spcPct val="150000"/>
               </a:lnSpc>
+              <a:spcAft>
+                <a:spcPts val="400"/>
+              </a:spcAft>
             </a:pPr>
             <a:r>
               <a:rPr sz="1500" b="1">
@@ -6784,8 +10193,11 @@
           <a:p>
             <a:pPr>
               <a:lnSpc>
-                <a:spcPct val="140000"/>
+                <a:spcPct val="150000"/>
               </a:lnSpc>
+              <a:spcAft>
+                <a:spcPts val="400"/>
+              </a:spcAft>
             </a:pPr>
             <a:r>
               <a:rPr sz="1500" b="1">
@@ -6809,8 +10221,11 @@
           <a:p>
             <a:pPr>
               <a:lnSpc>
-                <a:spcPct val="140000"/>
+                <a:spcPct val="150000"/>
               </a:lnSpc>
+              <a:spcAft>
+                <a:spcPts val="400"/>
+              </a:spcAft>
             </a:pPr>
             <a:r>
               <a:rPr sz="1500" b="1">
@@ -6829,6 +10244,34 @@
                 <a:latin typeface="Calibri"/>
               </a:rPr>
               <a:t>Esempio: prevenire SQL Injection</a:t>
+            </a:r>
+          </a:p>
+          <a:p>
+            <a:pPr>
+              <a:lnSpc>
+                <a:spcPct val="150000"/>
+              </a:lnSpc>
+              <a:spcAft>
+                <a:spcPts val="400"/>
+              </a:spcAft>
+            </a:pPr>
+            <a:r>
+              <a:rPr sz="1500" b="1">
+                <a:solidFill>
+                  <a:srgbClr val="00A0B0"/>
+                </a:solidFill>
+                <a:latin typeface="Calibri"/>
+              </a:rPr>
+              <a:t>▸  </a:t>
+            </a:r>
+            <a:r>
+              <a:rPr sz="1500">
+                <a:solidFill>
+                  <a:srgbClr val="1A1A2E"/>
+                </a:solidFill>
+                <a:latin typeface="Calibri"/>
+              </a:rPr>
+              <a:t>Strato 7 (applicazione)</a:t>
             </a:r>
           </a:p>
         </p:txBody>
@@ -6877,7 +10320,7 @@
         <p:spPr>
           <a:xfrm>
             <a:off x="457200" y="6473952"/>
-            <a:ext cx="7315200" cy="320040"/>
+            <a:ext cx="7315200" cy="292608"/>
           </a:xfrm>
           <a:prstGeom prst="rect">
             <a:avLst/>
@@ -6898,7 +10341,7 @@
                 </a:solidFill>
                 <a:latin typeface="Calibri"/>
               </a:rPr>
-              <a:t>Secure Coding · Corso IFTS STEM · A. Manneschi</a:t>
+              <a:t>Secure Coding · Corso IFTS STEM · A. Manneschi · 2024/2025</a:t>
             </a:r>
           </a:p>
         </p:txBody>
@@ -6912,7 +10355,7 @@
         <p:spPr>
           <a:xfrm>
             <a:off x="10515600" y="6473952"/>
-            <a:ext cx="1188720" cy="320040"/>
+            <a:ext cx="1188720" cy="292608"/>
           </a:xfrm>
           <a:prstGeom prst="rect">
             <a:avLst/>
@@ -6933,7 +10376,7 @@
                 </a:solidFill>
                 <a:latin typeface="Calibri"/>
               </a:rPr>
-              <a:t>L1  ·  7/12</a:t>
+              <a:t>L1  ·  7/14</a:t>
             </a:r>
           </a:p>
         </p:txBody>
@@ -7029,7 +10472,7 @@
                 </a:solidFill>
                 <a:latin typeface="Calibri"/>
               </a:rPr>
-              <a:t>I 5 principi del Secure Coding</a:t>
+              <a:t>🛡  I 5 principi del Secure Coding</a:t>
             </a:r>
           </a:p>
         </p:txBody>
@@ -7042,7 +10485,7 @@
         </p:nvSpPr>
         <p:spPr>
           <a:xfrm>
-            <a:off x="640080" y="1005840"/>
+            <a:off x="640080" y="1097280"/>
             <a:ext cx="10972800" cy="5029200"/>
           </a:xfrm>
           <a:prstGeom prst="rect">
@@ -7060,6 +10503,9 @@
               <a:lnSpc>
                 <a:spcPct val="150000"/>
               </a:lnSpc>
+              <a:spcAft>
+                <a:spcPts val="400"/>
+              </a:spcAft>
             </a:pPr>
             <a:r>
               <a:rPr sz="2000" b="1">
@@ -7085,6 +10531,9 @@
               <a:lnSpc>
                 <a:spcPct val="150000"/>
               </a:lnSpc>
+              <a:spcAft>
+                <a:spcPts val="400"/>
+              </a:spcAft>
             </a:pPr>
             <a:r>
               <a:rPr sz="2000" b="1">
@@ -7110,6 +10559,9 @@
               <a:lnSpc>
                 <a:spcPct val="150000"/>
               </a:lnSpc>
+              <a:spcAft>
+                <a:spcPts val="400"/>
+              </a:spcAft>
             </a:pPr>
             <a:r>
               <a:rPr sz="2000" b="1">
@@ -7135,6 +10587,9 @@
               <a:lnSpc>
                 <a:spcPct val="150000"/>
               </a:lnSpc>
+              <a:spcAft>
+                <a:spcPts val="400"/>
+              </a:spcAft>
             </a:pPr>
             <a:r>
               <a:rPr sz="2000" b="1">
@@ -7160,6 +10615,9 @@
               <a:lnSpc>
                 <a:spcPct val="150000"/>
               </a:lnSpc>
+              <a:spcAft>
+                <a:spcPts val="400"/>
+              </a:spcAft>
             </a:pPr>
             <a:r>
               <a:rPr sz="2000" b="1">
@@ -7177,7 +10635,7 @@
                 </a:solidFill>
                 <a:latin typeface="Calibri"/>
               </a:rPr>
-              <a:t>5. Separation of Duties — mai una persona/processo da solo</a:t>
+              <a:t>5. Separation of Duties — mai una persona da sola</a:t>
             </a:r>
           </a:p>
         </p:txBody>
@@ -7226,7 +10684,7 @@
         <p:spPr>
           <a:xfrm>
             <a:off x="457200" y="6473952"/>
-            <a:ext cx="7315200" cy="320040"/>
+            <a:ext cx="7315200" cy="292608"/>
           </a:xfrm>
           <a:prstGeom prst="rect">
             <a:avLst/>
@@ -7247,7 +10705,7 @@
                 </a:solidFill>
                 <a:latin typeface="Calibri"/>
               </a:rPr>
-              <a:t>Secure Coding · Corso IFTS STEM · A. Manneschi</a:t>
+              <a:t>Secure Coding · Corso IFTS STEM · A. Manneschi · 2024/2025</a:t>
             </a:r>
           </a:p>
         </p:txBody>
@@ -7261,7 +10719,7 @@
         <p:spPr>
           <a:xfrm>
             <a:off x="10515600" y="6473952"/>
-            <a:ext cx="1188720" cy="320040"/>
+            <a:ext cx="1188720" cy="292608"/>
           </a:xfrm>
           <a:prstGeom prst="rect">
             <a:avLst/>
@@ -7282,7 +10740,7 @@
                 </a:solidFill>
                 <a:latin typeface="Calibri"/>
               </a:rPr>
-              <a:t>L1  ·  8/12</a:t>
+              <a:t>L1  ·  8/14</a:t>
             </a:r>
           </a:p>
         </p:txBody>
@@ -7357,7 +10815,7 @@
         <p:spPr>
           <a:xfrm>
             <a:off x="457200" y="164592"/>
-            <a:ext cx="10058400" cy="502920"/>
+            <a:ext cx="10972800" cy="502920"/>
           </a:xfrm>
           <a:prstGeom prst="rect">
             <a:avLst/>
@@ -7378,54 +10836,35 @@
                 </a:solidFill>
                 <a:latin typeface="Calibri"/>
               </a:rPr>
-              <a:t>Esempio: Fail Secure vs Fail Open</a:t>
-            </a:r>
-          </a:p>
-        </p:txBody>
-      </p:sp>
-      <p:sp>
-        <p:nvSpPr>
-          <p:cNvPr id="4" name="Rectangle 3"/>
-          <p:cNvSpPr/>
-          <p:nvPr/>
-        </p:nvSpPr>
-        <p:spPr>
-          <a:xfrm>
-            <a:off x="9875520" y="164592"/>
-            <a:ext cx="2103120" cy="457200"/>
-          </a:xfrm>
-          <a:prstGeom prst="rect">
-            <a:avLst/>
-          </a:prstGeom>
-          <a:solidFill>
-            <a:srgbClr val="E63946"/>
-          </a:solidFill>
-          <a:ln>
-            <a:noFill/>
-          </a:ln>
-        </p:spPr>
-        <p:style>
-          <a:lnRef idx="1">
-            <a:schemeClr val="accent1"/>
-          </a:lnRef>
-          <a:fillRef idx="3">
-            <a:schemeClr val="accent1"/>
-          </a:fillRef>
-          <a:effectRef idx="2">
-            <a:schemeClr val="accent1"/>
-          </a:effectRef>
-          <a:fontRef idx="minor">
-            <a:schemeClr val="lt1"/>
-          </a:fontRef>
-        </p:style>
-        <p:txBody>
-          <a:bodyPr rtlCol="0" anchor="ctr"/>
-          <a:lstStyle/>
-          <a:p>
-            <a:pPr algn="ctr"/>
-          </a:p>
-        </p:txBody>
-      </p:sp>
+              <a:t>Defense in Depth: strati di difesa</a:t>
+            </a:r>
+          </a:p>
+        </p:txBody>
+      </p:sp>
+      <p:pic>
+        <p:nvPicPr>
+          <p:cNvPr id="4" name="Picture 3" descr="cap1_defense_depth.png"/>
+          <p:cNvPicPr>
+            <a:picLocks noChangeAspect="1"/>
+          </p:cNvPicPr>
+          <p:nvPr/>
+        </p:nvPicPr>
+        <p:blipFill>
+          <a:blip r:embed="rId2"/>
+          <a:stretch>
+            <a:fillRect/>
+          </a:stretch>
+        </p:blipFill>
+        <p:spPr>
+          <a:xfrm>
+            <a:off x="640080" y="1097280"/>
+            <a:ext cx="10881360" cy="4572000"/>
+          </a:xfrm>
+          <a:prstGeom prst="rect">
+            <a:avLst/>
+          </a:prstGeom>
+        </p:spPr>
+      </p:pic>
       <p:sp>
         <p:nvSpPr>
           <p:cNvPr id="5" name="TextBox 4"/>
@@ -7434,88 +10873,8 @@
         </p:nvSpPr>
         <p:spPr>
           <a:xfrm>
-            <a:off x="9875520" y="182880"/>
-            <a:ext cx="2103120" cy="457200"/>
-          </a:xfrm>
-          <a:prstGeom prst="rect">
-            <a:avLst/>
-          </a:prstGeom>
-          <a:noFill/>
-        </p:spPr>
-        <p:txBody>
-          <a:bodyPr wrap="square" lIns="45720" rIns="45720" tIns="18288" bIns="18288" anchor="ctr">
-            <a:spAutoFit/>
-          </a:bodyPr>
-          <a:lstStyle/>
-          <a:p>
-            <a:pPr algn="ctr"/>
-            <a:r>
-              <a:rPr sz="1200" b="1" i="0">
-                <a:solidFill>
-                  <a:srgbClr val="FFFFFF"/>
-                </a:solidFill>
-                <a:latin typeface="Calibri"/>
-              </a:rPr>
-              <a:t>🚩 ANTI-PATTERN</a:t>
-            </a:r>
-          </a:p>
-        </p:txBody>
-      </p:sp>
-      <p:sp>
-        <p:nvSpPr>
-          <p:cNvPr id="6" name="Rectangle 5"/>
-          <p:cNvSpPr/>
-          <p:nvPr/>
-        </p:nvSpPr>
-        <p:spPr>
-          <a:xfrm>
-            <a:off x="457200" y="1097280"/>
-            <a:ext cx="11247120" cy="4572000"/>
-          </a:xfrm>
-          <a:prstGeom prst="rect">
-            <a:avLst/>
-          </a:prstGeom>
-          <a:solidFill>
-            <a:srgbClr val="F1F4F8"/>
-          </a:solidFill>
-          <a:ln>
-            <a:solidFill>
-              <a:srgbClr val="E63946"/>
-            </a:solidFill>
-          </a:ln>
-        </p:spPr>
-        <p:style>
-          <a:lnRef idx="1">
-            <a:schemeClr val="accent1"/>
-          </a:lnRef>
-          <a:fillRef idx="3">
-            <a:schemeClr val="accent1"/>
-          </a:fillRef>
-          <a:effectRef idx="2">
-            <a:schemeClr val="accent1"/>
-          </a:effectRef>
-          <a:fontRef idx="minor">
-            <a:schemeClr val="lt1"/>
-          </a:fontRef>
-        </p:style>
-        <p:txBody>
-          <a:bodyPr rtlCol="0" anchor="ctr"/>
-          <a:lstStyle/>
-          <a:p>
-            <a:pPr algn="ctr"/>
-          </a:p>
-        </p:txBody>
-      </p:sp>
-      <p:sp>
-        <p:nvSpPr>
-          <p:cNvPr id="7" name="TextBox 6"/>
-          <p:cNvSpPr txBox="1"/>
-          <p:nvPr/>
-        </p:nvSpPr>
-        <p:spPr>
-          <a:xfrm>
-            <a:off x="640080" y="1280160"/>
-            <a:ext cx="10972800" cy="4206240"/>
+            <a:off x="457200" y="5852160"/>
+            <a:ext cx="11247120" cy="365760"/>
           </a:xfrm>
           <a:prstGeom prst="rect">
             <a:avLst/>
@@ -7528,129 +10887,22 @@
           </a:bodyPr>
           <a:lstStyle/>
           <a:p>
-            <a:pPr algn="l"/>
-            <a:r>
-              <a:rPr sz="1400" b="0" i="0">
-                <a:solidFill>
-                  <a:srgbClr val="1A1A2E"/>
-                </a:solidFill>
-                <a:latin typeface="Consolas"/>
-              </a:rPr>
-              <a:t>try:</a:t>
-            </a:r>
-          </a:p>
-          <a:p>
-            <a:pPr algn="l"/>
-            <a:r>
-              <a:rPr sz="1400" b="0" i="0">
-                <a:solidFill>
-                  <a:srgbClr val="1A1A2E"/>
-                </a:solidFill>
-                <a:latin typeface="Consolas"/>
-              </a:rPr>
-              <a:t>    if not is_authorized(user, resource):</a:t>
-            </a:r>
-          </a:p>
-          <a:p>
-            <a:pPr algn="l"/>
-            <a:r>
-              <a:rPr sz="1400" b="0" i="0">
-                <a:solidFill>
-                  <a:srgbClr val="1A1A2E"/>
-                </a:solidFill>
-                <a:latin typeface="Consolas"/>
-              </a:rPr>
-              <a:t>        return 403</a:t>
-            </a:r>
-          </a:p>
-          <a:p>
-            <a:pPr algn="l"/>
-            <a:r>
-              <a:rPr sz="1400" b="0" i="0">
-                <a:solidFill>
-                  <a:srgbClr val="1A1A2E"/>
-                </a:solidFill>
-                <a:latin typeface="Consolas"/>
-              </a:rPr>
-              <a:t>    return resource</a:t>
-            </a:r>
-          </a:p>
-          <a:p>
-            <a:pPr algn="l"/>
-            <a:r>
-              <a:rPr sz="1400" b="0" i="0">
-                <a:solidFill>
-                  <a:srgbClr val="1A1A2E"/>
-                </a:solidFill>
-                <a:latin typeface="Consolas"/>
-              </a:rPr>
-              <a:t>except Exception:</a:t>
-            </a:r>
-          </a:p>
-          <a:p>
-            <a:pPr algn="l"/>
-            <a:r>
-              <a:rPr sz="1400" b="0" i="0">
-                <a:solidFill>
-                  <a:srgbClr val="1A1A2E"/>
-                </a:solidFill>
-                <a:latin typeface="Consolas"/>
-              </a:rPr>
-              <a:t>    return resource   # 💥 fail OPEN</a:t>
-            </a:r>
-          </a:p>
-          <a:p>
-            <a:pPr algn="l"/>
-            <a:r>
-              <a:rPr sz="1400" b="0" i="0">
-                <a:solidFill>
-                  <a:srgbClr val="1A1A2E"/>
-                </a:solidFill>
-                <a:latin typeface="Consolas"/>
-              </a:rPr>
-              <a:t>                  # se il check si rompe, l'utente entra lo stesso</a:t>
-            </a:r>
-          </a:p>
-        </p:txBody>
-      </p:sp>
-      <p:sp>
-        <p:nvSpPr>
-          <p:cNvPr id="8" name="TextBox 7"/>
-          <p:cNvSpPr txBox="1"/>
-          <p:nvPr/>
-        </p:nvSpPr>
-        <p:spPr>
-          <a:xfrm>
-            <a:off x="457200" y="5852160"/>
-            <a:ext cx="11247120" cy="457200"/>
-          </a:xfrm>
-          <a:prstGeom prst="rect">
-            <a:avLst/>
-          </a:prstGeom>
-          <a:noFill/>
-        </p:spPr>
-        <p:txBody>
-          <a:bodyPr wrap="square" lIns="45720" rIns="45720" tIns="18288" bIns="18288" anchor="t">
-            <a:spAutoFit/>
-          </a:bodyPr>
-          <a:lstStyle/>
-          <a:p>
-            <a:pPr algn="l"/>
-            <a:r>
-              <a:rPr sz="1400" b="1" i="1">
-                <a:solidFill>
-                  <a:srgbClr val="E63946"/>
-                </a:solidFill>
-                <a:latin typeface="Calibri"/>
-              </a:rPr>
-              <a:t>⚠  Codice 'robusto' all'apparenza, in realtà un disastro</a:t>
+            <a:pPr algn="ctr"/>
+            <a:r>
+              <a:rPr sz="1300" b="0" i="1">
+                <a:solidFill>
+                  <a:srgbClr val="6B7280"/>
+                </a:solidFill>
+                <a:latin typeface="Calibri"/>
+              </a:rPr>
+              <a:t>Bucare un solo strato non basta: il sistema resta protetto</a:t>
             </a:r>
           </a:p>
         </p:txBody>
       </p:sp>
       <p:cxnSp>
         <p:nvCxnSpPr>
-          <p:cNvPr id="9" name="Connector 8"/>
+          <p:cNvPr id="6" name="Connector 5"/>
           <p:cNvCxnSpPr/>
           <p:nvPr/>
         </p:nvCxnSpPr>
@@ -7685,14 +10937,14 @@
       </p:cxnSp>
       <p:sp>
         <p:nvSpPr>
-          <p:cNvPr id="10" name="TextBox 9"/>
+          <p:cNvPr id="7" name="TextBox 6"/>
           <p:cNvSpPr txBox="1"/>
           <p:nvPr/>
         </p:nvSpPr>
         <p:spPr>
           <a:xfrm>
             <a:off x="457200" y="6473952"/>
-            <a:ext cx="7315200" cy="320040"/>
+            <a:ext cx="7315200" cy="292608"/>
           </a:xfrm>
           <a:prstGeom prst="rect">
             <a:avLst/>
@@ -7713,21 +10965,21 @@
                 </a:solidFill>
                 <a:latin typeface="Calibri"/>
               </a:rPr>
-              <a:t>Secure Coding · Corso IFTS STEM · A. Manneschi</a:t>
-            </a:r>
-          </a:p>
-        </p:txBody>
-      </p:sp>
-      <p:sp>
-        <p:nvSpPr>
-          <p:cNvPr id="11" name="TextBox 10"/>
+              <a:t>Secure Coding · Corso IFTS STEM · A. Manneschi · 2024/2025</a:t>
+            </a:r>
+          </a:p>
+        </p:txBody>
+      </p:sp>
+      <p:sp>
+        <p:nvSpPr>
+          <p:cNvPr id="8" name="TextBox 7"/>
           <p:cNvSpPr txBox="1"/>
           <p:nvPr/>
         </p:nvSpPr>
         <p:spPr>
           <a:xfrm>
             <a:off x="10515600" y="6473952"/>
-            <a:ext cx="1188720" cy="320040"/>
+            <a:ext cx="1188720" cy="292608"/>
           </a:xfrm>
           <a:prstGeom prst="rect">
             <a:avLst/>
@@ -7748,7 +11000,7 @@
                 </a:solidFill>
                 <a:latin typeface="Calibri"/>
               </a:rPr>
-              <a:t>L1  ·  9/12</a:t>
+              <a:t>L1  ·  9/14</a:t>
             </a:r>
           </a:p>
         </p:txBody>
